--- a/slides/APL_Bootcamp-part-6.pptx
+++ b/slides/APL_Bootcamp-part-6.pptx
@@ -5,10 +5,10 @@
     <p:sldMasterId id="2147483648" r:id="rId1"/>
   </p:sldMasterIdLst>
   <p:notesMasterIdLst>
-    <p:notesMasterId r:id="rId56"/>
+    <p:notesMasterId r:id="rId57"/>
   </p:notesMasterIdLst>
   <p:handoutMasterIdLst>
-    <p:handoutMasterId r:id="rId57"/>
+    <p:handoutMasterId r:id="rId58"/>
   </p:handoutMasterIdLst>
   <p:sldIdLst>
     <p:sldId id="257" r:id="rId2"/>
@@ -38,58 +38,59 @@
     <p:sldId id="282" r:id="rId26"/>
     <p:sldId id="283" r:id="rId27"/>
     <p:sldId id="284" r:id="rId28"/>
-    <p:sldId id="285" r:id="rId29"/>
-    <p:sldId id="286" r:id="rId30"/>
-    <p:sldId id="287" r:id="rId31"/>
-    <p:sldId id="288" r:id="rId32"/>
-    <p:sldId id="289" r:id="rId33"/>
-    <p:sldId id="290" r:id="rId34"/>
-    <p:sldId id="291" r:id="rId35"/>
-    <p:sldId id="304" r:id="rId36"/>
-    <p:sldId id="292" r:id="rId37"/>
-    <p:sldId id="293" r:id="rId38"/>
-    <p:sldId id="294" r:id="rId39"/>
-    <p:sldId id="295" r:id="rId40"/>
-    <p:sldId id="296" r:id="rId41"/>
-    <p:sldId id="297" r:id="rId42"/>
-    <p:sldId id="298" r:id="rId43"/>
-    <p:sldId id="299" r:id="rId44"/>
-    <p:sldId id="311" r:id="rId45"/>
-    <p:sldId id="300" r:id="rId46"/>
-    <p:sldId id="301" r:id="rId47"/>
-    <p:sldId id="302" r:id="rId48"/>
-    <p:sldId id="303" r:id="rId49"/>
-    <p:sldId id="305" r:id="rId50"/>
-    <p:sldId id="306" r:id="rId51"/>
-    <p:sldId id="307" r:id="rId52"/>
-    <p:sldId id="308" r:id="rId53"/>
-    <p:sldId id="309" r:id="rId54"/>
-    <p:sldId id="310" r:id="rId55"/>
+    <p:sldId id="312" r:id="rId29"/>
+    <p:sldId id="285" r:id="rId30"/>
+    <p:sldId id="286" r:id="rId31"/>
+    <p:sldId id="287" r:id="rId32"/>
+    <p:sldId id="288" r:id="rId33"/>
+    <p:sldId id="289" r:id="rId34"/>
+    <p:sldId id="290" r:id="rId35"/>
+    <p:sldId id="291" r:id="rId36"/>
+    <p:sldId id="304" r:id="rId37"/>
+    <p:sldId id="292" r:id="rId38"/>
+    <p:sldId id="293" r:id="rId39"/>
+    <p:sldId id="294" r:id="rId40"/>
+    <p:sldId id="295" r:id="rId41"/>
+    <p:sldId id="296" r:id="rId42"/>
+    <p:sldId id="297" r:id="rId43"/>
+    <p:sldId id="298" r:id="rId44"/>
+    <p:sldId id="299" r:id="rId45"/>
+    <p:sldId id="311" r:id="rId46"/>
+    <p:sldId id="300" r:id="rId47"/>
+    <p:sldId id="301" r:id="rId48"/>
+    <p:sldId id="302" r:id="rId49"/>
+    <p:sldId id="303" r:id="rId50"/>
+    <p:sldId id="305" r:id="rId51"/>
+    <p:sldId id="306" r:id="rId52"/>
+    <p:sldId id="307" r:id="rId53"/>
+    <p:sldId id="308" r:id="rId54"/>
+    <p:sldId id="309" r:id="rId55"/>
+    <p:sldId id="310" r:id="rId56"/>
   </p:sldIdLst>
   <p:sldSz cx="9144000" cy="5143500" type="screen16x9"/>
   <p:notesSz cx="6858000" cy="9144000"/>
   <p:embeddedFontLst>
     <p:embeddedFont>
       <p:font typeface="APL385 Unicode" panose="020B0709000202000203" pitchFamily="49" charset="0"/>
-      <p:regular r:id="rId58"/>
+      <p:regular r:id="rId59"/>
     </p:embeddedFont>
     <p:embeddedFont>
       <p:font typeface="Sarabun" panose="00000500000000000000" pitchFamily="2" charset="-34"/>
-      <p:regular r:id="rId59"/>
-      <p:bold r:id="rId60"/>
-      <p:italic r:id="rId61"/>
-      <p:boldItalic r:id="rId62"/>
+      <p:regular r:id="rId60"/>
+      <p:bold r:id="rId61"/>
+      <p:italic r:id="rId62"/>
+      <p:boldItalic r:id="rId63"/>
     </p:embeddedFont>
     <p:embeddedFont>
       <p:font typeface="Times" panose="02020603050405020304" pitchFamily="18" charset="0"/>
-      <p:regular r:id="rId63"/>
-      <p:bold r:id="rId64"/>
-      <p:italic r:id="rId65"/>
-      <p:boldItalic r:id="rId66"/>
+      <p:regular r:id="rId64"/>
+      <p:bold r:id="rId65"/>
+      <p:italic r:id="rId66"/>
+      <p:boldItalic r:id="rId67"/>
     </p:embeddedFont>
     <p:embeddedFont>
       <p:font typeface="Wingdings 2" panose="05020102010507070707" pitchFamily="18" charset="2"/>
-      <p:regular r:id="rId67"/>
+      <p:regular r:id="rId68"/>
     </p:embeddedFont>
   </p:embeddedFontLst>
   <p:defaultTextStyle>
@@ -306,7 +307,7 @@
               <a:rPr lang="en-GB" smtClean="0">
                 <a:latin typeface="Sarabun" panose="00000500000000000000" pitchFamily="2" charset="-34"/>
               </a:rPr>
-              <a:t>10/08/2025</a:t>
+              <a:t>04/09/2025</a:t>
             </a:fld>
             <a:endParaRPr lang="en-GB" dirty="0">
               <a:latin typeface="Sarabun" panose="00000500000000000000" pitchFamily="2" charset="-34"/>
@@ -484,7 +485,7 @@
             <a:fld id="{CDEAEF8A-5BB8-41C8-B8C2-160617C17EF4}" type="datetimeFigureOut">
               <a:rPr lang="en-GB" smtClean="0"/>
               <a:pPr/>
-              <a:t>10/08/2025</a:t>
+              <a:t>04/09/2025</a:t>
             </a:fld>
             <a:endParaRPr lang="en-GB" dirty="0"/>
           </a:p>
@@ -8375,326 +8376,10 @@
   <p:cSld>
     <p:spTree>
       <p:nvGrpSpPr>
-        <p:cNvPr id="1" name=""/>
-        <p:cNvGrpSpPr/>
-        <p:nvPr/>
-      </p:nvGrpSpPr>
-      <p:grpSpPr>
-        <a:xfrm>
-          <a:off x="0" y="0"/>
-          <a:ext cx="0" cy="0"/>
-          <a:chOff x="0" y="0"/>
-          <a:chExt cx="0" cy="0"/>
-        </a:xfrm>
-      </p:grpSpPr>
-      <p:sp>
-        <p:nvSpPr>
-          <p:cNvPr id="2" name="Content Placeholder 1">
-            <a:extLst>
-              <a:ext uri="{FF2B5EF4-FFF2-40B4-BE49-F238E27FC236}">
-                <a16:creationId xmlns:a16="http://schemas.microsoft.com/office/drawing/2014/main" id="{7D6A2370-E9A2-64F2-93D7-72EBB9E5CDA8}"/>
-              </a:ext>
-            </a:extLst>
-          </p:cNvPr>
-          <p:cNvSpPr>
-            <a:spLocks noGrp="1"/>
-          </p:cNvSpPr>
-          <p:nvPr>
-            <p:ph idx="1"/>
-          </p:nvPr>
-        </p:nvSpPr>
-        <p:spPr/>
-        <p:txBody>
-          <a:bodyPr/>
-          <a:lstStyle/>
-          <a:p>
-            <a:pPr marL="0" indent="0">
-              <a:buNone/>
-            </a:pPr>
-            <a:r>
-              <a:rPr lang="en-GB" dirty="0"/>
-              <a:t>Think!</a:t>
-            </a:r>
-          </a:p>
-        </p:txBody>
-      </p:sp>
-      <p:sp>
-        <p:nvSpPr>
-          <p:cNvPr id="3" name="Title 2">
-            <a:extLst>
-              <a:ext uri="{FF2B5EF4-FFF2-40B4-BE49-F238E27FC236}">
-                <a16:creationId xmlns:a16="http://schemas.microsoft.com/office/drawing/2014/main" id="{A5455B9B-46E7-F936-BE24-E73A0D803421}"/>
-              </a:ext>
-            </a:extLst>
-          </p:cNvPr>
-          <p:cNvSpPr>
-            <a:spLocks noGrp="1"/>
-          </p:cNvSpPr>
-          <p:nvPr>
-            <p:ph type="title"/>
-          </p:nvPr>
-        </p:nvSpPr>
-        <p:spPr/>
-        <p:txBody>
-          <a:bodyPr/>
-          <a:lstStyle/>
-          <a:p>
-            <a:r>
-              <a:rPr lang="en-GB" dirty="0"/>
-              <a:t>Optimisation :While</a:t>
-            </a:r>
-          </a:p>
-        </p:txBody>
-      </p:sp>
-      <p:sp>
-        <p:nvSpPr>
-          <p:cNvPr id="4" name="Media Placeholder 3">
-            <a:extLst>
-              <a:ext uri="{FF2B5EF4-FFF2-40B4-BE49-F238E27FC236}">
-                <a16:creationId xmlns:a16="http://schemas.microsoft.com/office/drawing/2014/main" id="{9601A0DF-B5EC-65B2-3F99-B1470E2407F8}"/>
-              </a:ext>
-            </a:extLst>
-          </p:cNvPr>
-          <p:cNvSpPr>
-            <a:spLocks noGrp="1"/>
-          </p:cNvSpPr>
-          <p:nvPr>
-            <p:ph type="media" sz="quarter" idx="11"/>
-          </p:nvPr>
-        </p:nvSpPr>
-        <p:spPr/>
-        <p:txBody>
-          <a:bodyPr/>
-          <a:lstStyle/>
-          <a:p>
-            <a:endParaRPr lang="en-GB"/>
-          </a:p>
-        </p:txBody>
-      </p:sp>
-      <p:sp>
-        <p:nvSpPr>
-          <p:cNvPr id="5" name="TextBox 4">
-            <a:extLst>
-              <a:ext uri="{FF2B5EF4-FFF2-40B4-BE49-F238E27FC236}">
-                <a16:creationId xmlns:a16="http://schemas.microsoft.com/office/drawing/2014/main" id="{B534EF02-7838-6CC7-F6A6-1BF990B6C4B4}"/>
-              </a:ext>
-            </a:extLst>
-          </p:cNvPr>
-          <p:cNvSpPr txBox="1"/>
-          <p:nvPr/>
-        </p:nvSpPr>
-        <p:spPr>
-          <a:xfrm>
-            <a:off x="1763688" y="2085696"/>
-            <a:ext cx="5832648" cy="1569660"/>
-          </a:xfrm>
-          <a:prstGeom prst="rect">
-            <a:avLst/>
-          </a:prstGeom>
-          <a:noFill/>
-        </p:spPr>
-        <p:txBody>
-          <a:bodyPr wrap="square" numCol="1" rtlCol="0">
-            <a:spAutoFit/>
-          </a:bodyPr>
-          <a:lstStyle/>
-          <a:p>
-            <a:r>
-              <a:rPr lang="en-GB" dirty="0">
-                <a:solidFill>
-                  <a:schemeClr val="tx1">
-                    <a:lumMod val="95000"/>
-                    <a:lumOff val="5000"/>
-                  </a:schemeClr>
-                </a:solidFill>
-                <a:latin typeface="APL385 Unicode" panose="020B0709000202000203" pitchFamily="49" charset="0"/>
-              </a:rPr>
-              <a:t>:While </a:t>
-            </a:r>
-            <a:r>
-              <a:rPr lang="en-GB" dirty="0" err="1">
-                <a:solidFill>
-                  <a:schemeClr val="tx1">
-                    <a:lumMod val="95000"/>
-                    <a:lumOff val="5000"/>
-                  </a:schemeClr>
-                </a:solidFill>
-                <a:latin typeface="APL385 Unicode" panose="020B0709000202000203" pitchFamily="49" charset="0"/>
-              </a:rPr>
-              <a:t>LikelyToBeFalse</a:t>
-            </a:r>
-            <a:endParaRPr lang="en-GB" dirty="0">
-              <a:latin typeface="APL385 Unicode" panose="020B0709000202000203" pitchFamily="49" charset="0"/>
-            </a:endParaRPr>
-          </a:p>
-          <a:p>
-            <a:r>
-              <a:rPr lang="en-GB" dirty="0">
-                <a:solidFill>
-                  <a:schemeClr val="tx1">
-                    <a:lumMod val="95000"/>
-                    <a:lumOff val="5000"/>
-                  </a:schemeClr>
-                </a:solidFill>
-                <a:latin typeface="APL385 Unicode" panose="020B0709000202000203" pitchFamily="49" charset="0"/>
-              </a:rPr>
-              <a:t>:</a:t>
-            </a:r>
-            <a:r>
-              <a:rPr lang="en-GB" dirty="0" err="1">
-                <a:solidFill>
-                  <a:schemeClr val="tx1">
-                    <a:lumMod val="95000"/>
-                    <a:lumOff val="5000"/>
-                  </a:schemeClr>
-                </a:solidFill>
-                <a:latin typeface="APL385 Unicode" panose="020B0709000202000203" pitchFamily="49" charset="0"/>
-              </a:rPr>
-              <a:t>AndIf</a:t>
-            </a:r>
-            <a:r>
-              <a:rPr lang="en-GB" dirty="0">
-                <a:solidFill>
-                  <a:schemeClr val="tx1">
-                    <a:lumMod val="95000"/>
-                    <a:lumOff val="5000"/>
-                  </a:schemeClr>
-                </a:solidFill>
-                <a:latin typeface="APL385 Unicode" panose="020B0709000202000203" pitchFamily="49" charset="0"/>
-              </a:rPr>
-              <a:t> </a:t>
-            </a:r>
-            <a:r>
-              <a:rPr lang="en-GB" dirty="0" err="1">
-                <a:latin typeface="APL385 Unicode" panose="020B0709000202000203" pitchFamily="49" charset="0"/>
-              </a:rPr>
-              <a:t>expensiveTest</a:t>
-            </a:r>
-            <a:endParaRPr lang="en-GB" dirty="0">
-              <a:latin typeface="APL385 Unicode" panose="020B0709000202000203" pitchFamily="49" charset="0"/>
-            </a:endParaRPr>
-          </a:p>
-          <a:p>
-            <a:r>
-              <a:rPr lang="en-GB" dirty="0"/>
-              <a:t>     …</a:t>
-            </a:r>
-          </a:p>
-          <a:p>
-            <a:endParaRPr lang="en-GB" dirty="0"/>
-          </a:p>
-          <a:p>
-            <a:r>
-              <a:rPr lang="en-GB" sz="2400" dirty="0"/>
-              <a:t>Is probably better than:</a:t>
-            </a:r>
-          </a:p>
-        </p:txBody>
-      </p:sp>
-      <p:sp>
-        <p:nvSpPr>
-          <p:cNvPr id="6" name="TextBox 5">
-            <a:extLst>
-              <a:ext uri="{FF2B5EF4-FFF2-40B4-BE49-F238E27FC236}">
-                <a16:creationId xmlns:a16="http://schemas.microsoft.com/office/drawing/2014/main" id="{BF7F48A3-65FC-6C1B-A3C4-C887477430C5}"/>
-              </a:ext>
-            </a:extLst>
-          </p:cNvPr>
-          <p:cNvSpPr txBox="1"/>
-          <p:nvPr/>
-        </p:nvSpPr>
-        <p:spPr>
-          <a:xfrm>
-            <a:off x="1709682" y="3865390"/>
-            <a:ext cx="5832648" cy="646331"/>
-          </a:xfrm>
-          <a:prstGeom prst="rect">
-            <a:avLst/>
-          </a:prstGeom>
-          <a:noFill/>
-        </p:spPr>
-        <p:txBody>
-          <a:bodyPr wrap="square" numCol="1" rtlCol="0">
-            <a:spAutoFit/>
-          </a:bodyPr>
-          <a:lstStyle/>
-          <a:p>
-            <a:r>
-              <a:rPr lang="en-GB" dirty="0">
-                <a:solidFill>
-                  <a:schemeClr val="tx1">
-                    <a:lumMod val="95000"/>
-                    <a:lumOff val="5000"/>
-                  </a:schemeClr>
-                </a:solidFill>
-                <a:latin typeface="APL385 Unicode" panose="020B0709000202000203" pitchFamily="49" charset="0"/>
-              </a:rPr>
-              <a:t>:While </a:t>
-            </a:r>
-            <a:r>
-              <a:rPr lang="en-GB" dirty="0" err="1">
-                <a:solidFill>
-                  <a:schemeClr val="tx1">
-                    <a:lumMod val="95000"/>
-                    <a:lumOff val="5000"/>
-                  </a:schemeClr>
-                </a:solidFill>
-                <a:latin typeface="APL385 Unicode" panose="020B0709000202000203" pitchFamily="49" charset="0"/>
-              </a:rPr>
-              <a:t>LikelyToBeFalse</a:t>
-            </a:r>
-            <a:r>
-              <a:rPr lang="en-GB" dirty="0">
-                <a:solidFill>
-                  <a:schemeClr val="tx1">
-                    <a:lumMod val="95000"/>
-                    <a:lumOff val="5000"/>
-                  </a:schemeClr>
-                </a:solidFill>
-                <a:latin typeface="APL385 Unicode" panose="020B0709000202000203" pitchFamily="49" charset="0"/>
-              </a:rPr>
-              <a:t> ∧ </a:t>
-            </a:r>
-            <a:r>
-              <a:rPr lang="en-GB" dirty="0" err="1">
-                <a:latin typeface="APL385 Unicode" panose="020B0709000202000203" pitchFamily="49" charset="0"/>
-              </a:rPr>
-              <a:t>expensiveTest</a:t>
-            </a:r>
-            <a:endParaRPr lang="en-GB" dirty="0">
-              <a:latin typeface="APL385 Unicode" panose="020B0709000202000203" pitchFamily="49" charset="0"/>
-            </a:endParaRPr>
-          </a:p>
-          <a:p>
-            <a:r>
-              <a:rPr lang="en-GB" dirty="0"/>
-              <a:t>     …</a:t>
-            </a:r>
-          </a:p>
-        </p:txBody>
-      </p:sp>
-    </p:spTree>
-    <p:extLst>
-      <p:ext uri="{BB962C8B-B14F-4D97-AF65-F5344CB8AC3E}">
-        <p14:creationId xmlns:p14="http://schemas.microsoft.com/office/powerpoint/2010/main" val="2113042019"/>
-      </p:ext>
-    </p:extLst>
-  </p:cSld>
-  <p:clrMapOvr>
-    <a:masterClrMapping/>
-  </p:clrMapOvr>
-</p:sld>
-</file>
-
-<file path=ppt/slides/slide29.xml><?xml version="1.0" encoding="utf-8"?>
-<p:sld xmlns:a="http://schemas.openxmlformats.org/drawingml/2006/main" xmlns:r="http://schemas.openxmlformats.org/officeDocument/2006/relationships" xmlns:p="http://schemas.openxmlformats.org/presentationml/2006/main">
-  <p:cSld>
-    <p:spTree>
-      <p:nvGrpSpPr>
         <p:cNvPr id="1" name="">
           <a:extLst>
             <a:ext uri="{FF2B5EF4-FFF2-40B4-BE49-F238E27FC236}">
-              <a16:creationId xmlns:a16="http://schemas.microsoft.com/office/drawing/2014/main" id="{90FB8215-FA73-8D1D-E0CA-6A7E6511FABA}"/>
+              <a16:creationId xmlns:a16="http://schemas.microsoft.com/office/drawing/2014/main" id="{D5271846-F85F-008E-97D3-2634B4E375D7}"/>
             </a:ext>
           </a:extLst>
         </p:cNvPr>
@@ -8711,10 +8396,612 @@
       </p:grpSpPr>
       <p:sp>
         <p:nvSpPr>
+          <p:cNvPr id="3" name="Title 2">
+            <a:extLst>
+              <a:ext uri="{FF2B5EF4-FFF2-40B4-BE49-F238E27FC236}">
+                <a16:creationId xmlns:a16="http://schemas.microsoft.com/office/drawing/2014/main" id="{8AC74478-AE5A-35F8-50EE-76094DB730A0}"/>
+              </a:ext>
+            </a:extLst>
+          </p:cNvPr>
+          <p:cNvSpPr>
+            <a:spLocks noGrp="1"/>
+          </p:cNvSpPr>
+          <p:nvPr>
+            <p:ph type="title"/>
+          </p:nvPr>
+        </p:nvSpPr>
+        <p:spPr/>
+        <p:txBody>
+          <a:bodyPr/>
+          <a:lstStyle/>
+          <a:p>
+            <a:r>
+              <a:rPr lang="en-GB" dirty="0"/>
+              <a:t>:While … :OrIf … :</a:t>
+            </a:r>
+            <a:r>
+              <a:rPr lang="en-GB" dirty="0" err="1"/>
+              <a:t>EndWhile</a:t>
+            </a:r>
+            <a:endParaRPr lang="en-GB" dirty="0"/>
+          </a:p>
+        </p:txBody>
+      </p:sp>
+      <p:sp>
+        <p:nvSpPr>
+          <p:cNvPr id="4" name="Media Placeholder 3">
+            <a:extLst>
+              <a:ext uri="{FF2B5EF4-FFF2-40B4-BE49-F238E27FC236}">
+                <a16:creationId xmlns:a16="http://schemas.microsoft.com/office/drawing/2014/main" id="{D08F3E80-1744-9705-28C7-753E0D40F3FD}"/>
+              </a:ext>
+            </a:extLst>
+          </p:cNvPr>
+          <p:cNvSpPr>
+            <a:spLocks noGrp="1"/>
+          </p:cNvSpPr>
+          <p:nvPr>
+            <p:ph type="media" sz="quarter" idx="11"/>
+          </p:nvPr>
+        </p:nvSpPr>
+        <p:spPr/>
+        <p:txBody>
+          <a:bodyPr/>
+          <a:lstStyle/>
+          <a:p>
+            <a:endParaRPr lang="en-GB"/>
+          </a:p>
+        </p:txBody>
+      </p:sp>
+      <p:sp>
+        <p:nvSpPr>
+          <p:cNvPr id="5" name="TextBox 4">
+            <a:extLst>
+              <a:ext uri="{FF2B5EF4-FFF2-40B4-BE49-F238E27FC236}">
+                <a16:creationId xmlns:a16="http://schemas.microsoft.com/office/drawing/2014/main" id="{E41C75FE-C623-75D8-BBD2-F46CCDB84367}"/>
+              </a:ext>
+            </a:extLst>
+          </p:cNvPr>
+          <p:cNvSpPr txBox="1"/>
+          <p:nvPr/>
+        </p:nvSpPr>
+        <p:spPr>
+          <a:xfrm>
+            <a:off x="51887" y="1569732"/>
+            <a:ext cx="3454656" cy="1938992"/>
+          </a:xfrm>
+          <a:prstGeom prst="rect">
+            <a:avLst/>
+          </a:prstGeom>
+          <a:noFill/>
+        </p:spPr>
+        <p:txBody>
+          <a:bodyPr wrap="square" numCol="1" rtlCol="0">
+            <a:spAutoFit/>
+          </a:bodyPr>
+          <a:lstStyle/>
+          <a:p>
+            <a:pPr lvl="0" eaLnBrk="0" fontAlgn="base" hangingPunct="0">
+              <a:spcBef>
+                <a:spcPct val="0"/>
+              </a:spcBef>
+              <a:spcAft>
+                <a:spcPct val="0"/>
+              </a:spcAft>
+            </a:pPr>
+            <a:r>
+              <a:rPr lang="en-US" altLang="en-US" sz="2400" dirty="0">
+                <a:solidFill>
+                  <a:srgbClr val="800000"/>
+                </a:solidFill>
+                <a:latin typeface="APL385 Unicode" panose="020B0709000202000203" pitchFamily="49" charset="0"/>
+              </a:rPr>
+              <a:t>:If</a:t>
+            </a:r>
+            <a:r>
+              <a:rPr lang="en-US" altLang="en-US" sz="2400" dirty="0">
+                <a:solidFill>
+                  <a:srgbClr val="000000"/>
+                </a:solidFill>
+                <a:latin typeface="APL385 Unicode" panose="020B0709000202000203" pitchFamily="49" charset="0"/>
+              </a:rPr>
+              <a:t> a</a:t>
+            </a:r>
+            <a:br>
+              <a:rPr lang="en-US" altLang="en-US" sz="2400" dirty="0">
+                <a:latin typeface="APL385 Unicode" panose="020B0709000202000203" pitchFamily="49" charset="0"/>
+              </a:rPr>
+            </a:br>
+            <a:r>
+              <a:rPr lang="en-US" altLang="en-US" sz="2400" dirty="0">
+                <a:latin typeface="APL385 Unicode" panose="020B0709000202000203" pitchFamily="49" charset="0"/>
+              </a:rPr>
+              <a:t>    </a:t>
+            </a:r>
+            <a:r>
+              <a:rPr lang="en-US" altLang="en-US" sz="2400" dirty="0">
+                <a:solidFill>
+                  <a:srgbClr val="008080"/>
+                </a:solidFill>
+                <a:latin typeface="APL385 Unicode" panose="020B0709000202000203" pitchFamily="49" charset="0"/>
+              </a:rPr>
+              <a:t>'a is true'</a:t>
+            </a:r>
+            <a:br>
+              <a:rPr lang="en-US" altLang="en-US" sz="2400" dirty="0">
+                <a:latin typeface="APL385 Unicode" panose="020B0709000202000203" pitchFamily="49" charset="0"/>
+              </a:rPr>
+            </a:br>
+            <a:r>
+              <a:rPr lang="en-US" altLang="en-US" sz="2400" dirty="0">
+                <a:solidFill>
+                  <a:srgbClr val="800000"/>
+                </a:solidFill>
+                <a:latin typeface="APL385 Unicode" panose="020B0709000202000203" pitchFamily="49" charset="0"/>
+              </a:rPr>
+              <a:t>:Else</a:t>
+            </a:r>
+            <a:br>
+              <a:rPr lang="en-US" altLang="en-US" sz="2400" dirty="0">
+                <a:latin typeface="APL385 Unicode" panose="020B0709000202000203" pitchFamily="49" charset="0"/>
+              </a:rPr>
+            </a:br>
+            <a:r>
+              <a:rPr lang="en-US" altLang="en-US" sz="2400" dirty="0">
+                <a:latin typeface="APL385 Unicode" panose="020B0709000202000203" pitchFamily="49" charset="0"/>
+              </a:rPr>
+              <a:t>    </a:t>
+            </a:r>
+            <a:r>
+              <a:rPr lang="en-US" altLang="en-US" sz="2400" dirty="0">
+                <a:solidFill>
+                  <a:srgbClr val="008080"/>
+                </a:solidFill>
+                <a:latin typeface="APL385 Unicode" panose="020B0709000202000203" pitchFamily="49" charset="0"/>
+              </a:rPr>
+              <a:t>'a is false'</a:t>
+            </a:r>
+            <a:br>
+              <a:rPr lang="en-US" altLang="en-US" sz="2400" dirty="0">
+                <a:latin typeface="APL385 Unicode" panose="020B0709000202000203" pitchFamily="49" charset="0"/>
+              </a:rPr>
+            </a:br>
+            <a:r>
+              <a:rPr lang="en-US" altLang="en-US" sz="2400" dirty="0">
+                <a:solidFill>
+                  <a:srgbClr val="800000"/>
+                </a:solidFill>
+                <a:latin typeface="APL385 Unicode" panose="020B0709000202000203" pitchFamily="49" charset="0"/>
+              </a:rPr>
+              <a:t>:</a:t>
+            </a:r>
+            <a:r>
+              <a:rPr lang="en-US" altLang="en-US" sz="2400" dirty="0" err="1">
+                <a:solidFill>
+                  <a:srgbClr val="800000"/>
+                </a:solidFill>
+                <a:latin typeface="APL385 Unicode" panose="020B0709000202000203" pitchFamily="49" charset="0"/>
+              </a:rPr>
+              <a:t>EndIf</a:t>
+            </a:r>
+            <a:r>
+              <a:rPr lang="en-US" altLang="en-US" sz="2400" dirty="0">
+                <a:latin typeface="APL385 Unicode" panose="020B0709000202000203" pitchFamily="49" charset="0"/>
+              </a:rPr>
+              <a:t> </a:t>
+            </a:r>
+            <a:endParaRPr lang="en-US" altLang="en-US" sz="4800" dirty="0">
+              <a:latin typeface="APL385 Unicode" panose="020B0709000202000203" pitchFamily="49" charset="0"/>
+            </a:endParaRPr>
+          </a:p>
+        </p:txBody>
+      </p:sp>
+      <p:sp>
+        <p:nvSpPr>
+          <p:cNvPr id="9" name="TextBox 8">
+            <a:extLst>
+              <a:ext uri="{FF2B5EF4-FFF2-40B4-BE49-F238E27FC236}">
+                <a16:creationId xmlns:a16="http://schemas.microsoft.com/office/drawing/2014/main" id="{936F5D97-2B65-7DF2-0DAF-1BE833B84303}"/>
+              </a:ext>
+            </a:extLst>
+          </p:cNvPr>
+          <p:cNvSpPr txBox="1"/>
+          <p:nvPr/>
+        </p:nvSpPr>
+        <p:spPr>
+          <a:xfrm>
+            <a:off x="914405" y="1102469"/>
+            <a:ext cx="1162498" cy="369332"/>
+          </a:xfrm>
+          <a:prstGeom prst="rect">
+            <a:avLst/>
+          </a:prstGeom>
+          <a:noFill/>
+        </p:spPr>
+        <p:txBody>
+          <a:bodyPr wrap="none" rtlCol="0">
+            <a:spAutoFit/>
+          </a:bodyPr>
+          <a:lstStyle/>
+          <a:p>
+            <a:r>
+              <a:rPr lang="en-GB" dirty="0"/>
+              <a:t>Normally:</a:t>
+            </a:r>
+          </a:p>
+        </p:txBody>
+      </p:sp>
+      <p:sp>
+        <p:nvSpPr>
+          <p:cNvPr id="10" name="TextBox 9">
+            <a:extLst>
+              <a:ext uri="{FF2B5EF4-FFF2-40B4-BE49-F238E27FC236}">
+                <a16:creationId xmlns:a16="http://schemas.microsoft.com/office/drawing/2014/main" id="{1D432D93-3F82-98D5-D16C-849D4832F85B}"/>
+              </a:ext>
+            </a:extLst>
+          </p:cNvPr>
+          <p:cNvSpPr txBox="1"/>
+          <p:nvPr/>
+        </p:nvSpPr>
+        <p:spPr>
+          <a:xfrm>
+            <a:off x="3761362" y="1569732"/>
+            <a:ext cx="5337241" cy="2677656"/>
+          </a:xfrm>
+          <a:prstGeom prst="rect">
+            <a:avLst/>
+          </a:prstGeom>
+          <a:noFill/>
+        </p:spPr>
+        <p:txBody>
+          <a:bodyPr wrap="square" numCol="1" rtlCol="0">
+            <a:spAutoFit/>
+          </a:bodyPr>
+          <a:lstStyle/>
+          <a:p>
+            <a:pPr lvl="0" eaLnBrk="0" fontAlgn="base" hangingPunct="0">
+              <a:spcBef>
+                <a:spcPct val="0"/>
+              </a:spcBef>
+              <a:spcAft>
+                <a:spcPct val="0"/>
+              </a:spcAft>
+            </a:pPr>
+            <a:r>
+              <a:rPr lang="en-US" altLang="en-US" sz="2400" dirty="0">
+                <a:solidFill>
+                  <a:srgbClr val="800000"/>
+                </a:solidFill>
+                <a:latin typeface="APL385 Unicode" panose="020B0709000202000203" pitchFamily="49" charset="0"/>
+              </a:rPr>
+              <a:t>:If</a:t>
+            </a:r>
+            <a:r>
+              <a:rPr lang="en-US" altLang="en-US" sz="2400" dirty="0">
+                <a:solidFill>
+                  <a:srgbClr val="000000"/>
+                </a:solidFill>
+                <a:latin typeface="APL385 Unicode" panose="020B0709000202000203" pitchFamily="49" charset="0"/>
+              </a:rPr>
+              <a:t> a</a:t>
+            </a:r>
+            <a:br>
+              <a:rPr lang="en-US" altLang="en-US" sz="2400" dirty="0">
+                <a:latin typeface="APL385 Unicode" panose="020B0709000202000203" pitchFamily="49" charset="0"/>
+              </a:rPr>
+            </a:br>
+            <a:r>
+              <a:rPr lang="en-US" altLang="en-US" sz="2400" dirty="0">
+                <a:latin typeface="APL385 Unicode" panose="020B0709000202000203" pitchFamily="49" charset="0"/>
+              </a:rPr>
+              <a:t>    </a:t>
+            </a:r>
+            <a:r>
+              <a:rPr lang="en-US" altLang="en-US" sz="2400" dirty="0">
+                <a:solidFill>
+                  <a:srgbClr val="008080"/>
+                </a:solidFill>
+                <a:latin typeface="APL385 Unicode" panose="020B0709000202000203" pitchFamily="49" charset="0"/>
+              </a:rPr>
+              <a:t>'a is false'</a:t>
+            </a:r>
+            <a:br>
+              <a:rPr lang="en-US" altLang="en-US" sz="2400" dirty="0">
+                <a:latin typeface="APL385 Unicode" panose="020B0709000202000203" pitchFamily="49" charset="0"/>
+              </a:rPr>
+            </a:br>
+            <a:r>
+              <a:rPr lang="en-US" altLang="en-US" sz="2400" dirty="0">
+                <a:solidFill>
+                  <a:srgbClr val="800000"/>
+                </a:solidFill>
+                <a:latin typeface="APL385 Unicode" panose="020B0709000202000203" pitchFamily="49" charset="0"/>
+              </a:rPr>
+              <a:t>:OrIf</a:t>
+            </a:r>
+            <a:r>
+              <a:rPr lang="en-US" altLang="en-US" sz="2400" dirty="0">
+                <a:solidFill>
+                  <a:srgbClr val="000000"/>
+                </a:solidFill>
+                <a:latin typeface="APL385 Unicode" panose="020B0709000202000203" pitchFamily="49" charset="0"/>
+              </a:rPr>
+              <a:t> b</a:t>
+            </a:r>
+            <a:br>
+              <a:rPr lang="en-US" altLang="en-US" sz="2400" dirty="0">
+                <a:latin typeface="APL385 Unicode" panose="020B0709000202000203" pitchFamily="49" charset="0"/>
+              </a:rPr>
+            </a:br>
+            <a:r>
+              <a:rPr lang="en-US" altLang="en-US" sz="2400" dirty="0">
+                <a:latin typeface="APL385 Unicode" panose="020B0709000202000203" pitchFamily="49" charset="0"/>
+              </a:rPr>
+              <a:t>    </a:t>
+            </a:r>
+            <a:r>
+              <a:rPr lang="en-US" altLang="en-US" sz="2400" dirty="0">
+                <a:solidFill>
+                  <a:srgbClr val="008080"/>
+                </a:solidFill>
+                <a:latin typeface="APL385 Unicode" panose="020B0709000202000203" pitchFamily="49" charset="0"/>
+              </a:rPr>
+              <a:t>'a is true or b is true'</a:t>
+            </a:r>
+            <a:br>
+              <a:rPr lang="en-US" altLang="en-US" sz="2400" dirty="0">
+                <a:latin typeface="APL385 Unicode" panose="020B0709000202000203" pitchFamily="49" charset="0"/>
+              </a:rPr>
+            </a:br>
+            <a:r>
+              <a:rPr lang="en-US" altLang="en-US" sz="2400" dirty="0">
+                <a:solidFill>
+                  <a:srgbClr val="800000"/>
+                </a:solidFill>
+                <a:latin typeface="APL385 Unicode" panose="020B0709000202000203" pitchFamily="49" charset="0"/>
+              </a:rPr>
+              <a:t>:Else</a:t>
+            </a:r>
+            <a:br>
+              <a:rPr lang="en-US" altLang="en-US" sz="2400" dirty="0">
+                <a:latin typeface="APL385 Unicode" panose="020B0709000202000203" pitchFamily="49" charset="0"/>
+              </a:rPr>
+            </a:br>
+            <a:r>
+              <a:rPr lang="en-US" altLang="en-US" sz="2400" dirty="0">
+                <a:latin typeface="APL385 Unicode" panose="020B0709000202000203" pitchFamily="49" charset="0"/>
+              </a:rPr>
+              <a:t>    </a:t>
+            </a:r>
+            <a:r>
+              <a:rPr lang="en-US" altLang="en-US" sz="2400" dirty="0">
+                <a:solidFill>
+                  <a:srgbClr val="008080"/>
+                </a:solidFill>
+                <a:latin typeface="APL385 Unicode" panose="020B0709000202000203" pitchFamily="49" charset="0"/>
+              </a:rPr>
+              <a:t>'neither a nor b'</a:t>
+            </a:r>
+            <a:br>
+              <a:rPr lang="en-US" altLang="en-US" sz="2400" dirty="0">
+                <a:latin typeface="APL385 Unicode" panose="020B0709000202000203" pitchFamily="49" charset="0"/>
+              </a:rPr>
+            </a:br>
+            <a:r>
+              <a:rPr lang="en-US" altLang="en-US" sz="2400" dirty="0">
+                <a:solidFill>
+                  <a:srgbClr val="800000"/>
+                </a:solidFill>
+                <a:latin typeface="APL385 Unicode" panose="020B0709000202000203" pitchFamily="49" charset="0"/>
+              </a:rPr>
+              <a:t>:</a:t>
+            </a:r>
+            <a:r>
+              <a:rPr lang="en-US" altLang="en-US" sz="2400" dirty="0" err="1">
+                <a:solidFill>
+                  <a:srgbClr val="800000"/>
+                </a:solidFill>
+                <a:latin typeface="APL385 Unicode" panose="020B0709000202000203" pitchFamily="49" charset="0"/>
+              </a:rPr>
+              <a:t>EndIf</a:t>
+            </a:r>
+            <a:r>
+              <a:rPr lang="en-US" altLang="en-US" sz="2400" dirty="0">
+                <a:latin typeface="APL385 Unicode" panose="020B0709000202000203" pitchFamily="49" charset="0"/>
+              </a:rPr>
+              <a:t> </a:t>
+            </a:r>
+            <a:endParaRPr lang="en-US" altLang="en-US" sz="4800" dirty="0">
+              <a:latin typeface="APL385 Unicode" panose="020B0709000202000203" pitchFamily="49" charset="0"/>
+            </a:endParaRPr>
+          </a:p>
+        </p:txBody>
+      </p:sp>
+      <p:sp>
+        <p:nvSpPr>
+          <p:cNvPr id="11" name="TextBox 10">
+            <a:extLst>
+              <a:ext uri="{FF2B5EF4-FFF2-40B4-BE49-F238E27FC236}">
+                <a16:creationId xmlns:a16="http://schemas.microsoft.com/office/drawing/2014/main" id="{535DAE61-E24D-91C6-647D-770F15E80103}"/>
+              </a:ext>
+            </a:extLst>
+          </p:cNvPr>
+          <p:cNvSpPr txBox="1"/>
+          <p:nvPr/>
+        </p:nvSpPr>
+        <p:spPr>
+          <a:xfrm>
+            <a:off x="5066775" y="1102469"/>
+            <a:ext cx="1486304" cy="369332"/>
+          </a:xfrm>
+          <a:prstGeom prst="rect">
+            <a:avLst/>
+          </a:prstGeom>
+          <a:noFill/>
+        </p:spPr>
+        <p:txBody>
+          <a:bodyPr wrap="none" rtlCol="0">
+            <a:spAutoFit/>
+          </a:bodyPr>
+          <a:lstStyle/>
+          <a:p>
+            <a:r>
+              <a:rPr lang="en-GB" dirty="0"/>
+              <a:t>Using </a:t>
+            </a:r>
+            <a:r>
+              <a:rPr lang="en-GB" dirty="0">
+                <a:solidFill>
+                  <a:srgbClr val="FF6600"/>
+                </a:solidFill>
+                <a:latin typeface="APL385 Unicode" panose="020B0709000202000203" pitchFamily="49" charset="0"/>
+              </a:rPr>
+              <a:t>:OrIf</a:t>
+            </a:r>
+          </a:p>
+        </p:txBody>
+      </p:sp>
+    </p:spTree>
+    <p:extLst>
+      <p:ext uri="{BB962C8B-B14F-4D97-AF65-F5344CB8AC3E}">
+        <p14:creationId xmlns:p14="http://schemas.microsoft.com/office/powerpoint/2010/main" val="1220074972"/>
+      </p:ext>
+    </p:extLst>
+  </p:cSld>
+  <p:clrMapOvr>
+    <a:masterClrMapping/>
+  </p:clrMapOvr>
+  <p:timing>
+    <p:tnLst>
+      <p:par>
+        <p:cTn id="1" dur="indefinite" restart="never" nodeType="tmRoot">
+          <p:childTnLst>
+            <p:seq concurrent="1" nextAc="seek">
+              <p:cTn id="2" dur="indefinite" nodeType="mainSeq">
+                <p:childTnLst>
+                  <p:par>
+                    <p:cTn id="3" fill="hold">
+                      <p:stCondLst>
+                        <p:cond delay="indefinite"/>
+                      </p:stCondLst>
+                      <p:childTnLst>
+                        <p:par>
+                          <p:cTn id="4" fill="hold">
+                            <p:stCondLst>
+                              <p:cond delay="0"/>
+                            </p:stCondLst>
+                            <p:childTnLst>
+                              <p:par>
+                                <p:cTn id="5" presetID="1" presetClass="entr" presetSubtype="0" fill="hold" grpId="0" nodeType="clickEffect">
+                                  <p:stCondLst>
+                                    <p:cond delay="0"/>
+                                  </p:stCondLst>
+                                  <p:childTnLst>
+                                    <p:set>
+                                      <p:cBhvr>
+                                        <p:cTn id="6" dur="1" fill="hold">
+                                          <p:stCondLst>
+                                            <p:cond delay="0"/>
+                                          </p:stCondLst>
+                                        </p:cTn>
+                                        <p:tgtEl>
+                                          <p:spTgt spid="11"/>
+                                        </p:tgtEl>
+                                        <p:attrNameLst>
+                                          <p:attrName>style.visibility</p:attrName>
+                                        </p:attrNameLst>
+                                      </p:cBhvr>
+                                      <p:to>
+                                        <p:strVal val="visible"/>
+                                      </p:to>
+                                    </p:set>
+                                  </p:childTnLst>
+                                </p:cTn>
+                              </p:par>
+                              <p:par>
+                                <p:cTn id="7" presetID="1" presetClass="entr" presetSubtype="0" fill="hold" grpId="0" nodeType="withEffect">
+                                  <p:stCondLst>
+                                    <p:cond delay="0"/>
+                                  </p:stCondLst>
+                                  <p:childTnLst>
+                                    <p:set>
+                                      <p:cBhvr>
+                                        <p:cTn id="8" dur="1" fill="hold">
+                                          <p:stCondLst>
+                                            <p:cond delay="0"/>
+                                          </p:stCondLst>
+                                        </p:cTn>
+                                        <p:tgtEl>
+                                          <p:spTgt spid="10"/>
+                                        </p:tgtEl>
+                                        <p:attrNameLst>
+                                          <p:attrName>style.visibility</p:attrName>
+                                        </p:attrNameLst>
+                                      </p:cBhvr>
+                                      <p:to>
+                                        <p:strVal val="visible"/>
+                                      </p:to>
+                                    </p:set>
+                                  </p:childTnLst>
+                                </p:cTn>
+                              </p:par>
+                            </p:childTnLst>
+                          </p:cTn>
+                        </p:par>
+                      </p:childTnLst>
+                    </p:cTn>
+                  </p:par>
+                </p:childTnLst>
+              </p:cTn>
+              <p:prevCondLst>
+                <p:cond evt="onPrev" delay="0">
+                  <p:tgtEl>
+                    <p:sldTgt/>
+                  </p:tgtEl>
+                </p:cond>
+              </p:prevCondLst>
+              <p:nextCondLst>
+                <p:cond evt="onNext" delay="0">
+                  <p:tgtEl>
+                    <p:sldTgt/>
+                  </p:tgtEl>
+                </p:cond>
+              </p:nextCondLst>
+            </p:seq>
+          </p:childTnLst>
+        </p:cTn>
+      </p:par>
+    </p:tnLst>
+    <p:bldLst>
+      <p:bldP spid="10" grpId="0"/>
+      <p:bldP spid="11" grpId="0"/>
+    </p:bldLst>
+  </p:timing>
+</p:sld>
+</file>
+
+<file path=ppt/slides/slide29.xml><?xml version="1.0" encoding="utf-8"?>
+<p:sld xmlns:a="http://schemas.openxmlformats.org/drawingml/2006/main" xmlns:r="http://schemas.openxmlformats.org/officeDocument/2006/relationships" xmlns:p="http://schemas.openxmlformats.org/presentationml/2006/main">
+  <p:cSld>
+    <p:spTree>
+      <p:nvGrpSpPr>
+        <p:cNvPr id="1" name=""/>
+        <p:cNvGrpSpPr/>
+        <p:nvPr/>
+      </p:nvGrpSpPr>
+      <p:grpSpPr>
+        <a:xfrm>
+          <a:off x="0" y="0"/>
+          <a:ext cx="0" cy="0"/>
+          <a:chOff x="0" y="0"/>
+          <a:chExt cx="0" cy="0"/>
+        </a:xfrm>
+      </p:grpSpPr>
+      <p:sp>
+        <p:nvSpPr>
           <p:cNvPr id="2" name="Content Placeholder 1">
             <a:extLst>
               <a:ext uri="{FF2B5EF4-FFF2-40B4-BE49-F238E27FC236}">
-                <a16:creationId xmlns:a16="http://schemas.microsoft.com/office/drawing/2014/main" id="{93772D0F-58A7-D56A-85F4-074794228336}"/>
+                <a16:creationId xmlns:a16="http://schemas.microsoft.com/office/drawing/2014/main" id="{7D6A2370-E9A2-64F2-93D7-72EBB9E5CDA8}"/>
               </a:ext>
             </a:extLst>
           </p:cNvPr>
@@ -8735,7 +9022,7 @@
             </a:pPr>
             <a:r>
               <a:rPr lang="en-GB" dirty="0"/>
-              <a:t>You will often see:</a:t>
+              <a:t>Think!</a:t>
             </a:r>
           </a:p>
         </p:txBody>
@@ -8745,7 +9032,7 @@
           <p:cNvPr id="3" name="Title 2">
             <a:extLst>
               <a:ext uri="{FF2B5EF4-FFF2-40B4-BE49-F238E27FC236}">
-                <a16:creationId xmlns:a16="http://schemas.microsoft.com/office/drawing/2014/main" id="{E157F060-7D6E-6CEF-0BE0-2D33DBEE6167}"/>
+                <a16:creationId xmlns:a16="http://schemas.microsoft.com/office/drawing/2014/main" id="{A5455B9B-46E7-F936-BE24-E73A0D803421}"/>
               </a:ext>
             </a:extLst>
           </p:cNvPr>
@@ -8773,7 +9060,7 @@
           <p:cNvPr id="4" name="Media Placeholder 3">
             <a:extLst>
               <a:ext uri="{FF2B5EF4-FFF2-40B4-BE49-F238E27FC236}">
-                <a16:creationId xmlns:a16="http://schemas.microsoft.com/office/drawing/2014/main" id="{8F2A7402-BCCE-5F71-346F-81CCCC81CAFB}"/>
+                <a16:creationId xmlns:a16="http://schemas.microsoft.com/office/drawing/2014/main" id="{9601A0DF-B5EC-65B2-3F99-B1470E2407F8}"/>
               </a:ext>
             </a:extLst>
           </p:cNvPr>
@@ -8795,10 +9082,10 @@
       </p:sp>
       <p:sp>
         <p:nvSpPr>
-          <p:cNvPr id="7" name="TextBox 6">
-            <a:extLst>
-              <a:ext uri="{FF2B5EF4-FFF2-40B4-BE49-F238E27FC236}">
-                <a16:creationId xmlns:a16="http://schemas.microsoft.com/office/drawing/2014/main" id="{EFABD77B-100F-ADCA-7C2C-49F003C698ED}"/>
+          <p:cNvPr id="5" name="TextBox 4">
+            <a:extLst>
+              <a:ext uri="{FF2B5EF4-FFF2-40B4-BE49-F238E27FC236}">
+                <a16:creationId xmlns:a16="http://schemas.microsoft.com/office/drawing/2014/main" id="{B534EF02-7838-6CC7-F6A6-1BF990B6C4B4}"/>
               </a:ext>
             </a:extLst>
           </p:cNvPr>
@@ -8808,7 +9095,7 @@
         <p:spPr>
           <a:xfrm>
             <a:off x="1763688" y="2085696"/>
-            <a:ext cx="5832648" cy="1200329"/>
+            <a:ext cx="5832648" cy="1569660"/>
           </a:xfrm>
           <a:prstGeom prst="rect">
             <a:avLst/>
@@ -8843,7 +9130,7 @@
                 </a:solidFill>
                 <a:latin typeface="APL385 Unicode" panose="020B0709000202000203" pitchFamily="49" charset="0"/>
               </a:rPr>
-              <a:t>PreCondition</a:t>
+              <a:t>LikelyToBeFalse</a:t>
             </a:r>
             <a:endParaRPr lang="en-GB" dirty="0">
               <a:latin typeface="APL385 Unicode" panose="020B0709000202000203" pitchFamily="49" charset="0"/>
@@ -8890,7 +9177,7 @@
               <a:rPr lang="en-GB" dirty="0" err="1">
                 <a:latin typeface="APL385 Unicode" panose="020B0709000202000203" pitchFamily="49" charset="0"/>
               </a:rPr>
-              <a:t>onlyComputableIfPreCondition</a:t>
+              <a:t>expensiveTest</a:t>
             </a:r>
             <a:endParaRPr lang="en-GB" dirty="0">
               <a:latin typeface="APL385 Unicode" panose="020B0709000202000203" pitchFamily="49" charset="0"/>
@@ -8905,12 +9192,100 @@
           <a:p>
             <a:endParaRPr lang="en-GB" dirty="0"/>
           </a:p>
+          <a:p>
+            <a:r>
+              <a:rPr lang="en-GB" sz="2400" dirty="0"/>
+              <a:t>Is probably better than:</a:t>
+            </a:r>
+          </a:p>
+        </p:txBody>
+      </p:sp>
+      <p:sp>
+        <p:nvSpPr>
+          <p:cNvPr id="6" name="TextBox 5">
+            <a:extLst>
+              <a:ext uri="{FF2B5EF4-FFF2-40B4-BE49-F238E27FC236}">
+                <a16:creationId xmlns:a16="http://schemas.microsoft.com/office/drawing/2014/main" id="{BF7F48A3-65FC-6C1B-A3C4-C887477430C5}"/>
+              </a:ext>
+            </a:extLst>
+          </p:cNvPr>
+          <p:cNvSpPr txBox="1"/>
+          <p:nvPr/>
+        </p:nvSpPr>
+        <p:spPr>
+          <a:xfrm>
+            <a:off x="1709682" y="3865390"/>
+            <a:ext cx="5832648" cy="646331"/>
+          </a:xfrm>
+          <a:prstGeom prst="rect">
+            <a:avLst/>
+          </a:prstGeom>
+          <a:noFill/>
+        </p:spPr>
+        <p:txBody>
+          <a:bodyPr wrap="square" numCol="1" rtlCol="0">
+            <a:spAutoFit/>
+          </a:bodyPr>
+          <a:lstStyle/>
+          <a:p>
+            <a:r>
+              <a:rPr lang="en-GB" dirty="0">
+                <a:solidFill>
+                  <a:schemeClr val="tx1">
+                    <a:lumMod val="95000"/>
+                    <a:lumOff val="5000"/>
+                  </a:schemeClr>
+                </a:solidFill>
+                <a:latin typeface="APL385 Unicode" panose="020B0709000202000203" pitchFamily="49" charset="0"/>
+              </a:rPr>
+              <a:t>:While </a:t>
+            </a:r>
+            <a:r>
+              <a:rPr lang="en-GB" dirty="0" err="1">
+                <a:solidFill>
+                  <a:schemeClr val="tx1">
+                    <a:lumMod val="95000"/>
+                    <a:lumOff val="5000"/>
+                  </a:schemeClr>
+                </a:solidFill>
+                <a:latin typeface="APL385 Unicode" panose="020B0709000202000203" pitchFamily="49" charset="0"/>
+              </a:rPr>
+              <a:t>LikelyToBeFalse</a:t>
+            </a:r>
+            <a:r>
+              <a:rPr lang="en-GB" dirty="0">
+                <a:solidFill>
+                  <a:schemeClr val="tx1">
+                    <a:lumMod val="95000"/>
+                    <a:lumOff val="5000"/>
+                  </a:schemeClr>
+                </a:solidFill>
+                <a:latin typeface="APL385 Unicode" panose="020B0709000202000203" pitchFamily="49" charset="0"/>
+              </a:rPr>
+              <a:t> ∧ </a:t>
+            </a:r>
+            <a:r>
+              <a:rPr lang="en-GB" dirty="0" err="1">
+                <a:latin typeface="APL385 Unicode" panose="020B0709000202000203" pitchFamily="49" charset="0"/>
+              </a:rPr>
+              <a:t>expensiveTest</a:t>
+            </a:r>
+            <a:endParaRPr lang="en-GB" dirty="0">
+              <a:latin typeface="APL385 Unicode" panose="020B0709000202000203" pitchFamily="49" charset="0"/>
+            </a:endParaRPr>
+          </a:p>
+          <a:p>
+            <a:r>
+              <a:rPr lang="en-GB" dirty="0"/>
+              <a:t>     …</a:t>
+            </a:r>
+          </a:p>
         </p:txBody>
       </p:sp>
     </p:spTree>
     <p:extLst>
       <p:ext uri="{BB962C8B-B14F-4D97-AF65-F5344CB8AC3E}">
-        <p14:creationId xmlns:p14="http://schemas.microsoft.com/office/powerpoint/2010/main" val="2831176310"/>
+        <p14:creationId xmlns:p14="http://schemas.microsoft.com/office/powerpoint/2010/main" val="2113042019"/>
       </p:ext>
     </p:extLst>
   </p:cSld>
@@ -9688,7 +10063,13 @@
   <p:cSld>
     <p:spTree>
       <p:nvGrpSpPr>
-        <p:cNvPr id="1" name=""/>
+        <p:cNvPr id="1" name="">
+          <a:extLst>
+            <a:ext uri="{FF2B5EF4-FFF2-40B4-BE49-F238E27FC236}">
+              <a16:creationId xmlns:a16="http://schemas.microsoft.com/office/drawing/2014/main" id="{90FB8215-FA73-8D1D-E0CA-6A7E6511FABA}"/>
+            </a:ext>
+          </a:extLst>
+        </p:cNvPr>
         <p:cNvGrpSpPr/>
         <p:nvPr/>
       </p:nvGrpSpPr>
@@ -9705,7 +10086,7 @@
           <p:cNvPr id="2" name="Content Placeholder 1">
             <a:extLst>
               <a:ext uri="{FF2B5EF4-FFF2-40B4-BE49-F238E27FC236}">
-                <a16:creationId xmlns:a16="http://schemas.microsoft.com/office/drawing/2014/main" id="{F72209A7-22F5-A654-3612-C81B7CA2330A}"/>
+                <a16:creationId xmlns:a16="http://schemas.microsoft.com/office/drawing/2014/main" id="{93772D0F-58A7-D56A-85F4-074794228336}"/>
               </a:ext>
             </a:extLst>
           </p:cNvPr>
@@ -9726,7 +10107,7 @@
             </a:pPr>
             <a:r>
               <a:rPr lang="en-GB" dirty="0"/>
-              <a:t>Loop at least once</a:t>
+              <a:t>You will often see:</a:t>
             </a:r>
           </a:p>
         </p:txBody>
@@ -9736,7 +10117,7 @@
           <p:cNvPr id="3" name="Title 2">
             <a:extLst>
               <a:ext uri="{FF2B5EF4-FFF2-40B4-BE49-F238E27FC236}">
-                <a16:creationId xmlns:a16="http://schemas.microsoft.com/office/drawing/2014/main" id="{00A4B958-791F-91C0-8D13-C9A8A38FD55F}"/>
+                <a16:creationId xmlns:a16="http://schemas.microsoft.com/office/drawing/2014/main" id="{E157F060-7D6E-6CEF-0BE0-2D33DBEE6167}"/>
               </a:ext>
             </a:extLst>
           </p:cNvPr>
@@ -9754,7 +10135,7 @@
           <a:p>
             <a:r>
               <a:rPr lang="en-GB" dirty="0"/>
-              <a:t>:Repeat … :Until</a:t>
+              <a:t>Optimisation :While</a:t>
             </a:r>
           </a:p>
         </p:txBody>
@@ -9764,7 +10145,7 @@
           <p:cNvPr id="4" name="Media Placeholder 3">
             <a:extLst>
               <a:ext uri="{FF2B5EF4-FFF2-40B4-BE49-F238E27FC236}">
-                <a16:creationId xmlns:a16="http://schemas.microsoft.com/office/drawing/2014/main" id="{AA0F971C-8622-6DCE-6A5E-59C39470F9F7}"/>
+                <a16:creationId xmlns:a16="http://schemas.microsoft.com/office/drawing/2014/main" id="{8F2A7402-BCCE-5F71-346F-81CCCC81CAFB}"/>
               </a:ext>
             </a:extLst>
           </p:cNvPr>
@@ -9786,10 +10167,10 @@
       </p:sp>
       <p:sp>
         <p:nvSpPr>
-          <p:cNvPr id="5" name="TextBox 4">
-            <a:extLst>
-              <a:ext uri="{FF2B5EF4-FFF2-40B4-BE49-F238E27FC236}">
-                <a16:creationId xmlns:a16="http://schemas.microsoft.com/office/drawing/2014/main" id="{8F96F694-5303-B1FC-F0C3-41C67D728FC0}"/>
+          <p:cNvPr id="7" name="TextBox 6">
+            <a:extLst>
+              <a:ext uri="{FF2B5EF4-FFF2-40B4-BE49-F238E27FC236}">
+                <a16:creationId xmlns:a16="http://schemas.microsoft.com/office/drawing/2014/main" id="{EFABD77B-100F-ADCA-7C2C-49F003C698ED}"/>
               </a:ext>
             </a:extLst>
           </p:cNvPr>
@@ -9798,8 +10179,8 @@
         </p:nvSpPr>
         <p:spPr>
           <a:xfrm>
-            <a:off x="1385646" y="1977684"/>
-            <a:ext cx="2754306" cy="1384995"/>
+            <a:off x="1763688" y="2085696"/>
+            <a:ext cx="5832648" cy="1200329"/>
           </a:xfrm>
           <a:prstGeom prst="rect">
             <a:avLst/>
@@ -9813,43 +10194,7 @@
           <a:lstStyle/>
           <a:p>
             <a:r>
-              <a:rPr lang="en-GB" sz="2100" dirty="0">
-                <a:solidFill>
-                  <a:srgbClr val="FF6600"/>
-                </a:solidFill>
-                <a:latin typeface="APL385 Unicode" panose="020B0709000202000203" pitchFamily="49" charset="0"/>
-              </a:rPr>
-              <a:t>:Repeat</a:t>
-            </a:r>
-          </a:p>
-          <a:p>
-            <a:r>
-              <a:rPr lang="en-GB" sz="2100" dirty="0">
-                <a:latin typeface="APL385 Unicode" panose="020B0709000202000203" pitchFamily="49" charset="0"/>
-              </a:rPr>
-              <a:t>     do this</a:t>
-            </a:r>
-          </a:p>
-          <a:p>
-            <a:r>
-              <a:rPr lang="en-GB" sz="2100" dirty="0">
-                <a:latin typeface="APL385 Unicode" panose="020B0709000202000203" pitchFamily="49" charset="0"/>
-              </a:rPr>
-              <a:t>     do that</a:t>
-            </a:r>
-          </a:p>
-          <a:p>
-            <a:r>
-              <a:rPr lang="en-GB" sz="2100" dirty="0">
-                <a:solidFill>
-                  <a:srgbClr val="FF6600"/>
-                </a:solidFill>
-                <a:latin typeface="APL385 Unicode" panose="020B0709000202000203" pitchFamily="49" charset="0"/>
-              </a:rPr>
-              <a:t>:Until </a:t>
-            </a:r>
-            <a:r>
-              <a:rPr lang="en-GB" sz="2100" dirty="0">
+              <a:rPr lang="en-GB" dirty="0">
                 <a:solidFill>
                   <a:schemeClr val="tx1">
                     <a:lumMod val="95000"/>
@@ -9858,124 +10203,86 @@
                 </a:solidFill>
                 <a:latin typeface="APL385 Unicode" panose="020B0709000202000203" pitchFamily="49" charset="0"/>
               </a:rPr>
-              <a:t>condition</a:t>
-            </a:r>
-            <a:r>
-              <a:rPr lang="en-GB" sz="2100" dirty="0">
-                <a:solidFill>
-                  <a:srgbClr val="FF0000"/>
-                </a:solidFill>
-                <a:latin typeface="APL385 Unicode" panose="020B0709000202000203" pitchFamily="49" charset="0"/>
-              </a:rPr>
-              <a:t> </a:t>
-            </a:r>
-          </a:p>
-        </p:txBody>
-      </p:sp>
-      <p:sp>
-        <p:nvSpPr>
-          <p:cNvPr id="6" name="TextBox 5">
-            <a:extLst>
-              <a:ext uri="{FF2B5EF4-FFF2-40B4-BE49-F238E27FC236}">
-                <a16:creationId xmlns:a16="http://schemas.microsoft.com/office/drawing/2014/main" id="{EB829716-FE21-FD1D-E28F-C8AEE3DB8419}"/>
-              </a:ext>
-            </a:extLst>
-          </p:cNvPr>
-          <p:cNvSpPr txBox="1"/>
-          <p:nvPr/>
-        </p:nvSpPr>
-        <p:spPr>
-          <a:xfrm>
-            <a:off x="4405196" y="1977684"/>
-            <a:ext cx="3996444" cy="1384995"/>
-          </a:xfrm>
-          <a:prstGeom prst="rect">
-            <a:avLst/>
-          </a:prstGeom>
-          <a:noFill/>
-        </p:spPr>
-        <p:txBody>
-          <a:bodyPr wrap="square" numCol="1" rtlCol="0">
-            <a:spAutoFit/>
-          </a:bodyPr>
-          <a:lstStyle/>
-          <a:p>
-            <a:r>
-              <a:rPr lang="en-GB" sz="2100" dirty="0">
-                <a:solidFill>
-                  <a:schemeClr val="accent3">
-                    <a:lumMod val="50000"/>
-                  </a:schemeClr>
-                </a:solidFill>
-                <a:latin typeface="APL385 Unicode" panose="020B0709000202000203" pitchFamily="49" charset="0"/>
-              </a:rPr>
-              <a:t>:Repeat</a:t>
-            </a:r>
-          </a:p>
-          <a:p>
-            <a:r>
-              <a:rPr lang="en-GB" sz="2100" dirty="0">
-                <a:solidFill>
-                  <a:schemeClr val="accent3">
-                    <a:lumMod val="50000"/>
-                  </a:schemeClr>
-                </a:solidFill>
-                <a:latin typeface="APL385 Unicode" panose="020B0709000202000203" pitchFamily="49" charset="0"/>
-              </a:rPr>
-              <a:t>     ⎕←'go skiing'</a:t>
-            </a:r>
-          </a:p>
-          <a:p>
-            <a:r>
-              <a:rPr lang="en-GB" sz="2100" dirty="0">
-                <a:solidFill>
-                  <a:schemeClr val="accent3">
-                    <a:lumMod val="50000"/>
-                  </a:schemeClr>
-                </a:solidFill>
-                <a:latin typeface="APL385 Unicode" panose="020B0709000202000203" pitchFamily="49" charset="0"/>
-              </a:rPr>
-              <a:t>     </a:t>
-            </a:r>
-            <a:r>
-              <a:rPr lang="en-GB" sz="2100" dirty="0" err="1">
-                <a:solidFill>
-                  <a:schemeClr val="accent3">
-                    <a:lumMod val="50000"/>
-                  </a:schemeClr>
-                </a:solidFill>
-                <a:latin typeface="APL385 Unicode" panose="020B0709000202000203" pitchFamily="49" charset="0"/>
-              </a:rPr>
-              <a:t>Temp←ReadThermo</a:t>
-            </a:r>
-            <a:endParaRPr lang="en-GB" sz="2100" dirty="0">
-              <a:solidFill>
-                <a:schemeClr val="accent3">
-                  <a:lumMod val="50000"/>
-                </a:schemeClr>
-              </a:solidFill>
+              <a:t>:While </a:t>
+            </a:r>
+            <a:r>
+              <a:rPr lang="en-GB" dirty="0" err="1">
+                <a:solidFill>
+                  <a:schemeClr val="tx1">
+                    <a:lumMod val="95000"/>
+                    <a:lumOff val="5000"/>
+                  </a:schemeClr>
+                </a:solidFill>
+                <a:latin typeface="APL385 Unicode" panose="020B0709000202000203" pitchFamily="49" charset="0"/>
+              </a:rPr>
+              <a:t>PreCondition</a:t>
+            </a:r>
+            <a:endParaRPr lang="en-GB" dirty="0">
               <a:latin typeface="APL385 Unicode" panose="020B0709000202000203" pitchFamily="49" charset="0"/>
             </a:endParaRPr>
           </a:p>
           <a:p>
             <a:r>
-              <a:rPr lang="en-GB" sz="2100" dirty="0">
-                <a:solidFill>
-                  <a:schemeClr val="accent3">
-                    <a:lumMod val="50000"/>
-                  </a:schemeClr>
-                </a:solidFill>
-                <a:latin typeface="APL385 Unicode" panose="020B0709000202000203" pitchFamily="49" charset="0"/>
-              </a:rPr>
-              <a:t>:Until Temp&gt;0</a:t>
-            </a:r>
+              <a:rPr lang="en-GB" dirty="0">
+                <a:solidFill>
+                  <a:schemeClr val="tx1">
+                    <a:lumMod val="95000"/>
+                    <a:lumOff val="5000"/>
+                  </a:schemeClr>
+                </a:solidFill>
+                <a:latin typeface="APL385 Unicode" panose="020B0709000202000203" pitchFamily="49" charset="0"/>
+              </a:rPr>
+              <a:t>:</a:t>
+            </a:r>
+            <a:r>
+              <a:rPr lang="en-GB" dirty="0" err="1">
+                <a:solidFill>
+                  <a:schemeClr val="tx1">
+                    <a:lumMod val="95000"/>
+                    <a:lumOff val="5000"/>
+                  </a:schemeClr>
+                </a:solidFill>
+                <a:latin typeface="APL385 Unicode" panose="020B0709000202000203" pitchFamily="49" charset="0"/>
+              </a:rPr>
+              <a:t>AndIf</a:t>
+            </a:r>
+            <a:r>
+              <a:rPr lang="en-GB" dirty="0">
+                <a:solidFill>
+                  <a:schemeClr val="tx1">
+                    <a:lumMod val="95000"/>
+                    <a:lumOff val="5000"/>
+                  </a:schemeClr>
+                </a:solidFill>
+                <a:latin typeface="APL385 Unicode" panose="020B0709000202000203" pitchFamily="49" charset="0"/>
+              </a:rPr>
+              <a:t> </a:t>
+            </a:r>
+            <a:r>
+              <a:rPr lang="en-GB" dirty="0" err="1">
+                <a:latin typeface="APL385 Unicode" panose="020B0709000202000203" pitchFamily="49" charset="0"/>
+              </a:rPr>
+              <a:t>onlyComputableIfPreCondition</a:t>
+            </a:r>
+            <a:endParaRPr lang="en-GB" dirty="0">
+              <a:latin typeface="APL385 Unicode" panose="020B0709000202000203" pitchFamily="49" charset="0"/>
+            </a:endParaRPr>
+          </a:p>
+          <a:p>
+            <a:r>
+              <a:rPr lang="en-GB" dirty="0"/>
+              <a:t>     …</a:t>
+            </a:r>
+          </a:p>
+          <a:p>
+            <a:endParaRPr lang="en-GB" dirty="0"/>
           </a:p>
         </p:txBody>
       </p:sp>
     </p:spTree>
     <p:extLst>
       <p:ext uri="{BB962C8B-B14F-4D97-AF65-F5344CB8AC3E}">
-        <p14:creationId xmlns:p14="http://schemas.microsoft.com/office/powerpoint/2010/main" val="1887727614"/>
+        <p14:creationId xmlns:p14="http://schemas.microsoft.com/office/powerpoint/2010/main" val="2831176310"/>
       </p:ext>
     </p:extLst>
   </p:cSld>
@@ -10007,7 +10314,7 @@
           <p:cNvPr id="2" name="Content Placeholder 1">
             <a:extLst>
               <a:ext uri="{FF2B5EF4-FFF2-40B4-BE49-F238E27FC236}">
-                <a16:creationId xmlns:a16="http://schemas.microsoft.com/office/drawing/2014/main" id="{EE41AFFE-C009-1F31-EF9F-B19BA05FEBED}"/>
+                <a16:creationId xmlns:a16="http://schemas.microsoft.com/office/drawing/2014/main" id="{F72209A7-22F5-A654-3612-C81B7CA2330A}"/>
               </a:ext>
             </a:extLst>
           </p:cNvPr>
@@ -10027,18 +10334,9 @@
               <a:buNone/>
             </a:pPr>
             <a:r>
-              <a:rPr lang="da-DK" dirty="0"/>
-              <a:t>For example, using </a:t>
-            </a:r>
-            <a:r>
-              <a:rPr lang="da-DK" dirty="0">
-                <a:latin typeface="APL385 Unicode" panose="020B0709000202000203" pitchFamily="49" charset="0"/>
-              </a:rPr>
-              <a:t>:Repeat</a:t>
-            </a:r>
-            <a:endParaRPr lang="en-GB" dirty="0">
-              <a:latin typeface="APL385 Unicode" panose="020B0709000202000203" pitchFamily="49" charset="0"/>
-            </a:endParaRPr>
+              <a:rPr lang="en-GB" dirty="0"/>
+              <a:t>Loop at least once</a:t>
+            </a:r>
           </a:p>
         </p:txBody>
       </p:sp>
@@ -10047,7 +10345,7 @@
           <p:cNvPr id="3" name="Title 2">
             <a:extLst>
               <a:ext uri="{FF2B5EF4-FFF2-40B4-BE49-F238E27FC236}">
-                <a16:creationId xmlns:a16="http://schemas.microsoft.com/office/drawing/2014/main" id="{6F9FFE67-054A-A4A5-7F38-5219ED257247}"/>
+                <a16:creationId xmlns:a16="http://schemas.microsoft.com/office/drawing/2014/main" id="{00A4B958-791F-91C0-8D13-C9A8A38FD55F}"/>
               </a:ext>
             </a:extLst>
           </p:cNvPr>
@@ -10065,7 +10363,7 @@
           <a:p>
             <a:r>
               <a:rPr lang="en-GB" dirty="0"/>
-              <a:t>:Leave (any control structure)</a:t>
+              <a:t>:Repeat … :Until</a:t>
             </a:r>
           </a:p>
         </p:txBody>
@@ -10075,7 +10373,7 @@
           <p:cNvPr id="4" name="Media Placeholder 3">
             <a:extLst>
               <a:ext uri="{FF2B5EF4-FFF2-40B4-BE49-F238E27FC236}">
-                <a16:creationId xmlns:a16="http://schemas.microsoft.com/office/drawing/2014/main" id="{EF804A70-6CE3-9B0E-4536-220B7F3D1843}"/>
+                <a16:creationId xmlns:a16="http://schemas.microsoft.com/office/drawing/2014/main" id="{AA0F971C-8622-6DCE-6A5E-59C39470F9F7}"/>
               </a:ext>
             </a:extLst>
           </p:cNvPr>
@@ -10100,7 +10398,7 @@
           <p:cNvPr id="5" name="TextBox 4">
             <a:extLst>
               <a:ext uri="{FF2B5EF4-FFF2-40B4-BE49-F238E27FC236}">
-                <a16:creationId xmlns:a16="http://schemas.microsoft.com/office/drawing/2014/main" id="{A87E9375-3C26-2394-BF04-07C523CEE8C5}"/>
+                <a16:creationId xmlns:a16="http://schemas.microsoft.com/office/drawing/2014/main" id="{8F96F694-5303-B1FC-F0C3-41C67D728FC0}"/>
               </a:ext>
             </a:extLst>
           </p:cNvPr>
@@ -10109,8 +10407,8 @@
         </p:nvSpPr>
         <p:spPr>
           <a:xfrm>
-            <a:off x="1493658" y="1887395"/>
-            <a:ext cx="2754306" cy="2354491"/>
+            <a:off x="1385646" y="1977684"/>
+            <a:ext cx="2754306" cy="1384995"/>
           </a:xfrm>
           <a:prstGeom prst="rect">
             <a:avLst/>
@@ -10126,6 +10424,42 @@
             <a:r>
               <a:rPr lang="en-GB" sz="2100" dirty="0">
                 <a:solidFill>
+                  <a:srgbClr val="FF6600"/>
+                </a:solidFill>
+                <a:latin typeface="APL385 Unicode" panose="020B0709000202000203" pitchFamily="49" charset="0"/>
+              </a:rPr>
+              <a:t>:Repeat</a:t>
+            </a:r>
+          </a:p>
+          <a:p>
+            <a:r>
+              <a:rPr lang="en-GB" sz="2100" dirty="0">
+                <a:latin typeface="APL385 Unicode" panose="020B0709000202000203" pitchFamily="49" charset="0"/>
+              </a:rPr>
+              <a:t>     do this</a:t>
+            </a:r>
+          </a:p>
+          <a:p>
+            <a:r>
+              <a:rPr lang="en-GB" sz="2100" dirty="0">
+                <a:latin typeface="APL385 Unicode" panose="020B0709000202000203" pitchFamily="49" charset="0"/>
+              </a:rPr>
+              <a:t>     do that</a:t>
+            </a:r>
+          </a:p>
+          <a:p>
+            <a:r>
+              <a:rPr lang="en-GB" sz="2100" dirty="0">
+                <a:solidFill>
+                  <a:srgbClr val="FF6600"/>
+                </a:solidFill>
+                <a:latin typeface="APL385 Unicode" panose="020B0709000202000203" pitchFamily="49" charset="0"/>
+              </a:rPr>
+              <a:t>:Until </a:t>
+            </a:r>
+            <a:r>
+              <a:rPr lang="en-GB" sz="2100" dirty="0">
+                <a:solidFill>
                   <a:schemeClr val="tx1">
                     <a:lumMod val="95000"/>
                     <a:lumOff val="5000"/>
@@ -10133,113 +10467,17 @@
                 </a:solidFill>
                 <a:latin typeface="APL385 Unicode" panose="020B0709000202000203" pitchFamily="49" charset="0"/>
               </a:rPr>
-              <a:t>:Repeat</a:t>
-            </a:r>
-          </a:p>
-          <a:p>
+              <a:t>condition</a:t>
+            </a:r>
             <a:r>
               <a:rPr lang="en-GB" sz="2100" dirty="0">
                 <a:solidFill>
-                  <a:schemeClr val="tx1">
-                    <a:lumMod val="95000"/>
-                    <a:lumOff val="5000"/>
-                  </a:schemeClr>
-                </a:solidFill>
-                <a:latin typeface="APL385 Unicode" panose="020B0709000202000203" pitchFamily="49" charset="0"/>
-              </a:rPr>
-              <a:t>     do this</a:t>
-            </a:r>
-          </a:p>
-          <a:p>
-            <a:endParaRPr lang="en-GB" sz="2100" dirty="0">
-              <a:solidFill>
-                <a:schemeClr val="tx1">
-                  <a:lumMod val="95000"/>
-                  <a:lumOff val="5000"/>
-                </a:schemeClr>
-              </a:solidFill>
-              <a:latin typeface="APL385 Unicode" panose="020B0709000202000203" pitchFamily="49" charset="0"/>
-            </a:endParaRPr>
-          </a:p>
-          <a:p>
-            <a:r>
-              <a:rPr lang="en-GB" sz="2100" dirty="0">
-                <a:solidFill>
-                  <a:schemeClr val="tx1">
-                    <a:lumMod val="95000"/>
-                    <a:lumOff val="5000"/>
-                  </a:schemeClr>
-                </a:solidFill>
-                <a:latin typeface="APL385 Unicode" panose="020B0709000202000203" pitchFamily="49" charset="0"/>
-              </a:rPr>
-              <a:t>     </a:t>
-            </a:r>
-            <a:r>
-              <a:rPr lang="en-GB" sz="2100" dirty="0">
-                <a:solidFill>
-                  <a:srgbClr val="FF6600"/>
-                </a:solidFill>
-                <a:latin typeface="APL385 Unicode" panose="020B0709000202000203" pitchFamily="49" charset="0"/>
-              </a:rPr>
-              <a:t>:Leave</a:t>
-            </a:r>
-          </a:p>
-          <a:p>
-            <a:endParaRPr lang="en-GB" sz="2100" dirty="0">
-              <a:solidFill>
-                <a:srgbClr val="FF6600"/>
-              </a:solidFill>
-              <a:latin typeface="APL385 Unicode" panose="020B0709000202000203" pitchFamily="49" charset="0"/>
-            </a:endParaRPr>
-          </a:p>
-          <a:p>
-            <a:r>
-              <a:rPr lang="en-GB" sz="2100" dirty="0">
-                <a:solidFill>
-                  <a:schemeClr val="tx1">
-                    <a:lumMod val="95000"/>
-                    <a:lumOff val="5000"/>
-                  </a:schemeClr>
-                </a:solidFill>
-                <a:latin typeface="APL385 Unicode" panose="020B0709000202000203" pitchFamily="49" charset="0"/>
-              </a:rPr>
-              <a:t>     do that?</a:t>
-            </a:r>
-          </a:p>
-          <a:p>
-            <a:r>
-              <a:rPr lang="en-GB" sz="2100" dirty="0">
-                <a:solidFill>
-                  <a:schemeClr val="tx1">
-                    <a:lumMod val="95000"/>
-                    <a:lumOff val="5000"/>
-                  </a:schemeClr>
-                </a:solidFill>
-                <a:latin typeface="APL385 Unicode" panose="020B0709000202000203" pitchFamily="49" charset="0"/>
-              </a:rPr>
-              <a:t>:</a:t>
-            </a:r>
-            <a:r>
-              <a:rPr lang="en-GB" sz="2100" dirty="0" err="1">
-                <a:solidFill>
-                  <a:schemeClr val="tx1">
-                    <a:lumMod val="95000"/>
-                    <a:lumOff val="5000"/>
-                  </a:schemeClr>
-                </a:solidFill>
-                <a:latin typeface="APL385 Unicode" panose="020B0709000202000203" pitchFamily="49" charset="0"/>
-              </a:rPr>
-              <a:t>EndRepeat</a:t>
-            </a:r>
-            <a:endParaRPr lang="en-GB" sz="2100" dirty="0">
-              <a:solidFill>
-                <a:schemeClr val="tx1">
-                  <a:lumMod val="95000"/>
-                  <a:lumOff val="5000"/>
-                </a:schemeClr>
-              </a:solidFill>
-              <a:latin typeface="APL385 Unicode" panose="020B0709000202000203" pitchFamily="49" charset="0"/>
-            </a:endParaRPr>
+                  <a:srgbClr val="FF0000"/>
+                </a:solidFill>
+                <a:latin typeface="APL385 Unicode" panose="020B0709000202000203" pitchFamily="49" charset="0"/>
+              </a:rPr>
+              <a:t> </a:t>
+            </a:r>
           </a:p>
         </p:txBody>
       </p:sp>
@@ -10248,7 +10486,7 @@
           <p:cNvPr id="6" name="TextBox 5">
             <a:extLst>
               <a:ext uri="{FF2B5EF4-FFF2-40B4-BE49-F238E27FC236}">
-                <a16:creationId xmlns:a16="http://schemas.microsoft.com/office/drawing/2014/main" id="{DB05AB39-1943-F187-FBCC-699F8B0124F8}"/>
+                <a16:creationId xmlns:a16="http://schemas.microsoft.com/office/drawing/2014/main" id="{EB829716-FE21-FD1D-E28F-C8AEE3DB8419}"/>
               </a:ext>
             </a:extLst>
           </p:cNvPr>
@@ -10257,8 +10495,8 @@
         </p:nvSpPr>
         <p:spPr>
           <a:xfrm>
-            <a:off x="4247964" y="1864871"/>
-            <a:ext cx="3942438" cy="2354491"/>
+            <a:off x="4405196" y="1977684"/>
+            <a:ext cx="3996444" cy="1384995"/>
           </a:xfrm>
           <a:prstGeom prst="rect">
             <a:avLst/>
@@ -10282,7 +10520,9 @@
               </a:rPr>
               <a:t>:Repeat</a:t>
             </a:r>
-            <a:br>
+          </a:p>
+          <a:p>
+            <a:r>
               <a:rPr lang="en-GB" sz="2100" dirty="0">
                 <a:solidFill>
                   <a:schemeClr val="accent3">
@@ -10291,7 +10531,10 @@
                 </a:solidFill>
                 <a:latin typeface="APL385 Unicode" panose="020B0709000202000203" pitchFamily="49" charset="0"/>
               </a:rPr>
-            </a:br>
+              <a:t>     ⎕←'go skiing'</a:t>
+            </a:r>
+          </a:p>
+          <a:p>
             <a:r>
               <a:rPr lang="en-GB" sz="2100" dirty="0">
                 <a:solidFill>
@@ -10333,105 +10576,15 @@
                 </a:solidFill>
                 <a:latin typeface="APL385 Unicode" panose="020B0709000202000203" pitchFamily="49" charset="0"/>
               </a:rPr>
-              <a:t>     :If Temp&gt;0</a:t>
-            </a:r>
-          </a:p>
-          <a:p>
-            <a:r>
-              <a:rPr lang="en-GB" sz="2100" dirty="0">
-                <a:solidFill>
-                  <a:schemeClr val="accent3">
-                    <a:lumMod val="50000"/>
-                  </a:schemeClr>
-                </a:solidFill>
-                <a:latin typeface="APL385 Unicode" panose="020B0709000202000203" pitchFamily="49" charset="0"/>
-              </a:rPr>
-              <a:t>        :Leave</a:t>
-            </a:r>
-          </a:p>
-          <a:p>
-            <a:r>
-              <a:rPr lang="en-GB" sz="2100" dirty="0">
-                <a:solidFill>
-                  <a:schemeClr val="accent3">
-                    <a:lumMod val="50000"/>
-                  </a:schemeClr>
-                </a:solidFill>
-                <a:latin typeface="APL385 Unicode" panose="020B0709000202000203" pitchFamily="49" charset="0"/>
-              </a:rPr>
-              <a:t>     :</a:t>
-            </a:r>
-            <a:r>
-              <a:rPr lang="en-GB" sz="2100" dirty="0" err="1">
-                <a:solidFill>
-                  <a:schemeClr val="accent3">
-                    <a:lumMod val="50000"/>
-                  </a:schemeClr>
-                </a:solidFill>
-                <a:latin typeface="APL385 Unicode" panose="020B0709000202000203" pitchFamily="49" charset="0"/>
-              </a:rPr>
-              <a:t>EndIf</a:t>
-            </a:r>
-            <a:endParaRPr lang="en-GB" sz="2100" dirty="0">
-              <a:solidFill>
-                <a:schemeClr val="accent3">
-                  <a:lumMod val="50000"/>
-                </a:schemeClr>
-              </a:solidFill>
-              <a:latin typeface="APL385 Unicode" panose="020B0709000202000203" pitchFamily="49" charset="0"/>
-            </a:endParaRPr>
-          </a:p>
-          <a:p>
-            <a:r>
-              <a:rPr lang="en-GB" sz="2100" dirty="0">
-                <a:solidFill>
-                  <a:schemeClr val="accent3">
-                    <a:lumMod val="50000"/>
-                  </a:schemeClr>
-                </a:solidFill>
-                <a:latin typeface="APL385 Unicode" panose="020B0709000202000203" pitchFamily="49" charset="0"/>
-              </a:rPr>
-              <a:t>     'go skiing'</a:t>
-            </a:r>
-          </a:p>
-          <a:p>
-            <a:r>
-              <a:rPr lang="en-GB" sz="2100" dirty="0">
-                <a:solidFill>
-                  <a:schemeClr val="accent3">
-                    <a:lumMod val="50000"/>
-                  </a:schemeClr>
-                </a:solidFill>
-                <a:latin typeface="APL385 Unicode" panose="020B0709000202000203" pitchFamily="49" charset="0"/>
-              </a:rPr>
-              <a:t>:</a:t>
-            </a:r>
-            <a:r>
-              <a:rPr lang="en-GB" sz="2100" dirty="0" err="1">
-                <a:solidFill>
-                  <a:schemeClr val="accent3">
-                    <a:lumMod val="50000"/>
-                  </a:schemeClr>
-                </a:solidFill>
-                <a:latin typeface="APL385 Unicode" panose="020B0709000202000203" pitchFamily="49" charset="0"/>
-              </a:rPr>
-              <a:t>EndRepeat</a:t>
-            </a:r>
-            <a:endParaRPr lang="en-GB" sz="2100" dirty="0">
-              <a:solidFill>
-                <a:schemeClr val="accent3">
-                  <a:lumMod val="50000"/>
-                </a:schemeClr>
-              </a:solidFill>
-              <a:latin typeface="APL385 Unicode" panose="020B0709000202000203" pitchFamily="49" charset="0"/>
-            </a:endParaRPr>
+              <a:t>:Until Temp&gt;0</a:t>
+            </a:r>
           </a:p>
         </p:txBody>
       </p:sp>
     </p:spTree>
     <p:extLst>
       <p:ext uri="{BB962C8B-B14F-4D97-AF65-F5344CB8AC3E}">
-        <p14:creationId xmlns:p14="http://schemas.microsoft.com/office/powerpoint/2010/main" val="333060428"/>
+        <p14:creationId xmlns:p14="http://schemas.microsoft.com/office/powerpoint/2010/main" val="1887727614"/>
       </p:ext>
     </p:extLst>
   </p:cSld>
@@ -10463,7 +10616,7 @@
           <p:cNvPr id="2" name="Content Placeholder 1">
             <a:extLst>
               <a:ext uri="{FF2B5EF4-FFF2-40B4-BE49-F238E27FC236}">
-                <a16:creationId xmlns:a16="http://schemas.microsoft.com/office/drawing/2014/main" id="{4FF3C369-0682-4286-7ACB-13FBFD38F7E8}"/>
+                <a16:creationId xmlns:a16="http://schemas.microsoft.com/office/drawing/2014/main" id="{EE41AFFE-C009-1F31-EF9F-B19BA05FEBED}"/>
               </a:ext>
             </a:extLst>
           </p:cNvPr>
@@ -10483,9 +10636,18 @@
               <a:buNone/>
             </a:pPr>
             <a:r>
-              <a:rPr lang="en-GB" dirty="0"/>
-              <a:t>Execute a block repeatedly for a series of values:</a:t>
-            </a:r>
+              <a:rPr lang="da-DK" dirty="0"/>
+              <a:t>For example, using </a:t>
+            </a:r>
+            <a:r>
+              <a:rPr lang="da-DK" dirty="0">
+                <a:latin typeface="APL385 Unicode" panose="020B0709000202000203" pitchFamily="49" charset="0"/>
+              </a:rPr>
+              <a:t>:Repeat</a:t>
+            </a:r>
+            <a:endParaRPr lang="en-GB" dirty="0">
+              <a:latin typeface="APL385 Unicode" panose="020B0709000202000203" pitchFamily="49" charset="0"/>
+            </a:endParaRPr>
           </a:p>
         </p:txBody>
       </p:sp>
@@ -10494,7 +10656,7 @@
           <p:cNvPr id="3" name="Title 2">
             <a:extLst>
               <a:ext uri="{FF2B5EF4-FFF2-40B4-BE49-F238E27FC236}">
-                <a16:creationId xmlns:a16="http://schemas.microsoft.com/office/drawing/2014/main" id="{4DD6A154-7779-9999-4876-1545F980A1FA}"/>
+                <a16:creationId xmlns:a16="http://schemas.microsoft.com/office/drawing/2014/main" id="{6F9FFE67-054A-A4A5-7F38-5219ED257247}"/>
               </a:ext>
             </a:extLst>
           </p:cNvPr>
@@ -10512,13 +10674,8 @@
           <a:p>
             <a:r>
               <a:rPr lang="en-GB" dirty="0"/>
-              <a:t>:For … :</a:t>
-            </a:r>
-            <a:r>
-              <a:rPr lang="en-GB" dirty="0" err="1"/>
-              <a:t>EndFor</a:t>
-            </a:r>
-            <a:endParaRPr lang="en-GB" dirty="0"/>
+              <a:t>:Leave (any control structure)</a:t>
+            </a:r>
           </a:p>
         </p:txBody>
       </p:sp>
@@ -10527,7 +10684,7 @@
           <p:cNvPr id="4" name="Media Placeholder 3">
             <a:extLst>
               <a:ext uri="{FF2B5EF4-FFF2-40B4-BE49-F238E27FC236}">
-                <a16:creationId xmlns:a16="http://schemas.microsoft.com/office/drawing/2014/main" id="{639296C3-2883-A7E1-E110-68417E8B355B}"/>
+                <a16:creationId xmlns:a16="http://schemas.microsoft.com/office/drawing/2014/main" id="{EF804A70-6CE3-9B0E-4536-220B7F3D1843}"/>
               </a:ext>
             </a:extLst>
           </p:cNvPr>
@@ -10552,7 +10709,7 @@
           <p:cNvPr id="5" name="TextBox 4">
             <a:extLst>
               <a:ext uri="{FF2B5EF4-FFF2-40B4-BE49-F238E27FC236}">
-                <a16:creationId xmlns:a16="http://schemas.microsoft.com/office/drawing/2014/main" id="{5214B446-DA96-45F8-12D3-D8DAF0E42F0F}"/>
+                <a16:creationId xmlns:a16="http://schemas.microsoft.com/office/drawing/2014/main" id="{A87E9375-3C26-2394-BF04-07C523CEE8C5}"/>
               </a:ext>
             </a:extLst>
           </p:cNvPr>
@@ -10561,8 +10718,8 @@
         </p:nvSpPr>
         <p:spPr>
           <a:xfrm>
-            <a:off x="1266614" y="2390134"/>
-            <a:ext cx="3610811" cy="1061829"/>
+            <a:off x="1493658" y="1887395"/>
+            <a:ext cx="2754306" cy="2354491"/>
           </a:xfrm>
           <a:prstGeom prst="rect">
             <a:avLst/>
@@ -10578,15 +10735,6 @@
             <a:r>
               <a:rPr lang="en-GB" sz="2100" dirty="0">
                 <a:solidFill>
-                  <a:srgbClr val="FF6600"/>
-                </a:solidFill>
-                <a:latin typeface="APL385 Unicode" panose="020B0709000202000203" pitchFamily="49" charset="0"/>
-              </a:rPr>
-              <a:t>:For  </a:t>
-            </a:r>
-            <a:r>
-              <a:rPr lang="en-GB" sz="2100" dirty="0">
-                <a:solidFill>
                   <a:schemeClr val="tx1">
                     <a:lumMod val="95000"/>
                     <a:lumOff val="5000"/>
@@ -10594,17 +10742,10 @@
                 </a:solidFill>
                 <a:latin typeface="APL385 Unicode" panose="020B0709000202000203" pitchFamily="49" charset="0"/>
               </a:rPr>
-              <a:t>v </a:t>
-            </a:r>
-            <a:r>
-              <a:rPr lang="en-GB" sz="2100" dirty="0">
-                <a:solidFill>
-                  <a:srgbClr val="FF6600"/>
-                </a:solidFill>
-                <a:latin typeface="APL385 Unicode" panose="020B0709000202000203" pitchFamily="49" charset="0"/>
-              </a:rPr>
-              <a:t>:In </a:t>
-            </a:r>
+              <a:t>:Repeat</a:t>
+            </a:r>
+          </a:p>
+          <a:p>
             <a:r>
               <a:rPr lang="en-GB" sz="2100" dirty="0">
                 <a:solidFill>
@@ -10615,8 +10756,19 @@
                 </a:solidFill>
                 <a:latin typeface="APL385 Unicode" panose="020B0709000202000203" pitchFamily="49" charset="0"/>
               </a:rPr>
-              <a:t>values</a:t>
-            </a:r>
+              <a:t>     do this</a:t>
+            </a:r>
+          </a:p>
+          <a:p>
+            <a:endParaRPr lang="en-GB" sz="2100" dirty="0">
+              <a:solidFill>
+                <a:schemeClr val="tx1">
+                  <a:lumMod val="95000"/>
+                  <a:lumOff val="5000"/>
+                </a:schemeClr>
+              </a:solidFill>
+              <a:latin typeface="APL385 Unicode" panose="020B0709000202000203" pitchFamily="49" charset="0"/>
+            </a:endParaRPr>
           </a:p>
           <a:p>
             <a:r>
@@ -10629,10 +10781,8 @@
                 </a:solidFill>
                 <a:latin typeface="APL385 Unicode" panose="020B0709000202000203" pitchFamily="49" charset="0"/>
               </a:rPr>
-              <a:t>     do this</a:t>
-            </a:r>
-          </a:p>
-          <a:p>
+              <a:t>     </a:t>
+            </a:r>
             <a:r>
               <a:rPr lang="en-GB" sz="2100" dirty="0">
                 <a:solidFill>
@@ -10640,17 +10790,10 @@
                 </a:solidFill>
                 <a:latin typeface="APL385 Unicode" panose="020B0709000202000203" pitchFamily="49" charset="0"/>
               </a:rPr>
-              <a:t>:</a:t>
-            </a:r>
-            <a:r>
-              <a:rPr lang="en-GB" sz="2100" dirty="0" err="1">
-                <a:solidFill>
-                  <a:srgbClr val="FF6600"/>
-                </a:solidFill>
-                <a:latin typeface="APL385 Unicode" panose="020B0709000202000203" pitchFamily="49" charset="0"/>
-              </a:rPr>
-              <a:t>EndFor</a:t>
-            </a:r>
+              <a:t>:Leave</a:t>
+            </a:r>
+          </a:p>
+          <a:p>
             <a:endParaRPr lang="en-GB" sz="2100" dirty="0">
               <a:solidFill>
                 <a:srgbClr val="FF6600"/>
@@ -10658,6 +10801,55 @@
               <a:latin typeface="APL385 Unicode" panose="020B0709000202000203" pitchFamily="49" charset="0"/>
             </a:endParaRPr>
           </a:p>
+          <a:p>
+            <a:r>
+              <a:rPr lang="en-GB" sz="2100" dirty="0">
+                <a:solidFill>
+                  <a:schemeClr val="tx1">
+                    <a:lumMod val="95000"/>
+                    <a:lumOff val="5000"/>
+                  </a:schemeClr>
+                </a:solidFill>
+                <a:latin typeface="APL385 Unicode" panose="020B0709000202000203" pitchFamily="49" charset="0"/>
+              </a:rPr>
+              <a:t>     do that?</a:t>
+            </a:r>
+          </a:p>
+          <a:p>
+            <a:r>
+              <a:rPr lang="en-GB" sz="2100" dirty="0">
+                <a:solidFill>
+                  <a:schemeClr val="tx1">
+                    <a:lumMod val="95000"/>
+                    <a:lumOff val="5000"/>
+                  </a:schemeClr>
+                </a:solidFill>
+                <a:latin typeface="APL385 Unicode" panose="020B0709000202000203" pitchFamily="49" charset="0"/>
+              </a:rPr>
+              <a:t>:</a:t>
+            </a:r>
+            <a:r>
+              <a:rPr lang="en-GB" sz="2100" dirty="0" err="1">
+                <a:solidFill>
+                  <a:schemeClr val="tx1">
+                    <a:lumMod val="95000"/>
+                    <a:lumOff val="5000"/>
+                  </a:schemeClr>
+                </a:solidFill>
+                <a:latin typeface="APL385 Unicode" panose="020B0709000202000203" pitchFamily="49" charset="0"/>
+              </a:rPr>
+              <a:t>EndRepeat</a:t>
+            </a:r>
+            <a:endParaRPr lang="en-GB" sz="2100" dirty="0">
+              <a:solidFill>
+                <a:schemeClr val="tx1">
+                  <a:lumMod val="95000"/>
+                  <a:lumOff val="5000"/>
+                </a:schemeClr>
+              </a:solidFill>
+              <a:latin typeface="APL385 Unicode" panose="020B0709000202000203" pitchFamily="49" charset="0"/>
+            </a:endParaRPr>
+          </a:p>
         </p:txBody>
       </p:sp>
       <p:sp>
@@ -10665,7 +10857,7 @@
           <p:cNvPr id="6" name="TextBox 5">
             <a:extLst>
               <a:ext uri="{FF2B5EF4-FFF2-40B4-BE49-F238E27FC236}">
-                <a16:creationId xmlns:a16="http://schemas.microsoft.com/office/drawing/2014/main" id="{D47E156F-1061-1D99-D7E9-C6ED9F93E212}"/>
+                <a16:creationId xmlns:a16="http://schemas.microsoft.com/office/drawing/2014/main" id="{DB05AB39-1943-F187-FBCC-699F8B0124F8}"/>
               </a:ext>
             </a:extLst>
           </p:cNvPr>
@@ -10674,8 +10866,8 @@
         </p:nvSpPr>
         <p:spPr>
           <a:xfrm>
-            <a:off x="4797327" y="2390134"/>
-            <a:ext cx="3834426" cy="1061829"/>
+            <a:off x="4247964" y="1864871"/>
+            <a:ext cx="3942438" cy="2354491"/>
           </a:xfrm>
           <a:prstGeom prst="rect">
             <a:avLst/>
@@ -10697,11 +10889,9 @@
                 </a:solidFill>
                 <a:latin typeface="APL385 Unicode" panose="020B0709000202000203" pitchFamily="49" charset="0"/>
               </a:rPr>
-              <a:t>:For n :In ⍳10</a:t>
-            </a:r>
-          </a:p>
-          <a:p>
-            <a:r>
+              <a:t>:Repeat</a:t>
+            </a:r>
+            <a:br>
               <a:rPr lang="en-GB" sz="2100" dirty="0">
                 <a:solidFill>
                   <a:schemeClr val="accent3">
@@ -10710,10 +10900,9 @@
                 </a:solidFill>
                 <a:latin typeface="APL385 Unicode" panose="020B0709000202000203" pitchFamily="49" charset="0"/>
               </a:rPr>
-              <a:t>    ⎕←</a:t>
-            </a:r>
-            <a:r>
-              <a:rPr lang="en-GB" sz="2100" dirty="0" err="1">
+            </a:br>
+            <a:r>
+              <a:rPr lang="en-GB" sz="2100" dirty="0">
                 <a:solidFill>
                   <a:schemeClr val="accent3">
                     <a:lumMod val="50000"/>
@@ -10721,10 +10910,10 @@
                 </a:solidFill>
                 <a:latin typeface="APL385 Unicode" panose="020B0709000202000203" pitchFamily="49" charset="0"/>
               </a:rPr>
-              <a:t>n,n</a:t>
-            </a:r>
-            <a:r>
-              <a:rPr lang="en-GB" sz="2100" dirty="0">
+              <a:t>     </a:t>
+            </a:r>
+            <a:r>
+              <a:rPr lang="en-GB" sz="2100" dirty="0" err="1">
                 <a:solidFill>
                   <a:schemeClr val="accent3">
                     <a:lumMod val="50000"/>
@@ -10732,31 +10921,7 @@
                 </a:solidFill>
                 <a:latin typeface="APL385 Unicode" panose="020B0709000202000203" pitchFamily="49" charset="0"/>
               </a:rPr>
-              <a:t>*2</a:t>
-            </a:r>
-          </a:p>
-          <a:p>
-            <a:r>
-              <a:rPr lang="en-GB" sz="2100" dirty="0">
-                <a:solidFill>
-                  <a:schemeClr val="accent3">
-                    <a:lumMod val="50000"/>
-                  </a:schemeClr>
-                </a:solidFill>
-                <a:latin typeface="APL385 Unicode" panose="020B0709000202000203" pitchFamily="49" charset="0"/>
-              </a:rPr>
-              <a:t>:</a:t>
-            </a:r>
-            <a:r>
-              <a:rPr lang="en-GB" sz="2100" dirty="0" err="1">
-                <a:solidFill>
-                  <a:schemeClr val="accent3">
-                    <a:lumMod val="50000"/>
-                  </a:schemeClr>
-                </a:solidFill>
-                <a:latin typeface="APL385 Unicode" panose="020B0709000202000203" pitchFamily="49" charset="0"/>
-              </a:rPr>
-              <a:t>EndFor</a:t>
+              <a:t>Temp←ReadThermo</a:t>
             </a:r>
             <a:endParaRPr lang="en-GB" sz="2100" dirty="0">
               <a:solidFill>
@@ -10767,12 +10932,115 @@
               <a:latin typeface="APL385 Unicode" panose="020B0709000202000203" pitchFamily="49" charset="0"/>
             </a:endParaRPr>
           </a:p>
+          <a:p>
+            <a:r>
+              <a:rPr lang="en-GB" sz="2100" dirty="0">
+                <a:solidFill>
+                  <a:schemeClr val="accent3">
+                    <a:lumMod val="50000"/>
+                  </a:schemeClr>
+                </a:solidFill>
+                <a:latin typeface="APL385 Unicode" panose="020B0709000202000203" pitchFamily="49" charset="0"/>
+              </a:rPr>
+              <a:t>     :If Temp&gt;0</a:t>
+            </a:r>
+          </a:p>
+          <a:p>
+            <a:r>
+              <a:rPr lang="en-GB" sz="2100" dirty="0">
+                <a:solidFill>
+                  <a:schemeClr val="accent3">
+                    <a:lumMod val="50000"/>
+                  </a:schemeClr>
+                </a:solidFill>
+                <a:latin typeface="APL385 Unicode" panose="020B0709000202000203" pitchFamily="49" charset="0"/>
+              </a:rPr>
+              <a:t>        :Leave</a:t>
+            </a:r>
+          </a:p>
+          <a:p>
+            <a:r>
+              <a:rPr lang="en-GB" sz="2100" dirty="0">
+                <a:solidFill>
+                  <a:schemeClr val="accent3">
+                    <a:lumMod val="50000"/>
+                  </a:schemeClr>
+                </a:solidFill>
+                <a:latin typeface="APL385 Unicode" panose="020B0709000202000203" pitchFamily="49" charset="0"/>
+              </a:rPr>
+              <a:t>     :</a:t>
+            </a:r>
+            <a:r>
+              <a:rPr lang="en-GB" sz="2100" dirty="0" err="1">
+                <a:solidFill>
+                  <a:schemeClr val="accent3">
+                    <a:lumMod val="50000"/>
+                  </a:schemeClr>
+                </a:solidFill>
+                <a:latin typeface="APL385 Unicode" panose="020B0709000202000203" pitchFamily="49" charset="0"/>
+              </a:rPr>
+              <a:t>EndIf</a:t>
+            </a:r>
+            <a:endParaRPr lang="en-GB" sz="2100" dirty="0">
+              <a:solidFill>
+                <a:schemeClr val="accent3">
+                  <a:lumMod val="50000"/>
+                </a:schemeClr>
+              </a:solidFill>
+              <a:latin typeface="APL385 Unicode" panose="020B0709000202000203" pitchFamily="49" charset="0"/>
+            </a:endParaRPr>
+          </a:p>
+          <a:p>
+            <a:r>
+              <a:rPr lang="en-GB" sz="2100" dirty="0">
+                <a:solidFill>
+                  <a:schemeClr val="accent3">
+                    <a:lumMod val="50000"/>
+                  </a:schemeClr>
+                </a:solidFill>
+                <a:latin typeface="APL385 Unicode" panose="020B0709000202000203" pitchFamily="49" charset="0"/>
+              </a:rPr>
+              <a:t>     'go skiing'</a:t>
+            </a:r>
+          </a:p>
+          <a:p>
+            <a:r>
+              <a:rPr lang="en-GB" sz="2100" dirty="0">
+                <a:solidFill>
+                  <a:schemeClr val="accent3">
+                    <a:lumMod val="50000"/>
+                  </a:schemeClr>
+                </a:solidFill>
+                <a:latin typeface="APL385 Unicode" panose="020B0709000202000203" pitchFamily="49" charset="0"/>
+              </a:rPr>
+              <a:t>:</a:t>
+            </a:r>
+            <a:r>
+              <a:rPr lang="en-GB" sz="2100" dirty="0" err="1">
+                <a:solidFill>
+                  <a:schemeClr val="accent3">
+                    <a:lumMod val="50000"/>
+                  </a:schemeClr>
+                </a:solidFill>
+                <a:latin typeface="APL385 Unicode" panose="020B0709000202000203" pitchFamily="49" charset="0"/>
+              </a:rPr>
+              <a:t>EndRepeat</a:t>
+            </a:r>
+            <a:endParaRPr lang="en-GB" sz="2100" dirty="0">
+              <a:solidFill>
+                <a:schemeClr val="accent3">
+                  <a:lumMod val="50000"/>
+                </a:schemeClr>
+              </a:solidFill>
+              <a:latin typeface="APL385 Unicode" panose="020B0709000202000203" pitchFamily="49" charset="0"/>
+            </a:endParaRPr>
+          </a:p>
         </p:txBody>
       </p:sp>
     </p:spTree>
     <p:extLst>
       <p:ext uri="{BB962C8B-B14F-4D97-AF65-F5344CB8AC3E}">
-        <p14:creationId xmlns:p14="http://schemas.microsoft.com/office/powerpoint/2010/main" val="849145131"/>
+        <p14:creationId xmlns:p14="http://schemas.microsoft.com/office/powerpoint/2010/main" val="333060428"/>
       </p:ext>
     </p:extLst>
   </p:cSld>
@@ -10804,7 +11072,7 @@
           <p:cNvPr id="2" name="Content Placeholder 1">
             <a:extLst>
               <a:ext uri="{FF2B5EF4-FFF2-40B4-BE49-F238E27FC236}">
-                <a16:creationId xmlns:a16="http://schemas.microsoft.com/office/drawing/2014/main" id="{40C89577-5248-2BC5-9A15-79AEFEAF13BF}"/>
+                <a16:creationId xmlns:a16="http://schemas.microsoft.com/office/drawing/2014/main" id="{4FF3C369-0682-4286-7ACB-13FBFD38F7E8}"/>
               </a:ext>
             </a:extLst>
           </p:cNvPr>
@@ -10825,7 +11093,7 @@
             </a:pPr>
             <a:r>
               <a:rPr lang="en-GB" dirty="0"/>
-              <a:t>Execute a block repeatedly for respective items within a series of values:</a:t>
+              <a:t>Execute a block repeatedly for a series of values:</a:t>
             </a:r>
           </a:p>
         </p:txBody>
@@ -10835,7 +11103,7 @@
           <p:cNvPr id="3" name="Title 2">
             <a:extLst>
               <a:ext uri="{FF2B5EF4-FFF2-40B4-BE49-F238E27FC236}">
-                <a16:creationId xmlns:a16="http://schemas.microsoft.com/office/drawing/2014/main" id="{7C81D77C-A8ED-D2D8-51D6-B769862F5CAF}"/>
+                <a16:creationId xmlns:a16="http://schemas.microsoft.com/office/drawing/2014/main" id="{4DD6A154-7779-9999-4876-1545F980A1FA}"/>
               </a:ext>
             </a:extLst>
           </p:cNvPr>
@@ -10857,14 +11125,6 @@
             </a:r>
             <a:r>
               <a:rPr lang="en-GB" dirty="0" err="1"/>
-              <a:t>InEach</a:t>
-            </a:r>
-            <a:r>
-              <a:rPr lang="en-GB" dirty="0"/>
-              <a:t> … :</a:t>
-            </a:r>
-            <a:r>
-              <a:rPr lang="en-GB" dirty="0" err="1"/>
               <a:t>EndFor</a:t>
             </a:r>
             <a:endParaRPr lang="en-GB" dirty="0"/>
@@ -10876,7 +11136,7 @@
           <p:cNvPr id="4" name="Media Placeholder 3">
             <a:extLst>
               <a:ext uri="{FF2B5EF4-FFF2-40B4-BE49-F238E27FC236}">
-                <a16:creationId xmlns:a16="http://schemas.microsoft.com/office/drawing/2014/main" id="{16753FF1-A72A-1273-0C60-16E35972ABA9}"/>
+                <a16:creationId xmlns:a16="http://schemas.microsoft.com/office/drawing/2014/main" id="{639296C3-2883-A7E1-E110-68417E8B355B}"/>
               </a:ext>
             </a:extLst>
           </p:cNvPr>
@@ -10901,7 +11161,7 @@
           <p:cNvPr id="5" name="TextBox 4">
             <a:extLst>
               <a:ext uri="{FF2B5EF4-FFF2-40B4-BE49-F238E27FC236}">
-                <a16:creationId xmlns:a16="http://schemas.microsoft.com/office/drawing/2014/main" id="{0E9B879D-1CF8-476A-C831-3237AE9831D0}"/>
+                <a16:creationId xmlns:a16="http://schemas.microsoft.com/office/drawing/2014/main" id="{5214B446-DA96-45F8-12D3-D8DAF0E42F0F}"/>
               </a:ext>
             </a:extLst>
           </p:cNvPr>
@@ -10910,18 +11170,13 @@
         </p:nvSpPr>
         <p:spPr>
           <a:xfrm>
-            <a:off x="64447" y="2163228"/>
-            <a:ext cx="4195133" cy="1938992"/>
+            <a:off x="1266614" y="2390134"/>
+            <a:ext cx="3610811" cy="1061829"/>
           </a:xfrm>
           <a:prstGeom prst="rect">
             <a:avLst/>
           </a:prstGeom>
           <a:noFill/>
-          <a:ln w="12700">
-            <a:solidFill>
-              <a:schemeClr val="tx1"/>
-            </a:solidFill>
-          </a:ln>
         </p:spPr>
         <p:txBody>
           <a:bodyPr wrap="square" numCol="1" rtlCol="0">
@@ -10930,7 +11185,120 @@
           <a:lstStyle/>
           <a:p>
             <a:r>
-              <a:rPr lang="en-GB" sz="2000" dirty="0">
+              <a:rPr lang="en-GB" sz="2100" dirty="0">
+                <a:solidFill>
+                  <a:srgbClr val="FF6600"/>
+                </a:solidFill>
+                <a:latin typeface="APL385 Unicode" panose="020B0709000202000203" pitchFamily="49" charset="0"/>
+              </a:rPr>
+              <a:t>:For  </a:t>
+            </a:r>
+            <a:r>
+              <a:rPr lang="en-GB" sz="2100" dirty="0">
+                <a:solidFill>
+                  <a:schemeClr val="tx1">
+                    <a:lumMod val="95000"/>
+                    <a:lumOff val="5000"/>
+                  </a:schemeClr>
+                </a:solidFill>
+                <a:latin typeface="APL385 Unicode" panose="020B0709000202000203" pitchFamily="49" charset="0"/>
+              </a:rPr>
+              <a:t>v </a:t>
+            </a:r>
+            <a:r>
+              <a:rPr lang="en-GB" sz="2100" dirty="0">
+                <a:solidFill>
+                  <a:srgbClr val="FF6600"/>
+                </a:solidFill>
+                <a:latin typeface="APL385 Unicode" panose="020B0709000202000203" pitchFamily="49" charset="0"/>
+              </a:rPr>
+              <a:t>:In </a:t>
+            </a:r>
+            <a:r>
+              <a:rPr lang="en-GB" sz="2100" dirty="0">
+                <a:solidFill>
+                  <a:schemeClr val="tx1">
+                    <a:lumMod val="95000"/>
+                    <a:lumOff val="5000"/>
+                  </a:schemeClr>
+                </a:solidFill>
+                <a:latin typeface="APL385 Unicode" panose="020B0709000202000203" pitchFamily="49" charset="0"/>
+              </a:rPr>
+              <a:t>values</a:t>
+            </a:r>
+          </a:p>
+          <a:p>
+            <a:r>
+              <a:rPr lang="en-GB" sz="2100" dirty="0">
+                <a:solidFill>
+                  <a:schemeClr val="tx1">
+                    <a:lumMod val="95000"/>
+                    <a:lumOff val="5000"/>
+                  </a:schemeClr>
+                </a:solidFill>
+                <a:latin typeface="APL385 Unicode" panose="020B0709000202000203" pitchFamily="49" charset="0"/>
+              </a:rPr>
+              <a:t>     do this</a:t>
+            </a:r>
+          </a:p>
+          <a:p>
+            <a:r>
+              <a:rPr lang="en-GB" sz="2100" dirty="0">
+                <a:solidFill>
+                  <a:srgbClr val="FF6600"/>
+                </a:solidFill>
+                <a:latin typeface="APL385 Unicode" panose="020B0709000202000203" pitchFamily="49" charset="0"/>
+              </a:rPr>
+              <a:t>:</a:t>
+            </a:r>
+            <a:r>
+              <a:rPr lang="en-GB" sz="2100" dirty="0" err="1">
+                <a:solidFill>
+                  <a:srgbClr val="FF6600"/>
+                </a:solidFill>
+                <a:latin typeface="APL385 Unicode" panose="020B0709000202000203" pitchFamily="49" charset="0"/>
+              </a:rPr>
+              <a:t>EndFor</a:t>
+            </a:r>
+            <a:endParaRPr lang="en-GB" sz="2100" dirty="0">
+              <a:solidFill>
+                <a:srgbClr val="FF6600"/>
+              </a:solidFill>
+              <a:latin typeface="APL385 Unicode" panose="020B0709000202000203" pitchFamily="49" charset="0"/>
+            </a:endParaRPr>
+          </a:p>
+        </p:txBody>
+      </p:sp>
+      <p:sp>
+        <p:nvSpPr>
+          <p:cNvPr id="6" name="TextBox 5">
+            <a:extLst>
+              <a:ext uri="{FF2B5EF4-FFF2-40B4-BE49-F238E27FC236}">
+                <a16:creationId xmlns:a16="http://schemas.microsoft.com/office/drawing/2014/main" id="{D47E156F-1061-1D99-D7E9-C6ED9F93E212}"/>
+              </a:ext>
+            </a:extLst>
+          </p:cNvPr>
+          <p:cNvSpPr txBox="1"/>
+          <p:nvPr/>
+        </p:nvSpPr>
+        <p:spPr>
+          <a:xfrm>
+            <a:off x="4797327" y="2390134"/>
+            <a:ext cx="3834426" cy="1061829"/>
+          </a:xfrm>
+          <a:prstGeom prst="rect">
+            <a:avLst/>
+          </a:prstGeom>
+          <a:noFill/>
+        </p:spPr>
+        <p:txBody>
+          <a:bodyPr wrap="square" numCol="1" rtlCol="0">
+            <a:spAutoFit/>
+          </a:bodyPr>
+          <a:lstStyle/>
+          <a:p>
+            <a:r>
+              <a:rPr lang="en-GB" sz="2100" dirty="0">
                 <a:solidFill>
                   <a:schemeClr val="accent3">
                     <a:lumMod val="50000"/>
@@ -10938,19 +11306,12 @@
                 </a:solidFill>
                 <a:latin typeface="APL385 Unicode" panose="020B0709000202000203" pitchFamily="49" charset="0"/>
               </a:rPr>
-              <a:t> :For v :In (</a:t>
-            </a:r>
-            <a:r>
-              <a:rPr lang="en-GB" sz="2000" dirty="0">
-                <a:solidFill>
-                  <a:srgbClr val="00B050"/>
-                </a:solidFill>
-                <a:latin typeface="APL385 Unicode" panose="020B0709000202000203" pitchFamily="49" charset="0"/>
-              </a:rPr>
-              <a:t>1 2 3</a:t>
-            </a:r>
-            <a:r>
-              <a:rPr lang="en-GB" sz="2000" dirty="0">
+              <a:t>:For n :In ⍳10</a:t>
+            </a:r>
+          </a:p>
+          <a:p>
+            <a:r>
+              <a:rPr lang="en-GB" sz="2100" dirty="0">
                 <a:solidFill>
                   <a:schemeClr val="accent3">
                     <a:lumMod val="50000"/>
@@ -10958,19 +11319,10 @@
                 </a:solidFill>
                 <a:latin typeface="APL385 Unicode" panose="020B0709000202000203" pitchFamily="49" charset="0"/>
               </a:rPr>
-              <a:t>)(</a:t>
-            </a:r>
-            <a:r>
-              <a:rPr lang="en-GB" sz="2000" dirty="0">
-                <a:solidFill>
-                  <a:srgbClr val="00B0F0"/>
-                </a:solidFill>
-                <a:latin typeface="APL385 Unicode" panose="020B0709000202000203" pitchFamily="49" charset="0"/>
-              </a:rPr>
-              <a:t>4 5 6</a:t>
-            </a:r>
-            <a:r>
-              <a:rPr lang="en-GB" sz="2000" dirty="0">
+              <a:t>    ⎕←</a:t>
+            </a:r>
+            <a:r>
+              <a:rPr lang="en-GB" sz="2100" dirty="0" err="1">
                 <a:solidFill>
                   <a:schemeClr val="accent3">
                     <a:lumMod val="50000"/>
@@ -10978,12 +11330,10 @@
                 </a:solidFill>
                 <a:latin typeface="APL385 Unicode" panose="020B0709000202000203" pitchFamily="49" charset="0"/>
               </a:rPr>
-              <a:t>)</a:t>
-            </a:r>
-          </a:p>
-          <a:p>
-            <a:r>
-              <a:rPr lang="en-GB" sz="2000" dirty="0">
+              <a:t>n,n</a:t>
+            </a:r>
+            <a:r>
+              <a:rPr lang="en-GB" sz="2100" dirty="0">
                 <a:solidFill>
                   <a:schemeClr val="accent3">
                     <a:lumMod val="50000"/>
@@ -10991,12 +11341,12 @@
                 </a:solidFill>
                 <a:latin typeface="APL385 Unicode" panose="020B0709000202000203" pitchFamily="49" charset="0"/>
               </a:rPr>
-              <a:t>     ⎕←v</a:t>
-            </a:r>
-          </a:p>
-          <a:p>
-            <a:r>
-              <a:rPr lang="en-GB" sz="2000" dirty="0">
+              <a:t>*2</a:t>
+            </a:r>
+          </a:p>
+          <a:p>
+            <a:r>
+              <a:rPr lang="en-GB" sz="2100" dirty="0">
                 <a:solidFill>
                   <a:schemeClr val="accent3">
                     <a:lumMod val="50000"/>
@@ -11004,10 +11354,10 @@
                 </a:solidFill>
                 <a:latin typeface="APL385 Unicode" panose="020B0709000202000203" pitchFamily="49" charset="0"/>
               </a:rPr>
-              <a:t> :</a:t>
-            </a:r>
-            <a:r>
-              <a:rPr lang="en-GB" sz="2000" dirty="0" err="1">
+              <a:t>:</a:t>
+            </a:r>
+            <a:r>
+              <a:rPr lang="en-GB" sz="2100" dirty="0" err="1">
                 <a:solidFill>
                   <a:schemeClr val="accent3">
                     <a:lumMod val="50000"/>
@@ -11017,7 +11367,7 @@
               </a:rPr>
               <a:t>EndFor</a:t>
             </a:r>
-            <a:endParaRPr lang="en-GB" sz="2000" dirty="0">
+            <a:endParaRPr lang="en-GB" sz="2100" dirty="0">
               <a:solidFill>
                 <a:schemeClr val="accent3">
                   <a:lumMod val="50000"/>
@@ -11026,321 +11376,12 @@
               <a:latin typeface="APL385 Unicode" panose="020B0709000202000203" pitchFamily="49" charset="0"/>
             </a:endParaRPr>
           </a:p>
-          <a:p>
-            <a:endParaRPr lang="en-GB" sz="2000" dirty="0">
-              <a:solidFill>
-                <a:schemeClr val="accent3">
-                  <a:lumMod val="50000"/>
-                </a:schemeClr>
-              </a:solidFill>
-              <a:latin typeface="APL385 Unicode" panose="020B0709000202000203" pitchFamily="49" charset="0"/>
-            </a:endParaRPr>
-          </a:p>
-          <a:p>
-            <a:r>
-              <a:rPr lang="en-GB" sz="2000" dirty="0">
-                <a:solidFill>
-                  <a:srgbClr val="00B050"/>
-                </a:solidFill>
-                <a:latin typeface="APL385 Unicode" panose="020B0709000202000203" pitchFamily="49" charset="0"/>
-              </a:rPr>
-              <a:t>1 2 3</a:t>
-            </a:r>
-          </a:p>
-          <a:p>
-            <a:r>
-              <a:rPr lang="en-GB" sz="2000" dirty="0">
-                <a:solidFill>
-                  <a:srgbClr val="00B0F0"/>
-                </a:solidFill>
-                <a:latin typeface="APL385 Unicode" panose="020B0709000202000203" pitchFamily="49" charset="0"/>
-              </a:rPr>
-              <a:t>4 5 6</a:t>
-            </a:r>
-          </a:p>
-        </p:txBody>
-      </p:sp>
-      <p:sp>
-        <p:nvSpPr>
-          <p:cNvPr id="6" name="TextBox 5">
-            <a:extLst>
-              <a:ext uri="{FF2B5EF4-FFF2-40B4-BE49-F238E27FC236}">
-                <a16:creationId xmlns:a16="http://schemas.microsoft.com/office/drawing/2014/main" id="{C8D8B4CD-3EA9-2631-47C8-212402471693}"/>
-              </a:ext>
-            </a:extLst>
-          </p:cNvPr>
-          <p:cNvSpPr txBox="1"/>
-          <p:nvPr/>
-        </p:nvSpPr>
-        <p:spPr>
-          <a:xfrm>
-            <a:off x="4259580" y="2163228"/>
-            <a:ext cx="4819973" cy="2246769"/>
-          </a:xfrm>
-          <a:prstGeom prst="rect">
-            <a:avLst/>
-          </a:prstGeom>
-          <a:noFill/>
-          <a:ln w="12700">
-            <a:solidFill>
-              <a:schemeClr val="tx1"/>
-            </a:solidFill>
-          </a:ln>
-        </p:spPr>
-        <p:txBody>
-          <a:bodyPr wrap="square" numCol="1" rtlCol="0">
-            <a:spAutoFit/>
-          </a:bodyPr>
-          <a:lstStyle/>
-          <a:p>
-            <a:r>
-              <a:rPr lang="en-GB" sz="2000" dirty="0">
-                <a:solidFill>
-                  <a:schemeClr val="accent3">
-                    <a:lumMod val="50000"/>
-                  </a:schemeClr>
-                </a:solidFill>
-                <a:latin typeface="APL385 Unicode" panose="020B0709000202000203" pitchFamily="49" charset="0"/>
-              </a:rPr>
-              <a:t> :For v :</a:t>
-            </a:r>
-            <a:r>
-              <a:rPr lang="en-GB" sz="2000" dirty="0" err="1">
-                <a:solidFill>
-                  <a:schemeClr val="accent3">
-                    <a:lumMod val="50000"/>
-                  </a:schemeClr>
-                </a:solidFill>
-                <a:latin typeface="APL385 Unicode" panose="020B0709000202000203" pitchFamily="49" charset="0"/>
-              </a:rPr>
-              <a:t>InEach</a:t>
-            </a:r>
-            <a:r>
-              <a:rPr lang="en-GB" sz="2000" dirty="0">
-                <a:solidFill>
-                  <a:schemeClr val="accent3">
-                    <a:lumMod val="50000"/>
-                  </a:schemeClr>
-                </a:solidFill>
-                <a:latin typeface="APL385 Unicode" panose="020B0709000202000203" pitchFamily="49" charset="0"/>
-              </a:rPr>
-              <a:t> (</a:t>
-            </a:r>
-            <a:r>
-              <a:rPr lang="en-GB" sz="2000" dirty="0">
-                <a:solidFill>
-                  <a:srgbClr val="00B050"/>
-                </a:solidFill>
-                <a:latin typeface="APL385 Unicode" panose="020B0709000202000203" pitchFamily="49" charset="0"/>
-              </a:rPr>
-              <a:t>1</a:t>
-            </a:r>
-            <a:r>
-              <a:rPr lang="en-GB" sz="2000" dirty="0">
-                <a:solidFill>
-                  <a:schemeClr val="accent3">
-                    <a:lumMod val="50000"/>
-                  </a:schemeClr>
-                </a:solidFill>
-                <a:latin typeface="APL385 Unicode" panose="020B0709000202000203" pitchFamily="49" charset="0"/>
-              </a:rPr>
-              <a:t> </a:t>
-            </a:r>
-            <a:r>
-              <a:rPr lang="en-GB" sz="2000" dirty="0">
-                <a:solidFill>
-                  <a:srgbClr val="00B0F0"/>
-                </a:solidFill>
-                <a:latin typeface="APL385 Unicode" panose="020B0709000202000203" pitchFamily="49" charset="0"/>
-              </a:rPr>
-              <a:t>2</a:t>
-            </a:r>
-            <a:r>
-              <a:rPr lang="en-GB" sz="2000" dirty="0">
-                <a:solidFill>
-                  <a:schemeClr val="accent3">
-                    <a:lumMod val="50000"/>
-                  </a:schemeClr>
-                </a:solidFill>
-                <a:latin typeface="APL385 Unicode" panose="020B0709000202000203" pitchFamily="49" charset="0"/>
-              </a:rPr>
-              <a:t> </a:t>
-            </a:r>
-            <a:r>
-              <a:rPr lang="en-GB" sz="2000" dirty="0">
-                <a:solidFill>
-                  <a:srgbClr val="FF0000"/>
-                </a:solidFill>
-                <a:latin typeface="APL385 Unicode" panose="020B0709000202000203" pitchFamily="49" charset="0"/>
-              </a:rPr>
-              <a:t>3</a:t>
-            </a:r>
-            <a:r>
-              <a:rPr lang="en-GB" sz="2000" dirty="0">
-                <a:solidFill>
-                  <a:schemeClr val="accent3">
-                    <a:lumMod val="50000"/>
-                  </a:schemeClr>
-                </a:solidFill>
-                <a:latin typeface="APL385 Unicode" panose="020B0709000202000203" pitchFamily="49" charset="0"/>
-              </a:rPr>
-              <a:t>)(</a:t>
-            </a:r>
-            <a:r>
-              <a:rPr lang="en-GB" sz="2000" dirty="0">
-                <a:solidFill>
-                  <a:srgbClr val="00B050"/>
-                </a:solidFill>
-                <a:latin typeface="APL385 Unicode" panose="020B0709000202000203" pitchFamily="49" charset="0"/>
-              </a:rPr>
-              <a:t>4</a:t>
-            </a:r>
-            <a:r>
-              <a:rPr lang="en-GB" sz="2000" dirty="0">
-                <a:solidFill>
-                  <a:schemeClr val="accent3">
-                    <a:lumMod val="50000"/>
-                  </a:schemeClr>
-                </a:solidFill>
-                <a:latin typeface="APL385 Unicode" panose="020B0709000202000203" pitchFamily="49" charset="0"/>
-              </a:rPr>
-              <a:t> </a:t>
-            </a:r>
-            <a:r>
-              <a:rPr lang="en-GB" sz="2000" dirty="0">
-                <a:solidFill>
-                  <a:srgbClr val="00B0F0"/>
-                </a:solidFill>
-                <a:latin typeface="APL385 Unicode" panose="020B0709000202000203" pitchFamily="49" charset="0"/>
-              </a:rPr>
-              <a:t>5</a:t>
-            </a:r>
-            <a:r>
-              <a:rPr lang="en-GB" sz="2000" dirty="0">
-                <a:solidFill>
-                  <a:schemeClr val="accent3">
-                    <a:lumMod val="50000"/>
-                  </a:schemeClr>
-                </a:solidFill>
-                <a:latin typeface="APL385 Unicode" panose="020B0709000202000203" pitchFamily="49" charset="0"/>
-              </a:rPr>
-              <a:t> </a:t>
-            </a:r>
-            <a:r>
-              <a:rPr lang="en-GB" sz="2000" dirty="0">
-                <a:solidFill>
-                  <a:srgbClr val="FF0000"/>
-                </a:solidFill>
-                <a:latin typeface="APL385 Unicode" panose="020B0709000202000203" pitchFamily="49" charset="0"/>
-              </a:rPr>
-              <a:t>6</a:t>
-            </a:r>
-            <a:r>
-              <a:rPr lang="en-GB" sz="2000" dirty="0">
-                <a:solidFill>
-                  <a:schemeClr val="accent3">
-                    <a:lumMod val="50000"/>
-                  </a:schemeClr>
-                </a:solidFill>
-                <a:latin typeface="APL385 Unicode" panose="020B0709000202000203" pitchFamily="49" charset="0"/>
-              </a:rPr>
-              <a:t>)</a:t>
-            </a:r>
-          </a:p>
-          <a:p>
-            <a:r>
-              <a:rPr lang="en-GB" sz="2000" dirty="0">
-                <a:solidFill>
-                  <a:schemeClr val="accent3">
-                    <a:lumMod val="50000"/>
-                  </a:schemeClr>
-                </a:solidFill>
-                <a:latin typeface="APL385 Unicode" panose="020B0709000202000203" pitchFamily="49" charset="0"/>
-              </a:rPr>
-              <a:t>     ⎕←v</a:t>
-            </a:r>
-          </a:p>
-          <a:p>
-            <a:r>
-              <a:rPr lang="en-GB" sz="2000" dirty="0">
-                <a:solidFill>
-                  <a:schemeClr val="accent3">
-                    <a:lumMod val="50000"/>
-                  </a:schemeClr>
-                </a:solidFill>
-                <a:latin typeface="APL385 Unicode" panose="020B0709000202000203" pitchFamily="49" charset="0"/>
-              </a:rPr>
-              <a:t> :</a:t>
-            </a:r>
-            <a:r>
-              <a:rPr lang="en-GB" sz="2000" dirty="0" err="1">
-                <a:solidFill>
-                  <a:schemeClr val="accent3">
-                    <a:lumMod val="50000"/>
-                  </a:schemeClr>
-                </a:solidFill>
-                <a:latin typeface="APL385 Unicode" panose="020B0709000202000203" pitchFamily="49" charset="0"/>
-              </a:rPr>
-              <a:t>EndFor</a:t>
-            </a:r>
-            <a:endParaRPr lang="en-GB" sz="2000" dirty="0">
-              <a:solidFill>
-                <a:schemeClr val="accent3">
-                  <a:lumMod val="50000"/>
-                </a:schemeClr>
-              </a:solidFill>
-              <a:latin typeface="APL385 Unicode" panose="020B0709000202000203" pitchFamily="49" charset="0"/>
-            </a:endParaRPr>
-          </a:p>
-          <a:p>
-            <a:endParaRPr lang="en-GB" sz="2000" dirty="0">
-              <a:solidFill>
-                <a:schemeClr val="accent3">
-                  <a:lumMod val="50000"/>
-                </a:schemeClr>
-              </a:solidFill>
-              <a:latin typeface="APL385 Unicode" panose="020B0709000202000203" pitchFamily="49" charset="0"/>
-            </a:endParaRPr>
-          </a:p>
-          <a:p>
-            <a:r>
-              <a:rPr lang="en-GB" sz="2000" dirty="0">
-                <a:solidFill>
-                  <a:srgbClr val="00B050"/>
-                </a:solidFill>
-                <a:latin typeface="APL385 Unicode" panose="020B0709000202000203" pitchFamily="49" charset="0"/>
-              </a:rPr>
-              <a:t>1 4</a:t>
-            </a:r>
-          </a:p>
-          <a:p>
-            <a:r>
-              <a:rPr lang="en-GB" sz="2000" dirty="0">
-                <a:solidFill>
-                  <a:srgbClr val="00B0F0"/>
-                </a:solidFill>
-                <a:latin typeface="APL385 Unicode" panose="020B0709000202000203" pitchFamily="49" charset="0"/>
-              </a:rPr>
-              <a:t>2 5</a:t>
-            </a:r>
-          </a:p>
-          <a:p>
-            <a:r>
-              <a:rPr lang="en-GB" sz="2000" dirty="0">
-                <a:solidFill>
-                  <a:srgbClr val="FF0000"/>
-                </a:solidFill>
-                <a:latin typeface="APL385 Unicode" panose="020B0709000202000203" pitchFamily="49" charset="0"/>
-              </a:rPr>
-              <a:t>3 6</a:t>
-            </a:r>
-          </a:p>
         </p:txBody>
       </p:sp>
     </p:spTree>
     <p:extLst>
       <p:ext uri="{BB962C8B-B14F-4D97-AF65-F5344CB8AC3E}">
-        <p14:creationId xmlns:p14="http://schemas.microsoft.com/office/powerpoint/2010/main" val="4118497592"/>
+        <p14:creationId xmlns:p14="http://schemas.microsoft.com/office/powerpoint/2010/main" val="849145131"/>
       </p:ext>
     </p:extLst>
   </p:cSld>
@@ -11372,7 +11413,7 @@
           <p:cNvPr id="2" name="Content Placeholder 1">
             <a:extLst>
               <a:ext uri="{FF2B5EF4-FFF2-40B4-BE49-F238E27FC236}">
-                <a16:creationId xmlns:a16="http://schemas.microsoft.com/office/drawing/2014/main" id="{BAA56090-75B2-BF7D-2119-7238F5D46AA7}"/>
+                <a16:creationId xmlns:a16="http://schemas.microsoft.com/office/drawing/2014/main" id="{40C89577-5248-2BC5-9A15-79AEFEAF13BF}"/>
               </a:ext>
             </a:extLst>
           </p:cNvPr>
@@ -11393,7 +11434,7 @@
             </a:pPr>
             <a:r>
               <a:rPr lang="en-GB" dirty="0"/>
-              <a:t>Skip the rest of the block.</a:t>
+              <a:t>Execute a block repeatedly for respective items within a series of values:</a:t>
             </a:r>
           </a:p>
         </p:txBody>
@@ -11403,7 +11444,7 @@
           <p:cNvPr id="3" name="Title 2">
             <a:extLst>
               <a:ext uri="{FF2B5EF4-FFF2-40B4-BE49-F238E27FC236}">
-                <a16:creationId xmlns:a16="http://schemas.microsoft.com/office/drawing/2014/main" id="{E957F6B9-FD3D-FA61-07FA-95DC963E03F6}"/>
+                <a16:creationId xmlns:a16="http://schemas.microsoft.com/office/drawing/2014/main" id="{7C81D77C-A8ED-D2D8-51D6-B769862F5CAF}"/>
               </a:ext>
             </a:extLst>
           </p:cNvPr>
@@ -11421,8 +11462,21 @@
           <a:p>
             <a:r>
               <a:rPr lang="en-GB" dirty="0"/>
-              <a:t>:Continue (within a loop)</a:t>
-            </a:r>
+              <a:t>:For … :</a:t>
+            </a:r>
+            <a:r>
+              <a:rPr lang="en-GB" dirty="0" err="1"/>
+              <a:t>InEach</a:t>
+            </a:r>
+            <a:r>
+              <a:rPr lang="en-GB" dirty="0"/>
+              <a:t> … :</a:t>
+            </a:r>
+            <a:r>
+              <a:rPr lang="en-GB" dirty="0" err="1"/>
+              <a:t>EndFor</a:t>
+            </a:r>
+            <a:endParaRPr lang="en-GB" dirty="0"/>
           </a:p>
         </p:txBody>
       </p:sp>
@@ -11431,7 +11485,7 @@
           <p:cNvPr id="4" name="Media Placeholder 3">
             <a:extLst>
               <a:ext uri="{FF2B5EF4-FFF2-40B4-BE49-F238E27FC236}">
-                <a16:creationId xmlns:a16="http://schemas.microsoft.com/office/drawing/2014/main" id="{A493EDCB-EBBB-22AE-7BC2-A3966D689EFC}"/>
+                <a16:creationId xmlns:a16="http://schemas.microsoft.com/office/drawing/2014/main" id="{16753FF1-A72A-1273-0C60-16E35972ABA9}"/>
               </a:ext>
             </a:extLst>
           </p:cNvPr>
@@ -11456,7 +11510,7 @@
           <p:cNvPr id="5" name="TextBox 4">
             <a:extLst>
               <a:ext uri="{FF2B5EF4-FFF2-40B4-BE49-F238E27FC236}">
-                <a16:creationId xmlns:a16="http://schemas.microsoft.com/office/drawing/2014/main" id="{1B9A2A3D-99C4-F9DB-6B88-AD309228D183}"/>
+                <a16:creationId xmlns:a16="http://schemas.microsoft.com/office/drawing/2014/main" id="{0E9B879D-1CF8-476A-C831-3237AE9831D0}"/>
               </a:ext>
             </a:extLst>
           </p:cNvPr>
@@ -11465,13 +11519,18 @@
         </p:nvSpPr>
         <p:spPr>
           <a:xfrm>
-            <a:off x="853440" y="1969657"/>
-            <a:ext cx="3308039" cy="2031325"/>
+            <a:off x="64447" y="2163228"/>
+            <a:ext cx="4195133" cy="1938992"/>
           </a:xfrm>
           <a:prstGeom prst="rect">
             <a:avLst/>
           </a:prstGeom>
           <a:noFill/>
+          <a:ln w="12700">
+            <a:solidFill>
+              <a:schemeClr val="tx1"/>
+            </a:solidFill>
+          </a:ln>
         </p:spPr>
         <p:txBody>
           <a:bodyPr wrap="square" numCol="1" rtlCol="0">
@@ -11480,147 +11539,7 @@
           <a:lstStyle/>
           <a:p>
             <a:r>
-              <a:rPr lang="en-GB" sz="2100" dirty="0">
-                <a:solidFill>
-                  <a:schemeClr val="tx1">
-                    <a:lumMod val="95000"/>
-                    <a:lumOff val="5000"/>
-                  </a:schemeClr>
-                </a:solidFill>
-                <a:latin typeface="APL385 Unicode" panose="020B0709000202000203" pitchFamily="49" charset="0"/>
-              </a:rPr>
-              <a:t>:For v :In values</a:t>
-            </a:r>
-          </a:p>
-          <a:p>
-            <a:r>
-              <a:rPr lang="en-GB" sz="2100" dirty="0">
-                <a:solidFill>
-                  <a:schemeClr val="tx1">
-                    <a:lumMod val="95000"/>
-                    <a:lumOff val="5000"/>
-                  </a:schemeClr>
-                </a:solidFill>
-                <a:latin typeface="APL385 Unicode" panose="020B0709000202000203" pitchFamily="49" charset="0"/>
-              </a:rPr>
-              <a:t>     …</a:t>
-            </a:r>
-          </a:p>
-          <a:p>
-            <a:r>
-              <a:rPr lang="en-GB" sz="2100" dirty="0">
-                <a:solidFill>
-                  <a:schemeClr val="tx1">
-                    <a:lumMod val="95000"/>
-                    <a:lumOff val="5000"/>
-                  </a:schemeClr>
-                </a:solidFill>
-                <a:latin typeface="APL385 Unicode" panose="020B0709000202000203" pitchFamily="49" charset="0"/>
-              </a:rPr>
-              <a:t>     </a:t>
-            </a:r>
-            <a:r>
-              <a:rPr lang="en-GB" sz="2100" dirty="0">
-                <a:solidFill>
-                  <a:srgbClr val="FF6600"/>
-                </a:solidFill>
-                <a:latin typeface="APL385 Unicode" panose="020B0709000202000203" pitchFamily="49" charset="0"/>
-              </a:rPr>
-              <a:t>:Continue</a:t>
-            </a:r>
-          </a:p>
-          <a:p>
-            <a:r>
-              <a:rPr lang="en-GB" sz="2100" dirty="0">
-                <a:solidFill>
-                  <a:schemeClr val="tx1">
-                    <a:lumMod val="95000"/>
-                    <a:lumOff val="5000"/>
-                  </a:schemeClr>
-                </a:solidFill>
-                <a:latin typeface="APL385 Unicode" panose="020B0709000202000203" pitchFamily="49" charset="0"/>
-              </a:rPr>
-              <a:t>     do this</a:t>
-            </a:r>
-          </a:p>
-          <a:p>
-            <a:endParaRPr lang="en-GB" sz="2100" dirty="0">
-              <a:solidFill>
-                <a:schemeClr val="tx1">
-                  <a:lumMod val="95000"/>
-                  <a:lumOff val="5000"/>
-                </a:schemeClr>
-              </a:solidFill>
-              <a:latin typeface="APL385 Unicode" panose="020B0709000202000203" pitchFamily="49" charset="0"/>
-            </a:endParaRPr>
-          </a:p>
-          <a:p>
-            <a:r>
-              <a:rPr lang="en-GB" sz="2100" dirty="0">
-                <a:solidFill>
-                  <a:schemeClr val="tx1">
-                    <a:lumMod val="95000"/>
-                    <a:lumOff val="5000"/>
-                  </a:schemeClr>
-                </a:solidFill>
-                <a:latin typeface="APL385 Unicode" panose="020B0709000202000203" pitchFamily="49" charset="0"/>
-              </a:rPr>
-              <a:t>:</a:t>
-            </a:r>
-            <a:r>
-              <a:rPr lang="en-GB" sz="2100" dirty="0" err="1">
-                <a:solidFill>
-                  <a:schemeClr val="tx1">
-                    <a:lumMod val="95000"/>
-                    <a:lumOff val="5000"/>
-                  </a:schemeClr>
-                </a:solidFill>
-                <a:latin typeface="APL385 Unicode" panose="020B0709000202000203" pitchFamily="49" charset="0"/>
-              </a:rPr>
-              <a:t>EndFor</a:t>
-            </a:r>
-            <a:endParaRPr lang="en-GB" sz="2100" dirty="0">
-              <a:solidFill>
-                <a:schemeClr val="tx1">
-                  <a:lumMod val="95000"/>
-                  <a:lumOff val="5000"/>
-                </a:schemeClr>
-              </a:solidFill>
-              <a:latin typeface="APL385 Unicode" panose="020B0709000202000203" pitchFamily="49" charset="0"/>
-            </a:endParaRPr>
-          </a:p>
-        </p:txBody>
-      </p:sp>
-      <p:sp>
-        <p:nvSpPr>
-          <p:cNvPr id="6" name="TextBox 5">
-            <a:extLst>
-              <a:ext uri="{FF2B5EF4-FFF2-40B4-BE49-F238E27FC236}">
-                <a16:creationId xmlns:a16="http://schemas.microsoft.com/office/drawing/2014/main" id="{CF0F85AB-5AEF-7797-6A1F-8ABBC7FAD95A}"/>
-              </a:ext>
-            </a:extLst>
-          </p:cNvPr>
-          <p:cNvSpPr txBox="1"/>
-          <p:nvPr/>
-        </p:nvSpPr>
-        <p:spPr>
-          <a:xfrm>
-            <a:off x="4445474" y="1969657"/>
-            <a:ext cx="3942438" cy="2031325"/>
-          </a:xfrm>
-          <a:prstGeom prst="rect">
-            <a:avLst/>
-          </a:prstGeom>
-          <a:noFill/>
-        </p:spPr>
-        <p:txBody>
-          <a:bodyPr wrap="square" numCol="1" rtlCol="0">
-            <a:spAutoFit/>
-          </a:bodyPr>
-          <a:lstStyle/>
-          <a:p>
-            <a:r>
-              <a:rPr lang="en-GB" sz="2100" dirty="0">
+              <a:rPr lang="en-GB" sz="2000" dirty="0">
                 <a:solidFill>
                   <a:schemeClr val="accent3">
                     <a:lumMod val="50000"/>
@@ -11628,12 +11547,19 @@
                 </a:solidFill>
                 <a:latin typeface="APL385 Unicode" panose="020B0709000202000203" pitchFamily="49" charset="0"/>
               </a:rPr>
-              <a:t>:For n :In ⍳10</a:t>
-            </a:r>
-          </a:p>
-          <a:p>
-            <a:r>
-              <a:rPr lang="en-GB" sz="2100" dirty="0">
+              <a:t> :For v :In (</a:t>
+            </a:r>
+            <a:r>
+              <a:rPr lang="en-GB" sz="2000" dirty="0">
+                <a:solidFill>
+                  <a:srgbClr val="00B050"/>
+                </a:solidFill>
+                <a:latin typeface="APL385 Unicode" panose="020B0709000202000203" pitchFamily="49" charset="0"/>
+              </a:rPr>
+              <a:t>1 2 3</a:t>
+            </a:r>
+            <a:r>
+              <a:rPr lang="en-GB" sz="2000" dirty="0">
                 <a:solidFill>
                   <a:schemeClr val="accent3">
                     <a:lumMod val="50000"/>
@@ -11641,12 +11567,19 @@
                 </a:solidFill>
                 <a:latin typeface="APL385 Unicode" panose="020B0709000202000203" pitchFamily="49" charset="0"/>
               </a:rPr>
-              <a:t>    :If n∊4 6</a:t>
-            </a:r>
-          </a:p>
-          <a:p>
-            <a:r>
-              <a:rPr lang="en-GB" sz="2100" dirty="0">
+              <a:t>)(</a:t>
+            </a:r>
+            <a:r>
+              <a:rPr lang="en-GB" sz="2000" dirty="0">
+                <a:solidFill>
+                  <a:srgbClr val="00B0F0"/>
+                </a:solidFill>
+                <a:latin typeface="APL385 Unicode" panose="020B0709000202000203" pitchFamily="49" charset="0"/>
+              </a:rPr>
+              <a:t>4 5 6</a:t>
+            </a:r>
+            <a:r>
+              <a:rPr lang="en-GB" sz="2000" dirty="0">
                 <a:solidFill>
                   <a:schemeClr val="accent3">
                     <a:lumMod val="50000"/>
@@ -11654,12 +11587,12 @@
                 </a:solidFill>
                 <a:latin typeface="APL385 Unicode" panose="020B0709000202000203" pitchFamily="49" charset="0"/>
               </a:rPr>
-              <a:t>	   :Continue</a:t>
-            </a:r>
-          </a:p>
-          <a:p>
-            <a:r>
-              <a:rPr lang="en-GB" sz="2100" dirty="0">
+              <a:t>)</a:t>
+            </a:r>
+          </a:p>
+          <a:p>
+            <a:r>
+              <a:rPr lang="en-GB" sz="2000" dirty="0">
                 <a:solidFill>
                   <a:schemeClr val="accent3">
                     <a:lumMod val="50000"/>
@@ -11667,10 +11600,12 @@
                 </a:solidFill>
                 <a:latin typeface="APL385 Unicode" panose="020B0709000202000203" pitchFamily="49" charset="0"/>
               </a:rPr>
-              <a:t>    :</a:t>
-            </a:r>
-            <a:r>
-              <a:rPr lang="en-GB" sz="2100" dirty="0" err="1">
+              <a:t>     ⎕←v</a:t>
+            </a:r>
+          </a:p>
+          <a:p>
+            <a:r>
+              <a:rPr lang="en-GB" sz="2000" dirty="0">
                 <a:solidFill>
                   <a:schemeClr val="accent3">
                     <a:lumMod val="50000"/>
@@ -11678,9 +11613,20 @@
                 </a:solidFill>
                 <a:latin typeface="APL385 Unicode" panose="020B0709000202000203" pitchFamily="49" charset="0"/>
               </a:rPr>
-              <a:t>EndIf</a:t>
-            </a:r>
-            <a:endParaRPr lang="en-GB" sz="2100" dirty="0">
+              <a:t> :</a:t>
+            </a:r>
+            <a:r>
+              <a:rPr lang="en-GB" sz="2000" dirty="0" err="1">
+                <a:solidFill>
+                  <a:schemeClr val="accent3">
+                    <a:lumMod val="50000"/>
+                  </a:schemeClr>
+                </a:solidFill>
+                <a:latin typeface="APL385 Unicode" panose="020B0709000202000203" pitchFamily="49" charset="0"/>
+              </a:rPr>
+              <a:t>EndFor</a:t>
+            </a:r>
+            <a:endParaRPr lang="en-GB" sz="2000" dirty="0">
               <a:solidFill>
                 <a:schemeClr val="accent3">
                   <a:lumMod val="50000"/>
@@ -11690,64 +11636,7 @@
             </a:endParaRPr>
           </a:p>
           <a:p>
-            <a:r>
-              <a:rPr lang="en-GB" sz="2100" dirty="0">
-                <a:solidFill>
-                  <a:schemeClr val="accent3">
-                    <a:lumMod val="50000"/>
-                  </a:schemeClr>
-                </a:solidFill>
-                <a:latin typeface="APL385 Unicode" panose="020B0709000202000203" pitchFamily="49" charset="0"/>
-              </a:rPr>
-              <a:t>    ⎕←</a:t>
-            </a:r>
-            <a:r>
-              <a:rPr lang="en-GB" sz="2100" dirty="0" err="1">
-                <a:solidFill>
-                  <a:schemeClr val="accent3">
-                    <a:lumMod val="50000"/>
-                  </a:schemeClr>
-                </a:solidFill>
-                <a:latin typeface="APL385 Unicode" panose="020B0709000202000203" pitchFamily="49" charset="0"/>
-              </a:rPr>
-              <a:t>n,n</a:t>
-            </a:r>
-            <a:r>
-              <a:rPr lang="en-GB" sz="2100" dirty="0">
-                <a:solidFill>
-                  <a:schemeClr val="accent3">
-                    <a:lumMod val="50000"/>
-                  </a:schemeClr>
-                </a:solidFill>
-                <a:latin typeface="APL385 Unicode" panose="020B0709000202000203" pitchFamily="49" charset="0"/>
-              </a:rPr>
-              <a:t>*2</a:t>
-            </a:r>
-          </a:p>
-          <a:p>
-            <a:r>
-              <a:rPr lang="en-GB" sz="2100" dirty="0">
-                <a:solidFill>
-                  <a:schemeClr val="accent3">
-                    <a:lumMod val="50000"/>
-                  </a:schemeClr>
-                </a:solidFill>
-                <a:latin typeface="APL385 Unicode" panose="020B0709000202000203" pitchFamily="49" charset="0"/>
-              </a:rPr>
-              <a:t>:</a:t>
-            </a:r>
-            <a:r>
-              <a:rPr lang="en-GB" sz="2100" dirty="0" err="1">
-                <a:solidFill>
-                  <a:schemeClr val="accent3">
-                    <a:lumMod val="50000"/>
-                  </a:schemeClr>
-                </a:solidFill>
-                <a:latin typeface="APL385 Unicode" panose="020B0709000202000203" pitchFamily="49" charset="0"/>
-              </a:rPr>
-              <a:t>EndFor</a:t>
-            </a:r>
-            <a:endParaRPr lang="en-GB" sz="2100" dirty="0">
+            <a:endParaRPr lang="en-GB" sz="2000" dirty="0">
               <a:solidFill>
                 <a:schemeClr val="accent3">
                   <a:lumMod val="50000"/>
@@ -11756,12 +11645,311 @@
               <a:latin typeface="APL385 Unicode" panose="020B0709000202000203" pitchFamily="49" charset="0"/>
             </a:endParaRPr>
           </a:p>
+          <a:p>
+            <a:r>
+              <a:rPr lang="en-GB" sz="2000" dirty="0">
+                <a:solidFill>
+                  <a:srgbClr val="00B050"/>
+                </a:solidFill>
+                <a:latin typeface="APL385 Unicode" panose="020B0709000202000203" pitchFamily="49" charset="0"/>
+              </a:rPr>
+              <a:t>1 2 3</a:t>
+            </a:r>
+          </a:p>
+          <a:p>
+            <a:r>
+              <a:rPr lang="en-GB" sz="2000" dirty="0">
+                <a:solidFill>
+                  <a:srgbClr val="00B0F0"/>
+                </a:solidFill>
+                <a:latin typeface="APL385 Unicode" panose="020B0709000202000203" pitchFamily="49" charset="0"/>
+              </a:rPr>
+              <a:t>4 5 6</a:t>
+            </a:r>
+          </a:p>
+        </p:txBody>
+      </p:sp>
+      <p:sp>
+        <p:nvSpPr>
+          <p:cNvPr id="6" name="TextBox 5">
+            <a:extLst>
+              <a:ext uri="{FF2B5EF4-FFF2-40B4-BE49-F238E27FC236}">
+                <a16:creationId xmlns:a16="http://schemas.microsoft.com/office/drawing/2014/main" id="{C8D8B4CD-3EA9-2631-47C8-212402471693}"/>
+              </a:ext>
+            </a:extLst>
+          </p:cNvPr>
+          <p:cNvSpPr txBox="1"/>
+          <p:nvPr/>
+        </p:nvSpPr>
+        <p:spPr>
+          <a:xfrm>
+            <a:off x="4259580" y="2163228"/>
+            <a:ext cx="4819973" cy="2246769"/>
+          </a:xfrm>
+          <a:prstGeom prst="rect">
+            <a:avLst/>
+          </a:prstGeom>
+          <a:noFill/>
+          <a:ln w="12700">
+            <a:solidFill>
+              <a:schemeClr val="tx1"/>
+            </a:solidFill>
+          </a:ln>
+        </p:spPr>
+        <p:txBody>
+          <a:bodyPr wrap="square" numCol="1" rtlCol="0">
+            <a:spAutoFit/>
+          </a:bodyPr>
+          <a:lstStyle/>
+          <a:p>
+            <a:r>
+              <a:rPr lang="en-GB" sz="2000" dirty="0">
+                <a:solidFill>
+                  <a:schemeClr val="accent3">
+                    <a:lumMod val="50000"/>
+                  </a:schemeClr>
+                </a:solidFill>
+                <a:latin typeface="APL385 Unicode" panose="020B0709000202000203" pitchFamily="49" charset="0"/>
+              </a:rPr>
+              <a:t> :For v :</a:t>
+            </a:r>
+            <a:r>
+              <a:rPr lang="en-GB" sz="2000" dirty="0" err="1">
+                <a:solidFill>
+                  <a:schemeClr val="accent3">
+                    <a:lumMod val="50000"/>
+                  </a:schemeClr>
+                </a:solidFill>
+                <a:latin typeface="APL385 Unicode" panose="020B0709000202000203" pitchFamily="49" charset="0"/>
+              </a:rPr>
+              <a:t>InEach</a:t>
+            </a:r>
+            <a:r>
+              <a:rPr lang="en-GB" sz="2000" dirty="0">
+                <a:solidFill>
+                  <a:schemeClr val="accent3">
+                    <a:lumMod val="50000"/>
+                  </a:schemeClr>
+                </a:solidFill>
+                <a:latin typeface="APL385 Unicode" panose="020B0709000202000203" pitchFamily="49" charset="0"/>
+              </a:rPr>
+              <a:t> (</a:t>
+            </a:r>
+            <a:r>
+              <a:rPr lang="en-GB" sz="2000" dirty="0">
+                <a:solidFill>
+                  <a:srgbClr val="00B050"/>
+                </a:solidFill>
+                <a:latin typeface="APL385 Unicode" panose="020B0709000202000203" pitchFamily="49" charset="0"/>
+              </a:rPr>
+              <a:t>1</a:t>
+            </a:r>
+            <a:r>
+              <a:rPr lang="en-GB" sz="2000" dirty="0">
+                <a:solidFill>
+                  <a:schemeClr val="accent3">
+                    <a:lumMod val="50000"/>
+                  </a:schemeClr>
+                </a:solidFill>
+                <a:latin typeface="APL385 Unicode" panose="020B0709000202000203" pitchFamily="49" charset="0"/>
+              </a:rPr>
+              <a:t> </a:t>
+            </a:r>
+            <a:r>
+              <a:rPr lang="en-GB" sz="2000" dirty="0">
+                <a:solidFill>
+                  <a:srgbClr val="00B0F0"/>
+                </a:solidFill>
+                <a:latin typeface="APL385 Unicode" panose="020B0709000202000203" pitchFamily="49" charset="0"/>
+              </a:rPr>
+              <a:t>2</a:t>
+            </a:r>
+            <a:r>
+              <a:rPr lang="en-GB" sz="2000" dirty="0">
+                <a:solidFill>
+                  <a:schemeClr val="accent3">
+                    <a:lumMod val="50000"/>
+                  </a:schemeClr>
+                </a:solidFill>
+                <a:latin typeface="APL385 Unicode" panose="020B0709000202000203" pitchFamily="49" charset="0"/>
+              </a:rPr>
+              <a:t> </a:t>
+            </a:r>
+            <a:r>
+              <a:rPr lang="en-GB" sz="2000" dirty="0">
+                <a:solidFill>
+                  <a:srgbClr val="FF0000"/>
+                </a:solidFill>
+                <a:latin typeface="APL385 Unicode" panose="020B0709000202000203" pitchFamily="49" charset="0"/>
+              </a:rPr>
+              <a:t>3</a:t>
+            </a:r>
+            <a:r>
+              <a:rPr lang="en-GB" sz="2000" dirty="0">
+                <a:solidFill>
+                  <a:schemeClr val="accent3">
+                    <a:lumMod val="50000"/>
+                  </a:schemeClr>
+                </a:solidFill>
+                <a:latin typeface="APL385 Unicode" panose="020B0709000202000203" pitchFamily="49" charset="0"/>
+              </a:rPr>
+              <a:t>)(</a:t>
+            </a:r>
+            <a:r>
+              <a:rPr lang="en-GB" sz="2000" dirty="0">
+                <a:solidFill>
+                  <a:srgbClr val="00B050"/>
+                </a:solidFill>
+                <a:latin typeface="APL385 Unicode" panose="020B0709000202000203" pitchFamily="49" charset="0"/>
+              </a:rPr>
+              <a:t>4</a:t>
+            </a:r>
+            <a:r>
+              <a:rPr lang="en-GB" sz="2000" dirty="0">
+                <a:solidFill>
+                  <a:schemeClr val="accent3">
+                    <a:lumMod val="50000"/>
+                  </a:schemeClr>
+                </a:solidFill>
+                <a:latin typeface="APL385 Unicode" panose="020B0709000202000203" pitchFamily="49" charset="0"/>
+              </a:rPr>
+              <a:t> </a:t>
+            </a:r>
+            <a:r>
+              <a:rPr lang="en-GB" sz="2000" dirty="0">
+                <a:solidFill>
+                  <a:srgbClr val="00B0F0"/>
+                </a:solidFill>
+                <a:latin typeface="APL385 Unicode" panose="020B0709000202000203" pitchFamily="49" charset="0"/>
+              </a:rPr>
+              <a:t>5</a:t>
+            </a:r>
+            <a:r>
+              <a:rPr lang="en-GB" sz="2000" dirty="0">
+                <a:solidFill>
+                  <a:schemeClr val="accent3">
+                    <a:lumMod val="50000"/>
+                  </a:schemeClr>
+                </a:solidFill>
+                <a:latin typeface="APL385 Unicode" panose="020B0709000202000203" pitchFamily="49" charset="0"/>
+              </a:rPr>
+              <a:t> </a:t>
+            </a:r>
+            <a:r>
+              <a:rPr lang="en-GB" sz="2000" dirty="0">
+                <a:solidFill>
+                  <a:srgbClr val="FF0000"/>
+                </a:solidFill>
+                <a:latin typeface="APL385 Unicode" panose="020B0709000202000203" pitchFamily="49" charset="0"/>
+              </a:rPr>
+              <a:t>6</a:t>
+            </a:r>
+            <a:r>
+              <a:rPr lang="en-GB" sz="2000" dirty="0">
+                <a:solidFill>
+                  <a:schemeClr val="accent3">
+                    <a:lumMod val="50000"/>
+                  </a:schemeClr>
+                </a:solidFill>
+                <a:latin typeface="APL385 Unicode" panose="020B0709000202000203" pitchFamily="49" charset="0"/>
+              </a:rPr>
+              <a:t>)</a:t>
+            </a:r>
+          </a:p>
+          <a:p>
+            <a:r>
+              <a:rPr lang="en-GB" sz="2000" dirty="0">
+                <a:solidFill>
+                  <a:schemeClr val="accent3">
+                    <a:lumMod val="50000"/>
+                  </a:schemeClr>
+                </a:solidFill>
+                <a:latin typeface="APL385 Unicode" panose="020B0709000202000203" pitchFamily="49" charset="0"/>
+              </a:rPr>
+              <a:t>     ⎕←v</a:t>
+            </a:r>
+          </a:p>
+          <a:p>
+            <a:r>
+              <a:rPr lang="en-GB" sz="2000" dirty="0">
+                <a:solidFill>
+                  <a:schemeClr val="accent3">
+                    <a:lumMod val="50000"/>
+                  </a:schemeClr>
+                </a:solidFill>
+                <a:latin typeface="APL385 Unicode" panose="020B0709000202000203" pitchFamily="49" charset="0"/>
+              </a:rPr>
+              <a:t> :</a:t>
+            </a:r>
+            <a:r>
+              <a:rPr lang="en-GB" sz="2000" dirty="0" err="1">
+                <a:solidFill>
+                  <a:schemeClr val="accent3">
+                    <a:lumMod val="50000"/>
+                  </a:schemeClr>
+                </a:solidFill>
+                <a:latin typeface="APL385 Unicode" panose="020B0709000202000203" pitchFamily="49" charset="0"/>
+              </a:rPr>
+              <a:t>EndFor</a:t>
+            </a:r>
+            <a:endParaRPr lang="en-GB" sz="2000" dirty="0">
+              <a:solidFill>
+                <a:schemeClr val="accent3">
+                  <a:lumMod val="50000"/>
+                </a:schemeClr>
+              </a:solidFill>
+              <a:latin typeface="APL385 Unicode" panose="020B0709000202000203" pitchFamily="49" charset="0"/>
+            </a:endParaRPr>
+          </a:p>
+          <a:p>
+            <a:endParaRPr lang="en-GB" sz="2000" dirty="0">
+              <a:solidFill>
+                <a:schemeClr val="accent3">
+                  <a:lumMod val="50000"/>
+                </a:schemeClr>
+              </a:solidFill>
+              <a:latin typeface="APL385 Unicode" panose="020B0709000202000203" pitchFamily="49" charset="0"/>
+            </a:endParaRPr>
+          </a:p>
+          <a:p>
+            <a:r>
+              <a:rPr lang="en-GB" sz="2000" dirty="0">
+                <a:solidFill>
+                  <a:srgbClr val="00B050"/>
+                </a:solidFill>
+                <a:latin typeface="APL385 Unicode" panose="020B0709000202000203" pitchFamily="49" charset="0"/>
+              </a:rPr>
+              <a:t>1 4</a:t>
+            </a:r>
+          </a:p>
+          <a:p>
+            <a:r>
+              <a:rPr lang="en-GB" sz="2000" dirty="0">
+                <a:solidFill>
+                  <a:srgbClr val="00B0F0"/>
+                </a:solidFill>
+                <a:latin typeface="APL385 Unicode" panose="020B0709000202000203" pitchFamily="49" charset="0"/>
+              </a:rPr>
+              <a:t>2 5</a:t>
+            </a:r>
+          </a:p>
+          <a:p>
+            <a:r>
+              <a:rPr lang="en-GB" sz="2000" dirty="0">
+                <a:solidFill>
+                  <a:srgbClr val="FF0000"/>
+                </a:solidFill>
+                <a:latin typeface="APL385 Unicode" panose="020B0709000202000203" pitchFamily="49" charset="0"/>
+              </a:rPr>
+              <a:t>3 6</a:t>
+            </a:r>
+          </a:p>
         </p:txBody>
       </p:sp>
     </p:spTree>
     <p:extLst>
       <p:ext uri="{BB962C8B-B14F-4D97-AF65-F5344CB8AC3E}">
-        <p14:creationId xmlns:p14="http://schemas.microsoft.com/office/powerpoint/2010/main" val="3853638245"/>
+        <p14:creationId xmlns:p14="http://schemas.microsoft.com/office/powerpoint/2010/main" val="4118497592"/>
       </p:ext>
     </p:extLst>
   </p:cSld>
@@ -11793,7 +11981,7 @@
           <p:cNvPr id="2" name="Content Placeholder 1">
             <a:extLst>
               <a:ext uri="{FF2B5EF4-FFF2-40B4-BE49-F238E27FC236}">
-                <a16:creationId xmlns:a16="http://schemas.microsoft.com/office/drawing/2014/main" id="{834B8C1C-29E7-5B08-F7BD-6C285DAD352A}"/>
+                <a16:creationId xmlns:a16="http://schemas.microsoft.com/office/drawing/2014/main" id="{BAA56090-75B2-BF7D-2119-7238F5D46AA7}"/>
               </a:ext>
             </a:extLst>
           </p:cNvPr>
@@ -11813,96 +12001,8 @@
               <a:buNone/>
             </a:pPr>
             <a:r>
-              <a:rPr lang="en-GB" dirty="0" err="1">
-                <a:solidFill>
-                  <a:schemeClr val="tx1">
-                    <a:lumMod val="95000"/>
-                    <a:lumOff val="5000"/>
-                  </a:schemeClr>
-                </a:solidFill>
-              </a:rPr>
-              <a:t>TradFns</a:t>
-            </a:r>
-            <a:r>
-              <a:rPr lang="en-GB" dirty="0">
-                <a:solidFill>
-                  <a:schemeClr val="tx1">
-                    <a:lumMod val="95000"/>
-                    <a:lumOff val="5000"/>
-                  </a:schemeClr>
-                </a:solidFill>
-              </a:rPr>
-              <a:t> end when the </a:t>
-            </a:r>
-            <a:r>
-              <a:rPr lang="en-GB" b="1" dirty="0">
-                <a:solidFill>
-                  <a:schemeClr val="tx1">
-                    <a:lumMod val="95000"/>
-                    <a:lumOff val="5000"/>
-                  </a:schemeClr>
-                </a:solidFill>
-              </a:rPr>
-              <a:t>last</a:t>
-            </a:r>
-            <a:r>
-              <a:rPr lang="en-GB" dirty="0">
-                <a:solidFill>
-                  <a:schemeClr val="tx1">
-                    <a:lumMod val="95000"/>
-                    <a:lumOff val="5000"/>
-                  </a:schemeClr>
-                </a:solidFill>
-              </a:rPr>
-              <a:t> line is executed. You can exit earlier using:</a:t>
-            </a:r>
-          </a:p>
-          <a:p>
-            <a:pPr marL="0" indent="0">
-              <a:buNone/>
-            </a:pPr>
-            <a:r>
-              <a:rPr lang="en-GB" dirty="0">
-                <a:solidFill>
-                  <a:schemeClr val="tx1">
-                    <a:lumMod val="95000"/>
-                    <a:lumOff val="5000"/>
-                  </a:schemeClr>
-                </a:solidFill>
-              </a:rPr>
-              <a:t> </a:t>
-            </a:r>
-          </a:p>
-          <a:p>
-            <a:pPr marL="0" indent="0">
-              <a:buNone/>
-            </a:pPr>
-            <a:r>
-              <a:rPr lang="en-GB" dirty="0">
-                <a:solidFill>
-                  <a:schemeClr val="accent3">
-                    <a:lumMod val="50000"/>
-                  </a:schemeClr>
-                </a:solidFill>
-                <a:latin typeface="APL385 Unicode" panose="020B0709000202000203" pitchFamily="49" charset="0"/>
-              </a:rPr>
-              <a:t>     →0    </a:t>
-            </a:r>
-          </a:p>
-          <a:p>
-            <a:pPr marL="0" indent="0">
-              <a:buNone/>
-            </a:pPr>
-            <a:r>
-              <a:rPr lang="en-GB" dirty="0">
-                <a:solidFill>
-                  <a:schemeClr val="accent3">
-                    <a:lumMod val="50000"/>
-                  </a:schemeClr>
-                </a:solidFill>
-                <a:latin typeface="APL385 Unicode" panose="020B0709000202000203" pitchFamily="49" charset="0"/>
-              </a:rPr>
-              <a:t>     :Return</a:t>
+              <a:rPr lang="en-GB" dirty="0"/>
+              <a:t>Skip the rest of the block.</a:t>
             </a:r>
           </a:p>
         </p:txBody>
@@ -11912,7 +12012,7 @@
           <p:cNvPr id="3" name="Title 2">
             <a:extLst>
               <a:ext uri="{FF2B5EF4-FFF2-40B4-BE49-F238E27FC236}">
-                <a16:creationId xmlns:a16="http://schemas.microsoft.com/office/drawing/2014/main" id="{2296BBB8-F323-02F3-95F8-476C73D1DC60}"/>
+                <a16:creationId xmlns:a16="http://schemas.microsoft.com/office/drawing/2014/main" id="{E957F6B9-FD3D-FA61-07FA-95DC963E03F6}"/>
               </a:ext>
             </a:extLst>
           </p:cNvPr>
@@ -11930,7 +12030,7 @@
           <a:p>
             <a:r>
               <a:rPr lang="en-GB" dirty="0"/>
-              <a:t>:Leave</a:t>
+              <a:t>:Continue (within a loop)</a:t>
             </a:r>
           </a:p>
         </p:txBody>
@@ -11940,7 +12040,7 @@
           <p:cNvPr id="4" name="Media Placeholder 3">
             <a:extLst>
               <a:ext uri="{FF2B5EF4-FFF2-40B4-BE49-F238E27FC236}">
-                <a16:creationId xmlns:a16="http://schemas.microsoft.com/office/drawing/2014/main" id="{CB75383F-22F2-17F5-D908-CCB5296487E1}"/>
+                <a16:creationId xmlns:a16="http://schemas.microsoft.com/office/drawing/2014/main" id="{A493EDCB-EBBB-22AE-7BC2-A3966D689EFC}"/>
               </a:ext>
             </a:extLst>
           </p:cNvPr>
@@ -11960,10 +12060,317 @@
           </a:p>
         </p:txBody>
       </p:sp>
+      <p:sp>
+        <p:nvSpPr>
+          <p:cNvPr id="5" name="TextBox 4">
+            <a:extLst>
+              <a:ext uri="{FF2B5EF4-FFF2-40B4-BE49-F238E27FC236}">
+                <a16:creationId xmlns:a16="http://schemas.microsoft.com/office/drawing/2014/main" id="{1B9A2A3D-99C4-F9DB-6B88-AD309228D183}"/>
+              </a:ext>
+            </a:extLst>
+          </p:cNvPr>
+          <p:cNvSpPr txBox="1"/>
+          <p:nvPr/>
+        </p:nvSpPr>
+        <p:spPr>
+          <a:xfrm>
+            <a:off x="853440" y="1969657"/>
+            <a:ext cx="3308039" cy="2031325"/>
+          </a:xfrm>
+          <a:prstGeom prst="rect">
+            <a:avLst/>
+          </a:prstGeom>
+          <a:noFill/>
+        </p:spPr>
+        <p:txBody>
+          <a:bodyPr wrap="square" numCol="1" rtlCol="0">
+            <a:spAutoFit/>
+          </a:bodyPr>
+          <a:lstStyle/>
+          <a:p>
+            <a:r>
+              <a:rPr lang="en-GB" sz="2100" dirty="0">
+                <a:solidFill>
+                  <a:schemeClr val="tx1">
+                    <a:lumMod val="95000"/>
+                    <a:lumOff val="5000"/>
+                  </a:schemeClr>
+                </a:solidFill>
+                <a:latin typeface="APL385 Unicode" panose="020B0709000202000203" pitchFamily="49" charset="0"/>
+              </a:rPr>
+              <a:t>:For v :In values</a:t>
+            </a:r>
+          </a:p>
+          <a:p>
+            <a:r>
+              <a:rPr lang="en-GB" sz="2100" dirty="0">
+                <a:solidFill>
+                  <a:schemeClr val="tx1">
+                    <a:lumMod val="95000"/>
+                    <a:lumOff val="5000"/>
+                  </a:schemeClr>
+                </a:solidFill>
+                <a:latin typeface="APL385 Unicode" panose="020B0709000202000203" pitchFamily="49" charset="0"/>
+              </a:rPr>
+              <a:t>     …</a:t>
+            </a:r>
+          </a:p>
+          <a:p>
+            <a:r>
+              <a:rPr lang="en-GB" sz="2100" dirty="0">
+                <a:solidFill>
+                  <a:schemeClr val="tx1">
+                    <a:lumMod val="95000"/>
+                    <a:lumOff val="5000"/>
+                  </a:schemeClr>
+                </a:solidFill>
+                <a:latin typeface="APL385 Unicode" panose="020B0709000202000203" pitchFamily="49" charset="0"/>
+              </a:rPr>
+              <a:t>     </a:t>
+            </a:r>
+            <a:r>
+              <a:rPr lang="en-GB" sz="2100" dirty="0">
+                <a:solidFill>
+                  <a:srgbClr val="FF6600"/>
+                </a:solidFill>
+                <a:latin typeface="APL385 Unicode" panose="020B0709000202000203" pitchFamily="49" charset="0"/>
+              </a:rPr>
+              <a:t>:Continue</a:t>
+            </a:r>
+          </a:p>
+          <a:p>
+            <a:r>
+              <a:rPr lang="en-GB" sz="2100" dirty="0">
+                <a:solidFill>
+                  <a:schemeClr val="tx1">
+                    <a:lumMod val="95000"/>
+                    <a:lumOff val="5000"/>
+                  </a:schemeClr>
+                </a:solidFill>
+                <a:latin typeface="APL385 Unicode" panose="020B0709000202000203" pitchFamily="49" charset="0"/>
+              </a:rPr>
+              <a:t>     do this</a:t>
+            </a:r>
+          </a:p>
+          <a:p>
+            <a:endParaRPr lang="en-GB" sz="2100" dirty="0">
+              <a:solidFill>
+                <a:schemeClr val="tx1">
+                  <a:lumMod val="95000"/>
+                  <a:lumOff val="5000"/>
+                </a:schemeClr>
+              </a:solidFill>
+              <a:latin typeface="APL385 Unicode" panose="020B0709000202000203" pitchFamily="49" charset="0"/>
+            </a:endParaRPr>
+          </a:p>
+          <a:p>
+            <a:r>
+              <a:rPr lang="en-GB" sz="2100" dirty="0">
+                <a:solidFill>
+                  <a:schemeClr val="tx1">
+                    <a:lumMod val="95000"/>
+                    <a:lumOff val="5000"/>
+                  </a:schemeClr>
+                </a:solidFill>
+                <a:latin typeface="APL385 Unicode" panose="020B0709000202000203" pitchFamily="49" charset="0"/>
+              </a:rPr>
+              <a:t>:</a:t>
+            </a:r>
+            <a:r>
+              <a:rPr lang="en-GB" sz="2100" dirty="0" err="1">
+                <a:solidFill>
+                  <a:schemeClr val="tx1">
+                    <a:lumMod val="95000"/>
+                    <a:lumOff val="5000"/>
+                  </a:schemeClr>
+                </a:solidFill>
+                <a:latin typeface="APL385 Unicode" panose="020B0709000202000203" pitchFamily="49" charset="0"/>
+              </a:rPr>
+              <a:t>EndFor</a:t>
+            </a:r>
+            <a:endParaRPr lang="en-GB" sz="2100" dirty="0">
+              <a:solidFill>
+                <a:schemeClr val="tx1">
+                  <a:lumMod val="95000"/>
+                  <a:lumOff val="5000"/>
+                </a:schemeClr>
+              </a:solidFill>
+              <a:latin typeface="APL385 Unicode" panose="020B0709000202000203" pitchFamily="49" charset="0"/>
+            </a:endParaRPr>
+          </a:p>
+        </p:txBody>
+      </p:sp>
+      <p:sp>
+        <p:nvSpPr>
+          <p:cNvPr id="6" name="TextBox 5">
+            <a:extLst>
+              <a:ext uri="{FF2B5EF4-FFF2-40B4-BE49-F238E27FC236}">
+                <a16:creationId xmlns:a16="http://schemas.microsoft.com/office/drawing/2014/main" id="{CF0F85AB-5AEF-7797-6A1F-8ABBC7FAD95A}"/>
+              </a:ext>
+            </a:extLst>
+          </p:cNvPr>
+          <p:cNvSpPr txBox="1"/>
+          <p:nvPr/>
+        </p:nvSpPr>
+        <p:spPr>
+          <a:xfrm>
+            <a:off x="4445474" y="1969657"/>
+            <a:ext cx="3942438" cy="2031325"/>
+          </a:xfrm>
+          <a:prstGeom prst="rect">
+            <a:avLst/>
+          </a:prstGeom>
+          <a:noFill/>
+        </p:spPr>
+        <p:txBody>
+          <a:bodyPr wrap="square" numCol="1" rtlCol="0">
+            <a:spAutoFit/>
+          </a:bodyPr>
+          <a:lstStyle/>
+          <a:p>
+            <a:r>
+              <a:rPr lang="en-GB" sz="2100" dirty="0">
+                <a:solidFill>
+                  <a:schemeClr val="accent3">
+                    <a:lumMod val="50000"/>
+                  </a:schemeClr>
+                </a:solidFill>
+                <a:latin typeface="APL385 Unicode" panose="020B0709000202000203" pitchFamily="49" charset="0"/>
+              </a:rPr>
+              <a:t>:For n :In ⍳10</a:t>
+            </a:r>
+          </a:p>
+          <a:p>
+            <a:r>
+              <a:rPr lang="en-GB" sz="2100" dirty="0">
+                <a:solidFill>
+                  <a:schemeClr val="accent3">
+                    <a:lumMod val="50000"/>
+                  </a:schemeClr>
+                </a:solidFill>
+                <a:latin typeface="APL385 Unicode" panose="020B0709000202000203" pitchFamily="49" charset="0"/>
+              </a:rPr>
+              <a:t>    :If n∊4 6</a:t>
+            </a:r>
+          </a:p>
+          <a:p>
+            <a:r>
+              <a:rPr lang="en-GB" sz="2100" dirty="0">
+                <a:solidFill>
+                  <a:schemeClr val="accent3">
+                    <a:lumMod val="50000"/>
+                  </a:schemeClr>
+                </a:solidFill>
+                <a:latin typeface="APL385 Unicode" panose="020B0709000202000203" pitchFamily="49" charset="0"/>
+              </a:rPr>
+              <a:t>	   :Continue</a:t>
+            </a:r>
+          </a:p>
+          <a:p>
+            <a:r>
+              <a:rPr lang="en-GB" sz="2100" dirty="0">
+                <a:solidFill>
+                  <a:schemeClr val="accent3">
+                    <a:lumMod val="50000"/>
+                  </a:schemeClr>
+                </a:solidFill>
+                <a:latin typeface="APL385 Unicode" panose="020B0709000202000203" pitchFamily="49" charset="0"/>
+              </a:rPr>
+              <a:t>    :</a:t>
+            </a:r>
+            <a:r>
+              <a:rPr lang="en-GB" sz="2100" dirty="0" err="1">
+                <a:solidFill>
+                  <a:schemeClr val="accent3">
+                    <a:lumMod val="50000"/>
+                  </a:schemeClr>
+                </a:solidFill>
+                <a:latin typeface="APL385 Unicode" panose="020B0709000202000203" pitchFamily="49" charset="0"/>
+              </a:rPr>
+              <a:t>EndIf</a:t>
+            </a:r>
+            <a:endParaRPr lang="en-GB" sz="2100" dirty="0">
+              <a:solidFill>
+                <a:schemeClr val="accent3">
+                  <a:lumMod val="50000"/>
+                </a:schemeClr>
+              </a:solidFill>
+              <a:latin typeface="APL385 Unicode" panose="020B0709000202000203" pitchFamily="49" charset="0"/>
+            </a:endParaRPr>
+          </a:p>
+          <a:p>
+            <a:r>
+              <a:rPr lang="en-GB" sz="2100" dirty="0">
+                <a:solidFill>
+                  <a:schemeClr val="accent3">
+                    <a:lumMod val="50000"/>
+                  </a:schemeClr>
+                </a:solidFill>
+                <a:latin typeface="APL385 Unicode" panose="020B0709000202000203" pitchFamily="49" charset="0"/>
+              </a:rPr>
+              <a:t>    ⎕←</a:t>
+            </a:r>
+            <a:r>
+              <a:rPr lang="en-GB" sz="2100" dirty="0" err="1">
+                <a:solidFill>
+                  <a:schemeClr val="accent3">
+                    <a:lumMod val="50000"/>
+                  </a:schemeClr>
+                </a:solidFill>
+                <a:latin typeface="APL385 Unicode" panose="020B0709000202000203" pitchFamily="49" charset="0"/>
+              </a:rPr>
+              <a:t>n,n</a:t>
+            </a:r>
+            <a:r>
+              <a:rPr lang="en-GB" sz="2100" dirty="0">
+                <a:solidFill>
+                  <a:schemeClr val="accent3">
+                    <a:lumMod val="50000"/>
+                  </a:schemeClr>
+                </a:solidFill>
+                <a:latin typeface="APL385 Unicode" panose="020B0709000202000203" pitchFamily="49" charset="0"/>
+              </a:rPr>
+              <a:t>*2</a:t>
+            </a:r>
+          </a:p>
+          <a:p>
+            <a:r>
+              <a:rPr lang="en-GB" sz="2100" dirty="0">
+                <a:solidFill>
+                  <a:schemeClr val="accent3">
+                    <a:lumMod val="50000"/>
+                  </a:schemeClr>
+                </a:solidFill>
+                <a:latin typeface="APL385 Unicode" panose="020B0709000202000203" pitchFamily="49" charset="0"/>
+              </a:rPr>
+              <a:t>:</a:t>
+            </a:r>
+            <a:r>
+              <a:rPr lang="en-GB" sz="2100" dirty="0" err="1">
+                <a:solidFill>
+                  <a:schemeClr val="accent3">
+                    <a:lumMod val="50000"/>
+                  </a:schemeClr>
+                </a:solidFill>
+                <a:latin typeface="APL385 Unicode" panose="020B0709000202000203" pitchFamily="49" charset="0"/>
+              </a:rPr>
+              <a:t>EndFor</a:t>
+            </a:r>
+            <a:endParaRPr lang="en-GB" sz="2100" dirty="0">
+              <a:solidFill>
+                <a:schemeClr val="accent3">
+                  <a:lumMod val="50000"/>
+                </a:schemeClr>
+              </a:solidFill>
+              <a:latin typeface="APL385 Unicode" panose="020B0709000202000203" pitchFamily="49" charset="0"/>
+            </a:endParaRPr>
+          </a:p>
+        </p:txBody>
+      </p:sp>
     </p:spTree>
     <p:extLst>
       <p:ext uri="{BB962C8B-B14F-4D97-AF65-F5344CB8AC3E}">
-        <p14:creationId xmlns:p14="http://schemas.microsoft.com/office/powerpoint/2010/main" val="447987532"/>
+        <p14:creationId xmlns:p14="http://schemas.microsoft.com/office/powerpoint/2010/main" val="3853638245"/>
       </p:ext>
     </p:extLst>
   </p:cSld>
@@ -11995,6 +12402,208 @@
           <p:cNvPr id="2" name="Content Placeholder 1">
             <a:extLst>
               <a:ext uri="{FF2B5EF4-FFF2-40B4-BE49-F238E27FC236}">
+                <a16:creationId xmlns:a16="http://schemas.microsoft.com/office/drawing/2014/main" id="{834B8C1C-29E7-5B08-F7BD-6C285DAD352A}"/>
+              </a:ext>
+            </a:extLst>
+          </p:cNvPr>
+          <p:cNvSpPr>
+            <a:spLocks noGrp="1"/>
+          </p:cNvSpPr>
+          <p:nvPr>
+            <p:ph idx="1"/>
+          </p:nvPr>
+        </p:nvSpPr>
+        <p:spPr/>
+        <p:txBody>
+          <a:bodyPr/>
+          <a:lstStyle/>
+          <a:p>
+            <a:pPr marL="0" indent="0">
+              <a:buNone/>
+            </a:pPr>
+            <a:r>
+              <a:rPr lang="en-GB" dirty="0" err="1">
+                <a:solidFill>
+                  <a:schemeClr val="tx1">
+                    <a:lumMod val="95000"/>
+                    <a:lumOff val="5000"/>
+                  </a:schemeClr>
+                </a:solidFill>
+              </a:rPr>
+              <a:t>TradFns</a:t>
+            </a:r>
+            <a:r>
+              <a:rPr lang="en-GB" dirty="0">
+                <a:solidFill>
+                  <a:schemeClr val="tx1">
+                    <a:lumMod val="95000"/>
+                    <a:lumOff val="5000"/>
+                  </a:schemeClr>
+                </a:solidFill>
+              </a:rPr>
+              <a:t> end when the </a:t>
+            </a:r>
+            <a:r>
+              <a:rPr lang="en-GB" b="1" dirty="0">
+                <a:solidFill>
+                  <a:schemeClr val="tx1">
+                    <a:lumMod val="95000"/>
+                    <a:lumOff val="5000"/>
+                  </a:schemeClr>
+                </a:solidFill>
+              </a:rPr>
+              <a:t>last</a:t>
+            </a:r>
+            <a:r>
+              <a:rPr lang="en-GB" dirty="0">
+                <a:solidFill>
+                  <a:schemeClr val="tx1">
+                    <a:lumMod val="95000"/>
+                    <a:lumOff val="5000"/>
+                  </a:schemeClr>
+                </a:solidFill>
+              </a:rPr>
+              <a:t> line is executed. You can exit earlier using:</a:t>
+            </a:r>
+          </a:p>
+          <a:p>
+            <a:pPr marL="0" indent="0">
+              <a:buNone/>
+            </a:pPr>
+            <a:r>
+              <a:rPr lang="en-GB" dirty="0">
+                <a:solidFill>
+                  <a:schemeClr val="tx1">
+                    <a:lumMod val="95000"/>
+                    <a:lumOff val="5000"/>
+                  </a:schemeClr>
+                </a:solidFill>
+              </a:rPr>
+              <a:t> </a:t>
+            </a:r>
+          </a:p>
+          <a:p>
+            <a:pPr marL="0" indent="0">
+              <a:buNone/>
+            </a:pPr>
+            <a:r>
+              <a:rPr lang="en-GB" dirty="0">
+                <a:solidFill>
+                  <a:schemeClr val="accent3">
+                    <a:lumMod val="50000"/>
+                  </a:schemeClr>
+                </a:solidFill>
+                <a:latin typeface="APL385 Unicode" panose="020B0709000202000203" pitchFamily="49" charset="0"/>
+              </a:rPr>
+              <a:t>     →0    </a:t>
+            </a:r>
+          </a:p>
+          <a:p>
+            <a:pPr marL="0" indent="0">
+              <a:buNone/>
+            </a:pPr>
+            <a:r>
+              <a:rPr lang="en-GB" dirty="0">
+                <a:solidFill>
+                  <a:schemeClr val="accent3">
+                    <a:lumMod val="50000"/>
+                  </a:schemeClr>
+                </a:solidFill>
+                <a:latin typeface="APL385 Unicode" panose="020B0709000202000203" pitchFamily="49" charset="0"/>
+              </a:rPr>
+              <a:t>     :Return</a:t>
+            </a:r>
+          </a:p>
+        </p:txBody>
+      </p:sp>
+      <p:sp>
+        <p:nvSpPr>
+          <p:cNvPr id="3" name="Title 2">
+            <a:extLst>
+              <a:ext uri="{FF2B5EF4-FFF2-40B4-BE49-F238E27FC236}">
+                <a16:creationId xmlns:a16="http://schemas.microsoft.com/office/drawing/2014/main" id="{2296BBB8-F323-02F3-95F8-476C73D1DC60}"/>
+              </a:ext>
+            </a:extLst>
+          </p:cNvPr>
+          <p:cNvSpPr>
+            <a:spLocks noGrp="1"/>
+          </p:cNvSpPr>
+          <p:nvPr>
+            <p:ph type="title"/>
+          </p:nvPr>
+        </p:nvSpPr>
+        <p:spPr/>
+        <p:txBody>
+          <a:bodyPr/>
+          <a:lstStyle/>
+          <a:p>
+            <a:r>
+              <a:rPr lang="en-GB" dirty="0"/>
+              <a:t>:Leave</a:t>
+            </a:r>
+          </a:p>
+        </p:txBody>
+      </p:sp>
+      <p:sp>
+        <p:nvSpPr>
+          <p:cNvPr id="4" name="Media Placeholder 3">
+            <a:extLst>
+              <a:ext uri="{FF2B5EF4-FFF2-40B4-BE49-F238E27FC236}">
+                <a16:creationId xmlns:a16="http://schemas.microsoft.com/office/drawing/2014/main" id="{CB75383F-22F2-17F5-D908-CCB5296487E1}"/>
+              </a:ext>
+            </a:extLst>
+          </p:cNvPr>
+          <p:cNvSpPr>
+            <a:spLocks noGrp="1"/>
+          </p:cNvSpPr>
+          <p:nvPr>
+            <p:ph type="media" sz="quarter" idx="11"/>
+          </p:nvPr>
+        </p:nvSpPr>
+        <p:spPr/>
+        <p:txBody>
+          <a:bodyPr/>
+          <a:lstStyle/>
+          <a:p>
+            <a:endParaRPr lang="en-GB"/>
+          </a:p>
+        </p:txBody>
+      </p:sp>
+    </p:spTree>
+    <p:extLst>
+      <p:ext uri="{BB962C8B-B14F-4D97-AF65-F5344CB8AC3E}">
+        <p14:creationId xmlns:p14="http://schemas.microsoft.com/office/powerpoint/2010/main" val="447987532"/>
+      </p:ext>
+    </p:extLst>
+  </p:cSld>
+  <p:clrMapOvr>
+    <a:masterClrMapping/>
+  </p:clrMapOvr>
+</p:sld>
+</file>
+
+<file path=ppt/slides/slide37.xml><?xml version="1.0" encoding="utf-8"?>
+<p:sld xmlns:a="http://schemas.openxmlformats.org/drawingml/2006/main" xmlns:r="http://schemas.openxmlformats.org/officeDocument/2006/relationships" xmlns:p="http://schemas.openxmlformats.org/presentationml/2006/main">
+  <p:cSld>
+    <p:spTree>
+      <p:nvGrpSpPr>
+        <p:cNvPr id="1" name=""/>
+        <p:cNvGrpSpPr/>
+        <p:nvPr/>
+      </p:nvGrpSpPr>
+      <p:grpSpPr>
+        <a:xfrm>
+          <a:off x="0" y="0"/>
+          <a:ext cx="0" cy="0"/>
+          <a:chOff x="0" y="0"/>
+          <a:chExt cx="0" cy="0"/>
+        </a:xfrm>
+      </p:grpSpPr>
+      <p:sp>
+        <p:nvSpPr>
+          <p:cNvPr id="2" name="Content Placeholder 1">
+            <a:extLst>
+              <a:ext uri="{FF2B5EF4-FFF2-40B4-BE49-F238E27FC236}">
                 <a16:creationId xmlns:a16="http://schemas.microsoft.com/office/drawing/2014/main" id="{699F89D6-DBE4-95F3-83C9-21C511E9BB2E}"/>
               </a:ext>
             </a:extLst>
@@ -12283,7 +12892,7 @@
 </p:sld>
 </file>
 
-<file path=ppt/slides/slide37.xml><?xml version="1.0" encoding="utf-8"?>
+<file path=ppt/slides/slide38.xml><?xml version="1.0" encoding="utf-8"?>
 <p:sld xmlns:a="http://schemas.openxmlformats.org/drawingml/2006/main" xmlns:r="http://schemas.openxmlformats.org/officeDocument/2006/relationships" xmlns:p="http://schemas.openxmlformats.org/presentationml/2006/main">
   <p:cSld>
     <p:spTree>
@@ -12436,7 +13045,7 @@
 </p:sld>
 </file>
 
-<file path=ppt/slides/slide38.xml><?xml version="1.0" encoding="utf-8"?>
+<file path=ppt/slides/slide39.xml><?xml version="1.0" encoding="utf-8"?>
 <p:sld xmlns:a="http://schemas.openxmlformats.org/drawingml/2006/main" xmlns:r="http://schemas.openxmlformats.org/officeDocument/2006/relationships" xmlns:p="http://schemas.openxmlformats.org/presentationml/2006/main">
   <p:cSld>
     <p:spTree>
@@ -12654,317 +13263,6 @@
     <p:extLst>
       <p:ext uri="{BB962C8B-B14F-4D97-AF65-F5344CB8AC3E}">
         <p14:creationId xmlns:p14="http://schemas.microsoft.com/office/powerpoint/2010/main" val="3213052345"/>
-      </p:ext>
-    </p:extLst>
-  </p:cSld>
-  <p:clrMapOvr>
-    <a:masterClrMapping/>
-  </p:clrMapOvr>
-</p:sld>
-</file>
-
-<file path=ppt/slides/slide39.xml><?xml version="1.0" encoding="utf-8"?>
-<p:sld xmlns:a="http://schemas.openxmlformats.org/drawingml/2006/main" xmlns:r="http://schemas.openxmlformats.org/officeDocument/2006/relationships" xmlns:p="http://schemas.openxmlformats.org/presentationml/2006/main">
-  <p:cSld>
-    <p:spTree>
-      <p:nvGrpSpPr>
-        <p:cNvPr id="1" name="">
-          <a:extLst>
-            <a:ext uri="{FF2B5EF4-FFF2-40B4-BE49-F238E27FC236}">
-              <a16:creationId xmlns:a16="http://schemas.microsoft.com/office/drawing/2014/main" id="{E71C2299-48BF-B9CC-E254-A6D40DC778D0}"/>
-            </a:ext>
-          </a:extLst>
-        </p:cNvPr>
-        <p:cNvGrpSpPr/>
-        <p:nvPr/>
-      </p:nvGrpSpPr>
-      <p:grpSpPr>
-        <a:xfrm>
-          <a:off x="0" y="0"/>
-          <a:ext cx="0" cy="0"/>
-          <a:chOff x="0" y="0"/>
-          <a:chExt cx="0" cy="0"/>
-        </a:xfrm>
-      </p:grpSpPr>
-      <p:sp>
-        <p:nvSpPr>
-          <p:cNvPr id="2" name="Content Placeholder 1">
-            <a:extLst>
-              <a:ext uri="{FF2B5EF4-FFF2-40B4-BE49-F238E27FC236}">
-                <a16:creationId xmlns:a16="http://schemas.microsoft.com/office/drawing/2014/main" id="{CC8ECDA8-A321-8080-0583-EA23D0248FE3}"/>
-              </a:ext>
-            </a:extLst>
-          </p:cNvPr>
-          <p:cNvSpPr>
-            <a:spLocks noGrp="1"/>
-          </p:cNvSpPr>
-          <p:nvPr>
-            <p:ph idx="1"/>
-          </p:nvPr>
-        </p:nvSpPr>
-        <p:spPr/>
-        <p:txBody>
-          <a:bodyPr>
-            <a:normAutofit fontScale="70000" lnSpcReduction="20000"/>
-          </a:bodyPr>
-          <a:lstStyle/>
-          <a:p>
-            <a:pPr marL="0" indent="0">
-              <a:buNone/>
-            </a:pPr>
-            <a:r>
-              <a:rPr lang="en-GB" dirty="0">
-                <a:solidFill>
-                  <a:schemeClr val="tx1">
-                    <a:lumMod val="95000"/>
-                    <a:lumOff val="5000"/>
-                  </a:schemeClr>
-                </a:solidFill>
-                <a:latin typeface="APL385 Unicode" panose="020B0709000202000203" pitchFamily="49" charset="0"/>
-              </a:rPr>
-              <a:t> →(condition)/1+⎕LC ⋄ expression </a:t>
-            </a:r>
-            <a:r>
-              <a:rPr lang="en-GB" dirty="0">
-                <a:solidFill>
-                  <a:schemeClr val="tx1">
-                    <a:lumMod val="95000"/>
-                    <a:lumOff val="5000"/>
-                  </a:schemeClr>
-                </a:solidFill>
-              </a:rPr>
-              <a:t>    </a:t>
-            </a:r>
-          </a:p>
-          <a:p>
-            <a:pPr marL="0" indent="0">
-              <a:buNone/>
-            </a:pPr>
-            <a:endParaRPr lang="en-GB" dirty="0">
-              <a:solidFill>
-                <a:schemeClr val="tx1">
-                  <a:lumMod val="95000"/>
-                  <a:lumOff val="5000"/>
-                </a:schemeClr>
-              </a:solidFill>
-            </a:endParaRPr>
-          </a:p>
-          <a:p>
-            <a:pPr marL="0" indent="0">
-              <a:buNone/>
-            </a:pPr>
-            <a:r>
-              <a:rPr lang="en-GB" dirty="0">
-                <a:solidFill>
-                  <a:schemeClr val="tx1">
-                    <a:lumMod val="95000"/>
-                    <a:lumOff val="5000"/>
-                  </a:schemeClr>
-                </a:solidFill>
-              </a:rPr>
-              <a:t>… conditionally branches to the next line (</a:t>
-            </a:r>
-            <a:r>
-              <a:rPr lang="en-GB" dirty="0">
-                <a:solidFill>
-                  <a:schemeClr val="tx1">
-                    <a:lumMod val="95000"/>
-                    <a:lumOff val="5000"/>
-                  </a:schemeClr>
-                </a:solidFill>
-                <a:latin typeface="APL385 Unicode" panose="020B0709000202000203" pitchFamily="49" charset="0"/>
-              </a:rPr>
-              <a:t>⎕LC </a:t>
-            </a:r>
-            <a:r>
-              <a:rPr lang="en-GB" dirty="0">
-                <a:solidFill>
-                  <a:schemeClr val="tx1">
-                    <a:lumMod val="95000"/>
-                    <a:lumOff val="5000"/>
-                  </a:schemeClr>
-                </a:solidFill>
-              </a:rPr>
-              <a:t>is the line counter). This is equivalent to …</a:t>
-            </a:r>
-          </a:p>
-          <a:p>
-            <a:endParaRPr lang="en-GB" dirty="0">
-              <a:solidFill>
-                <a:schemeClr val="tx1">
-                  <a:lumMod val="95000"/>
-                  <a:lumOff val="5000"/>
-                </a:schemeClr>
-              </a:solidFill>
-            </a:endParaRPr>
-          </a:p>
-          <a:p>
-            <a:pPr marL="0" indent="0">
-              <a:buNone/>
-            </a:pPr>
-            <a:r>
-              <a:rPr lang="en-GB" dirty="0">
-                <a:solidFill>
-                  <a:schemeClr val="tx1">
-                    <a:lumMod val="95000"/>
-                    <a:lumOff val="5000"/>
-                  </a:schemeClr>
-                </a:solidFill>
-                <a:latin typeface="APL385 Unicode" panose="020B0709000202000203" pitchFamily="49" charset="0"/>
-              </a:rPr>
-              <a:t>:If ~condition</a:t>
-            </a:r>
-            <a:br>
-              <a:rPr lang="en-GB" dirty="0">
-                <a:solidFill>
-                  <a:schemeClr val="tx1">
-                    <a:lumMod val="95000"/>
-                    <a:lumOff val="5000"/>
-                  </a:schemeClr>
-                </a:solidFill>
-                <a:latin typeface="APL385 Unicode" panose="020B0709000202000203" pitchFamily="49" charset="0"/>
-              </a:rPr>
-            </a:br>
-            <a:r>
-              <a:rPr lang="en-GB" dirty="0">
-                <a:solidFill>
-                  <a:schemeClr val="tx1">
-                    <a:lumMod val="95000"/>
-                    <a:lumOff val="5000"/>
-                  </a:schemeClr>
-                </a:solidFill>
-                <a:latin typeface="APL385 Unicode" panose="020B0709000202000203" pitchFamily="49" charset="0"/>
-              </a:rPr>
-              <a:t>    expression</a:t>
-            </a:r>
-            <a:br>
-              <a:rPr lang="en-GB" dirty="0">
-                <a:solidFill>
-                  <a:schemeClr val="tx1">
-                    <a:lumMod val="95000"/>
-                    <a:lumOff val="5000"/>
-                  </a:schemeClr>
-                </a:solidFill>
-                <a:latin typeface="APL385 Unicode" panose="020B0709000202000203" pitchFamily="49" charset="0"/>
-              </a:rPr>
-            </a:br>
-            <a:r>
-              <a:rPr lang="en-GB" dirty="0">
-                <a:solidFill>
-                  <a:schemeClr val="tx1">
-                    <a:lumMod val="95000"/>
-                    <a:lumOff val="5000"/>
-                  </a:schemeClr>
-                </a:solidFill>
-                <a:latin typeface="APL385 Unicode" panose="020B0709000202000203" pitchFamily="49" charset="0"/>
-              </a:rPr>
-              <a:t>:</a:t>
-            </a:r>
-            <a:r>
-              <a:rPr lang="en-GB" dirty="0" err="1">
-                <a:solidFill>
-                  <a:schemeClr val="tx1">
-                    <a:lumMod val="95000"/>
-                    <a:lumOff val="5000"/>
-                  </a:schemeClr>
-                </a:solidFill>
-                <a:latin typeface="APL385 Unicode" panose="020B0709000202000203" pitchFamily="49" charset="0"/>
-              </a:rPr>
-              <a:t>EndIf</a:t>
-            </a:r>
-            <a:endParaRPr lang="en-GB" dirty="0">
-              <a:solidFill>
-                <a:schemeClr val="tx1">
-                  <a:lumMod val="95000"/>
-                  <a:lumOff val="5000"/>
-                </a:schemeClr>
-              </a:solidFill>
-              <a:latin typeface="APL385 Unicode" panose="020B0709000202000203" pitchFamily="49" charset="0"/>
-            </a:endParaRPr>
-          </a:p>
-          <a:p>
-            <a:endParaRPr lang="en-GB" dirty="0">
-              <a:solidFill>
-                <a:schemeClr val="tx1">
-                  <a:lumMod val="95000"/>
-                  <a:lumOff val="5000"/>
-                </a:schemeClr>
-              </a:solidFill>
-              <a:latin typeface="APL385 Unicode" panose="020B0709000202000203" pitchFamily="49" charset="0"/>
-            </a:endParaRPr>
-          </a:p>
-          <a:p>
-            <a:r>
-              <a:rPr lang="en-GB" dirty="0">
-                <a:solidFill>
-                  <a:schemeClr val="tx1">
-                    <a:lumMod val="95000"/>
-                    <a:lumOff val="5000"/>
-                  </a:schemeClr>
-                </a:solidFill>
-              </a:rPr>
-              <a:t>DO NOT remove the diamond, you will BREAK the code!</a:t>
-            </a:r>
-          </a:p>
-        </p:txBody>
-      </p:sp>
-      <p:sp>
-        <p:nvSpPr>
-          <p:cNvPr id="3" name="Title 2">
-            <a:extLst>
-              <a:ext uri="{FF2B5EF4-FFF2-40B4-BE49-F238E27FC236}">
-                <a16:creationId xmlns:a16="http://schemas.microsoft.com/office/drawing/2014/main" id="{933F36ED-92F7-AA30-E9BA-9D090F297D94}"/>
-              </a:ext>
-            </a:extLst>
-          </p:cNvPr>
-          <p:cNvSpPr>
-            <a:spLocks noGrp="1"/>
-          </p:cNvSpPr>
-          <p:nvPr>
-            <p:ph type="title"/>
-          </p:nvPr>
-        </p:nvSpPr>
-        <p:spPr/>
-        <p:txBody>
-          <a:bodyPr/>
-          <a:lstStyle/>
-          <a:p>
-            <a:r>
-              <a:rPr lang="en-GB" dirty="0"/>
-              <a:t>Branching</a:t>
-            </a:r>
-          </a:p>
-        </p:txBody>
-      </p:sp>
-      <p:sp>
-        <p:nvSpPr>
-          <p:cNvPr id="4" name="Media Placeholder 3">
-            <a:extLst>
-              <a:ext uri="{FF2B5EF4-FFF2-40B4-BE49-F238E27FC236}">
-                <a16:creationId xmlns:a16="http://schemas.microsoft.com/office/drawing/2014/main" id="{96DCEB9B-0668-ED9A-F07E-6896304FC2BE}"/>
-              </a:ext>
-            </a:extLst>
-          </p:cNvPr>
-          <p:cNvSpPr>
-            <a:spLocks noGrp="1"/>
-          </p:cNvSpPr>
-          <p:nvPr>
-            <p:ph type="media" sz="quarter" idx="11"/>
-          </p:nvPr>
-        </p:nvSpPr>
-        <p:spPr/>
-        <p:txBody>
-          <a:bodyPr/>
-          <a:lstStyle/>
-          <a:p>
-            <a:endParaRPr lang="en-GB"/>
-          </a:p>
-        </p:txBody>
-      </p:sp>
-    </p:spTree>
-    <p:extLst>
-      <p:ext uri="{BB962C8B-B14F-4D97-AF65-F5344CB8AC3E}">
-        <p14:creationId xmlns:p14="http://schemas.microsoft.com/office/powerpoint/2010/main" val="3860118664"/>
       </p:ext>
     </p:extLst>
   </p:cSld>
@@ -13096,6 +13394,317 @@
         <p:cNvPr id="1" name="">
           <a:extLst>
             <a:ext uri="{FF2B5EF4-FFF2-40B4-BE49-F238E27FC236}">
+              <a16:creationId xmlns:a16="http://schemas.microsoft.com/office/drawing/2014/main" id="{E71C2299-48BF-B9CC-E254-A6D40DC778D0}"/>
+            </a:ext>
+          </a:extLst>
+        </p:cNvPr>
+        <p:cNvGrpSpPr/>
+        <p:nvPr/>
+      </p:nvGrpSpPr>
+      <p:grpSpPr>
+        <a:xfrm>
+          <a:off x="0" y="0"/>
+          <a:ext cx="0" cy="0"/>
+          <a:chOff x="0" y="0"/>
+          <a:chExt cx="0" cy="0"/>
+        </a:xfrm>
+      </p:grpSpPr>
+      <p:sp>
+        <p:nvSpPr>
+          <p:cNvPr id="2" name="Content Placeholder 1">
+            <a:extLst>
+              <a:ext uri="{FF2B5EF4-FFF2-40B4-BE49-F238E27FC236}">
+                <a16:creationId xmlns:a16="http://schemas.microsoft.com/office/drawing/2014/main" id="{CC8ECDA8-A321-8080-0583-EA23D0248FE3}"/>
+              </a:ext>
+            </a:extLst>
+          </p:cNvPr>
+          <p:cNvSpPr>
+            <a:spLocks noGrp="1"/>
+          </p:cNvSpPr>
+          <p:nvPr>
+            <p:ph idx="1"/>
+          </p:nvPr>
+        </p:nvSpPr>
+        <p:spPr/>
+        <p:txBody>
+          <a:bodyPr>
+            <a:normAutofit fontScale="70000" lnSpcReduction="20000"/>
+          </a:bodyPr>
+          <a:lstStyle/>
+          <a:p>
+            <a:pPr marL="0" indent="0">
+              <a:buNone/>
+            </a:pPr>
+            <a:r>
+              <a:rPr lang="en-GB" dirty="0">
+                <a:solidFill>
+                  <a:schemeClr val="tx1">
+                    <a:lumMod val="95000"/>
+                    <a:lumOff val="5000"/>
+                  </a:schemeClr>
+                </a:solidFill>
+                <a:latin typeface="APL385 Unicode" panose="020B0709000202000203" pitchFamily="49" charset="0"/>
+              </a:rPr>
+              <a:t> →(condition)/1+⎕LC ⋄ expression </a:t>
+            </a:r>
+            <a:r>
+              <a:rPr lang="en-GB" dirty="0">
+                <a:solidFill>
+                  <a:schemeClr val="tx1">
+                    <a:lumMod val="95000"/>
+                    <a:lumOff val="5000"/>
+                  </a:schemeClr>
+                </a:solidFill>
+              </a:rPr>
+              <a:t>    </a:t>
+            </a:r>
+          </a:p>
+          <a:p>
+            <a:pPr marL="0" indent="0">
+              <a:buNone/>
+            </a:pPr>
+            <a:endParaRPr lang="en-GB" dirty="0">
+              <a:solidFill>
+                <a:schemeClr val="tx1">
+                  <a:lumMod val="95000"/>
+                  <a:lumOff val="5000"/>
+                </a:schemeClr>
+              </a:solidFill>
+            </a:endParaRPr>
+          </a:p>
+          <a:p>
+            <a:pPr marL="0" indent="0">
+              <a:buNone/>
+            </a:pPr>
+            <a:r>
+              <a:rPr lang="en-GB" dirty="0">
+                <a:solidFill>
+                  <a:schemeClr val="tx1">
+                    <a:lumMod val="95000"/>
+                    <a:lumOff val="5000"/>
+                  </a:schemeClr>
+                </a:solidFill>
+              </a:rPr>
+              <a:t>… conditionally branches to the next line (</a:t>
+            </a:r>
+            <a:r>
+              <a:rPr lang="en-GB" dirty="0">
+                <a:solidFill>
+                  <a:schemeClr val="tx1">
+                    <a:lumMod val="95000"/>
+                    <a:lumOff val="5000"/>
+                  </a:schemeClr>
+                </a:solidFill>
+                <a:latin typeface="APL385 Unicode" panose="020B0709000202000203" pitchFamily="49" charset="0"/>
+              </a:rPr>
+              <a:t>⎕LC </a:t>
+            </a:r>
+            <a:r>
+              <a:rPr lang="en-GB" dirty="0">
+                <a:solidFill>
+                  <a:schemeClr val="tx1">
+                    <a:lumMod val="95000"/>
+                    <a:lumOff val="5000"/>
+                  </a:schemeClr>
+                </a:solidFill>
+              </a:rPr>
+              <a:t>is the line counter). This is equivalent to …</a:t>
+            </a:r>
+          </a:p>
+          <a:p>
+            <a:endParaRPr lang="en-GB" dirty="0">
+              <a:solidFill>
+                <a:schemeClr val="tx1">
+                  <a:lumMod val="95000"/>
+                  <a:lumOff val="5000"/>
+                </a:schemeClr>
+              </a:solidFill>
+            </a:endParaRPr>
+          </a:p>
+          <a:p>
+            <a:pPr marL="0" indent="0">
+              <a:buNone/>
+            </a:pPr>
+            <a:r>
+              <a:rPr lang="en-GB" dirty="0">
+                <a:solidFill>
+                  <a:schemeClr val="tx1">
+                    <a:lumMod val="95000"/>
+                    <a:lumOff val="5000"/>
+                  </a:schemeClr>
+                </a:solidFill>
+                <a:latin typeface="APL385 Unicode" panose="020B0709000202000203" pitchFamily="49" charset="0"/>
+              </a:rPr>
+              <a:t>:If ~condition</a:t>
+            </a:r>
+            <a:br>
+              <a:rPr lang="en-GB" dirty="0">
+                <a:solidFill>
+                  <a:schemeClr val="tx1">
+                    <a:lumMod val="95000"/>
+                    <a:lumOff val="5000"/>
+                  </a:schemeClr>
+                </a:solidFill>
+                <a:latin typeface="APL385 Unicode" panose="020B0709000202000203" pitchFamily="49" charset="0"/>
+              </a:rPr>
+            </a:br>
+            <a:r>
+              <a:rPr lang="en-GB" dirty="0">
+                <a:solidFill>
+                  <a:schemeClr val="tx1">
+                    <a:lumMod val="95000"/>
+                    <a:lumOff val="5000"/>
+                  </a:schemeClr>
+                </a:solidFill>
+                <a:latin typeface="APL385 Unicode" panose="020B0709000202000203" pitchFamily="49" charset="0"/>
+              </a:rPr>
+              <a:t>    expression</a:t>
+            </a:r>
+            <a:br>
+              <a:rPr lang="en-GB" dirty="0">
+                <a:solidFill>
+                  <a:schemeClr val="tx1">
+                    <a:lumMod val="95000"/>
+                    <a:lumOff val="5000"/>
+                  </a:schemeClr>
+                </a:solidFill>
+                <a:latin typeface="APL385 Unicode" panose="020B0709000202000203" pitchFamily="49" charset="0"/>
+              </a:rPr>
+            </a:br>
+            <a:r>
+              <a:rPr lang="en-GB" dirty="0">
+                <a:solidFill>
+                  <a:schemeClr val="tx1">
+                    <a:lumMod val="95000"/>
+                    <a:lumOff val="5000"/>
+                  </a:schemeClr>
+                </a:solidFill>
+                <a:latin typeface="APL385 Unicode" panose="020B0709000202000203" pitchFamily="49" charset="0"/>
+              </a:rPr>
+              <a:t>:</a:t>
+            </a:r>
+            <a:r>
+              <a:rPr lang="en-GB" dirty="0" err="1">
+                <a:solidFill>
+                  <a:schemeClr val="tx1">
+                    <a:lumMod val="95000"/>
+                    <a:lumOff val="5000"/>
+                  </a:schemeClr>
+                </a:solidFill>
+                <a:latin typeface="APL385 Unicode" panose="020B0709000202000203" pitchFamily="49" charset="0"/>
+              </a:rPr>
+              <a:t>EndIf</a:t>
+            </a:r>
+            <a:endParaRPr lang="en-GB" dirty="0">
+              <a:solidFill>
+                <a:schemeClr val="tx1">
+                  <a:lumMod val="95000"/>
+                  <a:lumOff val="5000"/>
+                </a:schemeClr>
+              </a:solidFill>
+              <a:latin typeface="APL385 Unicode" panose="020B0709000202000203" pitchFamily="49" charset="0"/>
+            </a:endParaRPr>
+          </a:p>
+          <a:p>
+            <a:endParaRPr lang="en-GB" dirty="0">
+              <a:solidFill>
+                <a:schemeClr val="tx1">
+                  <a:lumMod val="95000"/>
+                  <a:lumOff val="5000"/>
+                </a:schemeClr>
+              </a:solidFill>
+              <a:latin typeface="APL385 Unicode" panose="020B0709000202000203" pitchFamily="49" charset="0"/>
+            </a:endParaRPr>
+          </a:p>
+          <a:p>
+            <a:r>
+              <a:rPr lang="en-GB" dirty="0">
+                <a:solidFill>
+                  <a:schemeClr val="tx1">
+                    <a:lumMod val="95000"/>
+                    <a:lumOff val="5000"/>
+                  </a:schemeClr>
+                </a:solidFill>
+              </a:rPr>
+              <a:t>DO NOT remove the diamond, you will BREAK the code!</a:t>
+            </a:r>
+          </a:p>
+        </p:txBody>
+      </p:sp>
+      <p:sp>
+        <p:nvSpPr>
+          <p:cNvPr id="3" name="Title 2">
+            <a:extLst>
+              <a:ext uri="{FF2B5EF4-FFF2-40B4-BE49-F238E27FC236}">
+                <a16:creationId xmlns:a16="http://schemas.microsoft.com/office/drawing/2014/main" id="{933F36ED-92F7-AA30-E9BA-9D090F297D94}"/>
+              </a:ext>
+            </a:extLst>
+          </p:cNvPr>
+          <p:cNvSpPr>
+            <a:spLocks noGrp="1"/>
+          </p:cNvSpPr>
+          <p:nvPr>
+            <p:ph type="title"/>
+          </p:nvPr>
+        </p:nvSpPr>
+        <p:spPr/>
+        <p:txBody>
+          <a:bodyPr/>
+          <a:lstStyle/>
+          <a:p>
+            <a:r>
+              <a:rPr lang="en-GB" dirty="0"/>
+              <a:t>Branching</a:t>
+            </a:r>
+          </a:p>
+        </p:txBody>
+      </p:sp>
+      <p:sp>
+        <p:nvSpPr>
+          <p:cNvPr id="4" name="Media Placeholder 3">
+            <a:extLst>
+              <a:ext uri="{FF2B5EF4-FFF2-40B4-BE49-F238E27FC236}">
+                <a16:creationId xmlns:a16="http://schemas.microsoft.com/office/drawing/2014/main" id="{96DCEB9B-0668-ED9A-F07E-6896304FC2BE}"/>
+              </a:ext>
+            </a:extLst>
+          </p:cNvPr>
+          <p:cNvSpPr>
+            <a:spLocks noGrp="1"/>
+          </p:cNvSpPr>
+          <p:nvPr>
+            <p:ph type="media" sz="quarter" idx="11"/>
+          </p:nvPr>
+        </p:nvSpPr>
+        <p:spPr/>
+        <p:txBody>
+          <a:bodyPr/>
+          <a:lstStyle/>
+          <a:p>
+            <a:endParaRPr lang="en-GB"/>
+          </a:p>
+        </p:txBody>
+      </p:sp>
+    </p:spTree>
+    <p:extLst>
+      <p:ext uri="{BB962C8B-B14F-4D97-AF65-F5344CB8AC3E}">
+        <p14:creationId xmlns:p14="http://schemas.microsoft.com/office/powerpoint/2010/main" val="3860118664"/>
+      </p:ext>
+    </p:extLst>
+  </p:cSld>
+  <p:clrMapOvr>
+    <a:masterClrMapping/>
+  </p:clrMapOvr>
+</p:sld>
+</file>
+
+<file path=ppt/slides/slide41.xml><?xml version="1.0" encoding="utf-8"?>
+<p:sld xmlns:a="http://schemas.openxmlformats.org/drawingml/2006/main" xmlns:r="http://schemas.openxmlformats.org/officeDocument/2006/relationships" xmlns:p="http://schemas.openxmlformats.org/presentationml/2006/main">
+  <p:cSld>
+    <p:spTree>
+      <p:nvGrpSpPr>
+        <p:cNvPr id="1" name="">
+          <a:extLst>
+            <a:ext uri="{FF2B5EF4-FFF2-40B4-BE49-F238E27FC236}">
               <a16:creationId xmlns:a16="http://schemas.microsoft.com/office/drawing/2014/main" id="{CB2E1011-E279-4D58-9100-E5F2FF26D32D}"/>
             </a:ext>
           </a:extLst>
@@ -13439,7 +14048,7 @@
 </p:sld>
 </file>
 
-<file path=ppt/slides/slide41.xml><?xml version="1.0" encoding="utf-8"?>
+<file path=ppt/slides/slide42.xml><?xml version="1.0" encoding="utf-8"?>
 <p:sld xmlns:a="http://schemas.openxmlformats.org/drawingml/2006/main" xmlns:r="http://schemas.openxmlformats.org/officeDocument/2006/relationships" xmlns:p="http://schemas.openxmlformats.org/presentationml/2006/main">
   <p:cSld>
     <p:spTree>
@@ -13624,7 +14233,7 @@
 </p:sld>
 </file>
 
-<file path=ppt/slides/slide42.xml><?xml version="1.0" encoding="utf-8"?>
+<file path=ppt/slides/slide43.xml><?xml version="1.0" encoding="utf-8"?>
 <p:sld xmlns:a="http://schemas.openxmlformats.org/drawingml/2006/main" xmlns:r="http://schemas.openxmlformats.org/officeDocument/2006/relationships" xmlns:p="http://schemas.openxmlformats.org/presentationml/2006/main">
   <p:cSld>
     <p:spTree>
@@ -13816,7 +14425,7 @@
 </p:sld>
 </file>
 
-<file path=ppt/slides/slide43.xml><?xml version="1.0" encoding="utf-8"?>
+<file path=ppt/slides/slide44.xml><?xml version="1.0" encoding="utf-8"?>
 <p:sld xmlns:a="http://schemas.openxmlformats.org/drawingml/2006/main" xmlns:r="http://schemas.openxmlformats.org/officeDocument/2006/relationships" xmlns:p="http://schemas.openxmlformats.org/presentationml/2006/main">
   <p:cSld>
     <p:spTree>
@@ -14211,7 +14820,7 @@
 </p:sld>
 </file>
 
-<file path=ppt/slides/slide44.xml><?xml version="1.0" encoding="utf-8"?>
+<file path=ppt/slides/slide45.xml><?xml version="1.0" encoding="utf-8"?>
 <p:sld xmlns:a="http://schemas.openxmlformats.org/drawingml/2006/main" xmlns:r="http://schemas.openxmlformats.org/officeDocument/2006/relationships" xmlns:p="http://schemas.openxmlformats.org/presentationml/2006/main">
   <p:cSld>
     <p:spTree>
@@ -14669,174 +15278,6 @@
 </p:sld>
 </file>
 
-<file path=ppt/slides/slide45.xml><?xml version="1.0" encoding="utf-8"?>
-<p:sld xmlns:a="http://schemas.openxmlformats.org/drawingml/2006/main" xmlns:r="http://schemas.openxmlformats.org/officeDocument/2006/relationships" xmlns:p="http://schemas.openxmlformats.org/presentationml/2006/main">
-  <p:cSld>
-    <p:spTree>
-      <p:nvGrpSpPr>
-        <p:cNvPr id="1" name=""/>
-        <p:cNvGrpSpPr/>
-        <p:nvPr/>
-      </p:nvGrpSpPr>
-      <p:grpSpPr>
-        <a:xfrm>
-          <a:off x="0" y="0"/>
-          <a:ext cx="0" cy="0"/>
-          <a:chOff x="0" y="0"/>
-          <a:chExt cx="0" cy="0"/>
-        </a:xfrm>
-      </p:grpSpPr>
-      <p:sp>
-        <p:nvSpPr>
-          <p:cNvPr id="2" name="Content Placeholder 1">
-            <a:extLst>
-              <a:ext uri="{FF2B5EF4-FFF2-40B4-BE49-F238E27FC236}">
-                <a16:creationId xmlns:a16="http://schemas.microsoft.com/office/drawing/2014/main" id="{BCCAA18E-E850-AD1D-74AC-DB958B064918}"/>
-              </a:ext>
-            </a:extLst>
-          </p:cNvPr>
-          <p:cNvSpPr>
-            <a:spLocks noGrp="1"/>
-          </p:cNvSpPr>
-          <p:nvPr>
-            <p:ph idx="1"/>
-          </p:nvPr>
-        </p:nvSpPr>
-        <p:spPr/>
-        <p:txBody>
-          <a:bodyPr>
-            <a:normAutofit fontScale="92500"/>
-          </a:bodyPr>
-          <a:lstStyle/>
-          <a:p>
-            <a:pPr marL="0" indent="0">
-              <a:buNone/>
-            </a:pPr>
-            <a:r>
-              <a:rPr lang="da-DK" dirty="0"/>
-              <a:t>dfns intend to support declarative programming, without loops.</a:t>
-            </a:r>
-            <a:endParaRPr lang="en-GB" dirty="0"/>
-          </a:p>
-          <a:p>
-            <a:pPr marL="0" indent="0">
-              <a:buNone/>
-            </a:pPr>
-            <a:r>
-              <a:rPr lang="da-DK" dirty="0"/>
-              <a:t>A dfn terminates when a condition is met.</a:t>
-            </a:r>
-          </a:p>
-          <a:p>
-            <a:pPr marL="0" indent="0">
-              <a:buNone/>
-            </a:pPr>
-            <a:r>
-              <a:rPr lang="da-DK" dirty="0"/>
-              <a:t>The only loop construct allowed is recursion.</a:t>
-            </a:r>
-          </a:p>
-          <a:p>
-            <a:pPr marL="0" indent="0">
-              <a:buNone/>
-            </a:pPr>
-            <a:endParaRPr lang="en-GB" dirty="0"/>
-          </a:p>
-          <a:p>
-            <a:pPr marL="0" indent="0">
-              <a:buNone/>
-            </a:pPr>
-            <a:r>
-              <a:rPr lang="da-DK" dirty="0"/>
-              <a:t>F</a:t>
-            </a:r>
-            <a:r>
-              <a:rPr lang="en-GB" dirty="0"/>
-              <a:t>or geeks in the room: </a:t>
-            </a:r>
-          </a:p>
-          <a:p>
-            <a:pPr marL="0" indent="0">
-              <a:buNone/>
-            </a:pPr>
-            <a:r>
-              <a:rPr lang="en-GB" dirty="0"/>
-              <a:t>	Tail recursion *is* optimised.</a:t>
-            </a:r>
-          </a:p>
-        </p:txBody>
-      </p:sp>
-      <p:sp>
-        <p:nvSpPr>
-          <p:cNvPr id="3" name="Title 2">
-            <a:extLst>
-              <a:ext uri="{FF2B5EF4-FFF2-40B4-BE49-F238E27FC236}">
-                <a16:creationId xmlns:a16="http://schemas.microsoft.com/office/drawing/2014/main" id="{83B5E1F0-27B3-3A6A-4434-96A8DA7EC8E3}"/>
-              </a:ext>
-            </a:extLst>
-          </p:cNvPr>
-          <p:cNvSpPr>
-            <a:spLocks noGrp="1"/>
-          </p:cNvSpPr>
-          <p:nvPr>
-            <p:ph type="title"/>
-          </p:nvPr>
-        </p:nvSpPr>
-        <p:spPr/>
-        <p:txBody>
-          <a:bodyPr/>
-          <a:lstStyle/>
-          <a:p>
-            <a:r>
-              <a:rPr lang="en-GB" dirty="0"/>
-              <a:t>Flow in </a:t>
-            </a:r>
-            <a:r>
-              <a:rPr lang="en-GB" dirty="0" err="1"/>
-              <a:t>dfns</a:t>
-            </a:r>
-            <a:endParaRPr lang="en-GB" dirty="0"/>
-          </a:p>
-        </p:txBody>
-      </p:sp>
-      <p:sp>
-        <p:nvSpPr>
-          <p:cNvPr id="4" name="Media Placeholder 3">
-            <a:extLst>
-              <a:ext uri="{FF2B5EF4-FFF2-40B4-BE49-F238E27FC236}">
-                <a16:creationId xmlns:a16="http://schemas.microsoft.com/office/drawing/2014/main" id="{2FEF5900-B894-6F00-7159-650F4AE8425F}"/>
-              </a:ext>
-            </a:extLst>
-          </p:cNvPr>
-          <p:cNvSpPr>
-            <a:spLocks noGrp="1"/>
-          </p:cNvSpPr>
-          <p:nvPr>
-            <p:ph type="media" sz="quarter" idx="11"/>
-          </p:nvPr>
-        </p:nvSpPr>
-        <p:spPr/>
-        <p:txBody>
-          <a:bodyPr/>
-          <a:lstStyle/>
-          <a:p>
-            <a:endParaRPr lang="en-GB"/>
-          </a:p>
-        </p:txBody>
-      </p:sp>
-    </p:spTree>
-    <p:extLst>
-      <p:ext uri="{BB962C8B-B14F-4D97-AF65-F5344CB8AC3E}">
-        <p14:creationId xmlns:p14="http://schemas.microsoft.com/office/powerpoint/2010/main" val="2324822881"/>
-      </p:ext>
-    </p:extLst>
-  </p:cSld>
-  <p:clrMapOvr>
-    <a:masterClrMapping/>
-  </p:clrMapOvr>
-</p:sld>
-</file>
-
 <file path=ppt/slides/slide46.xml><?xml version="1.0" encoding="utf-8"?>
 <p:sld xmlns:a="http://schemas.openxmlformats.org/drawingml/2006/main" xmlns:r="http://schemas.openxmlformats.org/officeDocument/2006/relationships" xmlns:p="http://schemas.openxmlformats.org/presentationml/2006/main">
   <p:cSld>
@@ -14859,7 +15300,7 @@
           <p:cNvPr id="2" name="Content Placeholder 1">
             <a:extLst>
               <a:ext uri="{FF2B5EF4-FFF2-40B4-BE49-F238E27FC236}">
-                <a16:creationId xmlns:a16="http://schemas.microsoft.com/office/drawing/2014/main" id="{4E0A04A4-3166-D692-3626-13B7D4BC1D3D}"/>
+                <a16:creationId xmlns:a16="http://schemas.microsoft.com/office/drawing/2014/main" id="{BCCAA18E-E850-AD1D-74AC-DB958B064918}"/>
               </a:ext>
             </a:extLst>
           </p:cNvPr>
@@ -14873,7 +15314,7 @@
         <p:spPr/>
         <p:txBody>
           <a:bodyPr>
-            <a:normAutofit fontScale="85000" lnSpcReduction="20000"/>
+            <a:normAutofit fontScale="92500"/>
           </a:bodyPr>
           <a:lstStyle/>
           <a:p>
@@ -14881,64 +15322,18 @@
               <a:buNone/>
             </a:pPr>
             <a:r>
-              <a:rPr lang="en-GB" dirty="0"/>
-              <a:t>A </a:t>
-            </a:r>
-            <a:r>
-              <a:rPr lang="en-GB" dirty="0" err="1"/>
-              <a:t>dfn</a:t>
-            </a:r>
-            <a:r>
-              <a:rPr lang="en-GB" dirty="0"/>
-              <a:t> line containing a colon (</a:t>
-            </a:r>
-            <a:r>
-              <a:rPr lang="en-GB" dirty="0">
-                <a:solidFill>
-                  <a:srgbClr val="FF6600"/>
-                </a:solidFill>
-                <a:latin typeface="APL385 Unicode" panose="020B0709000202000203" pitchFamily="49" charset="0"/>
-                <a:sym typeface="Wingdings" panose="05000000000000000000" pitchFamily="2" charset="2"/>
-              </a:rPr>
-              <a:t>:</a:t>
-            </a:r>
-            <a:r>
-              <a:rPr lang="en-GB" dirty="0">
-                <a:sym typeface="Wingdings" panose="05000000000000000000" pitchFamily="2" charset="2"/>
-              </a:rPr>
-              <a:t>)</a:t>
-            </a:r>
-            <a:r>
-              <a:rPr lang="en-GB" dirty="0"/>
-              <a:t> is a </a:t>
-            </a:r>
-            <a:r>
-              <a:rPr lang="en-GB" b="1" i="1" dirty="0"/>
-              <a:t>guard</a:t>
-            </a:r>
-            <a:r>
-              <a:rPr lang="en-GB" dirty="0"/>
-              <a:t>.</a:t>
-            </a:r>
+              <a:rPr lang="da-DK" dirty="0"/>
+              <a:t>dfns intend to support declarative programming, without loops.</a:t>
+            </a:r>
+            <a:endParaRPr lang="en-GB" dirty="0"/>
           </a:p>
           <a:p>
             <a:pPr marL="0" indent="0">
               <a:buNone/>
             </a:pPr>
             <a:r>
-              <a:rPr lang="en-GB" dirty="0"/>
-              <a:t>On the left is a condition, like </a:t>
-            </a:r>
-            <a:r>
-              <a:rPr lang="en-GB" dirty="0">
-                <a:solidFill>
-                  <a:schemeClr val="accent3">
-                    <a:lumMod val="50000"/>
-                  </a:schemeClr>
-                </a:solidFill>
-                <a:latin typeface="APL385 Unicode" panose="020B0709000202000203" pitchFamily="49" charset="0"/>
-              </a:rPr>
-              <a:t>⍵&gt;0</a:t>
+              <a:rPr lang="da-DK" dirty="0"/>
+              <a:t>A dfn terminates when a condition is met.</a:t>
             </a:r>
           </a:p>
           <a:p>
@@ -14947,14 +15342,14 @@
             </a:pPr>
             <a:r>
               <a:rPr lang="da-DK" dirty="0"/>
-              <a:t>If satisfied, the result of the function is computed using the expression on the right.</a:t>
+              <a:t>The only loop construct allowed is recursion.</a:t>
             </a:r>
           </a:p>
           <a:p>
             <a:pPr marL="0" indent="0">
               <a:buNone/>
             </a:pPr>
-            <a:endParaRPr lang="da-DK" dirty="0"/>
+            <a:endParaRPr lang="en-GB" dirty="0"/>
           </a:p>
           <a:p>
             <a:pPr marL="0" indent="0">
@@ -14962,28 +15357,20 @@
             </a:pPr>
             <a:r>
               <a:rPr lang="da-DK" dirty="0"/>
-              <a:t>Otherwise, the first line</a:t>
-            </a:r>
-            <a:br>
-              <a:rPr lang="da-DK" dirty="0"/>
-            </a:br>
-            <a:r>
-              <a:rPr lang="da-DK" dirty="0"/>
-              <a:t>which does not do an </a:t>
-            </a:r>
-            <a:br>
-              <a:rPr lang="da-DK" dirty="0"/>
-            </a:br>
-            <a:r>
-              <a:rPr lang="da-DK" dirty="0"/>
-              <a:t>assignment provides </a:t>
-            </a:r>
-            <a:br>
-              <a:rPr lang="da-DK" dirty="0"/>
-            </a:br>
-            <a:r>
-              <a:rPr lang="da-DK" dirty="0"/>
-              <a:t>the result.</a:t>
+              <a:t>F</a:t>
+            </a:r>
+            <a:r>
+              <a:rPr lang="en-GB" dirty="0"/>
+              <a:t>or geeks in the room: </a:t>
+            </a:r>
+          </a:p>
+          <a:p>
+            <a:pPr marL="0" indent="0">
+              <a:buNone/>
+            </a:pPr>
+            <a:r>
+              <a:rPr lang="en-GB" dirty="0"/>
+              <a:t>	Tail recursion *is* optimised.</a:t>
             </a:r>
           </a:p>
         </p:txBody>
@@ -14993,7 +15380,7 @@
           <p:cNvPr id="3" name="Title 2">
             <a:extLst>
               <a:ext uri="{FF2B5EF4-FFF2-40B4-BE49-F238E27FC236}">
-                <a16:creationId xmlns:a16="http://schemas.microsoft.com/office/drawing/2014/main" id="{673FB924-52A3-0468-25B5-A55063EA5D11}"/>
+                <a16:creationId xmlns:a16="http://schemas.microsoft.com/office/drawing/2014/main" id="{83B5E1F0-27B3-3A6A-4434-96A8DA7EC8E3}"/>
               </a:ext>
             </a:extLst>
           </p:cNvPr>
@@ -15010,21 +15397,14 @@
           <a:lstStyle/>
           <a:p>
             <a:r>
+              <a:rPr lang="en-GB" dirty="0"/>
+              <a:t>Flow in </a:t>
+            </a:r>
+            <a:r>
               <a:rPr lang="en-GB" dirty="0" err="1"/>
-              <a:t>dfn</a:t>
-            </a:r>
-            <a:r>
-              <a:rPr lang="en-GB" dirty="0"/>
-              <a:t> </a:t>
-            </a:r>
-            <a:r>
-              <a:rPr lang="en-GB" b="1" i="1" dirty="0">
-                <a:solidFill>
-                  <a:srgbClr val="FF6600"/>
-                </a:solidFill>
-              </a:rPr>
-              <a:t>guards</a:t>
-            </a:r>
+              <a:t>dfns</a:t>
+            </a:r>
+            <a:endParaRPr lang="en-GB" dirty="0"/>
           </a:p>
         </p:txBody>
       </p:sp>
@@ -15033,7 +15413,7 @@
           <p:cNvPr id="4" name="Media Placeholder 3">
             <a:extLst>
               <a:ext uri="{FF2B5EF4-FFF2-40B4-BE49-F238E27FC236}">
-                <a16:creationId xmlns:a16="http://schemas.microsoft.com/office/drawing/2014/main" id="{51EDD8FC-EF59-7208-434E-D9F2E5837B6C}"/>
+                <a16:creationId xmlns:a16="http://schemas.microsoft.com/office/drawing/2014/main" id="{2FEF5900-B894-6F00-7159-650F4AE8425F}"/>
               </a:ext>
             </a:extLst>
           </p:cNvPr>
@@ -15053,107 +15433,10 @@
           </a:p>
         </p:txBody>
       </p:sp>
-      <p:sp>
-        <p:nvSpPr>
-          <p:cNvPr id="5" name="TextBox 4">
-            <a:extLst>
-              <a:ext uri="{FF2B5EF4-FFF2-40B4-BE49-F238E27FC236}">
-                <a16:creationId xmlns:a16="http://schemas.microsoft.com/office/drawing/2014/main" id="{F8092963-59EE-0F97-87C0-CEF570ADB115}"/>
-              </a:ext>
-            </a:extLst>
-          </p:cNvPr>
-          <p:cNvSpPr txBox="1"/>
-          <p:nvPr/>
-        </p:nvSpPr>
-        <p:spPr>
-          <a:xfrm>
-            <a:off x="4547005" y="2625757"/>
-            <a:ext cx="3265356" cy="1938992"/>
-          </a:xfrm>
-          <a:prstGeom prst="rect">
-            <a:avLst/>
-          </a:prstGeom>
-          <a:solidFill>
-            <a:schemeClr val="tx1"/>
-          </a:solidFill>
-          <a:ln w="38100">
-            <a:solidFill>
-              <a:srgbClr val="FF6600"/>
-            </a:solidFill>
-          </a:ln>
-        </p:spPr>
-        <p:txBody>
-          <a:bodyPr wrap="square" numCol="1" rtlCol="0">
-            <a:spAutoFit/>
-          </a:bodyPr>
-          <a:lstStyle/>
-          <a:p>
-            <a:r>
-              <a:rPr lang="en-GB" sz="2400" dirty="0">
-                <a:solidFill>
-                  <a:schemeClr val="bg1"/>
-                </a:solidFill>
-                <a:latin typeface="APL385 Unicode" panose="020B0709000202000203" pitchFamily="49" charset="0"/>
-              </a:rPr>
-              <a:t>{ </a:t>
-            </a:r>
-            <a:br>
-              <a:rPr lang="en-GB" sz="2400" dirty="0">
-                <a:solidFill>
-                  <a:schemeClr val="bg1"/>
-                </a:solidFill>
-                <a:latin typeface="APL385 Unicode" panose="020B0709000202000203" pitchFamily="49" charset="0"/>
-              </a:rPr>
-            </a:br>
-            <a:r>
-              <a:rPr lang="en-GB" sz="2400" dirty="0">
-                <a:solidFill>
-                  <a:schemeClr val="bg1"/>
-                </a:solidFill>
-                <a:latin typeface="APL385 Unicode" panose="020B0709000202000203" pitchFamily="49" charset="0"/>
-              </a:rPr>
-              <a:t> ⍵&gt;0:'positive'</a:t>
-            </a:r>
-          </a:p>
-          <a:p>
-            <a:r>
-              <a:rPr lang="en-GB" sz="2400" dirty="0">
-                <a:solidFill>
-                  <a:schemeClr val="bg1"/>
-                </a:solidFill>
-                <a:latin typeface="APL385 Unicode" panose="020B0709000202000203" pitchFamily="49" charset="0"/>
-              </a:rPr>
-              <a:t> ⍵&lt;0:'negative'</a:t>
-            </a:r>
-          </a:p>
-          <a:p>
-            <a:r>
-              <a:rPr lang="en-GB" sz="2400" dirty="0">
-                <a:solidFill>
-                  <a:schemeClr val="bg1"/>
-                </a:solidFill>
-                <a:latin typeface="APL385 Unicode" panose="020B0709000202000203" pitchFamily="49" charset="0"/>
-              </a:rPr>
-              <a:t> 'Zero'</a:t>
-            </a:r>
-          </a:p>
-          <a:p>
-            <a:r>
-              <a:rPr lang="en-GB" sz="2400" dirty="0">
-                <a:solidFill>
-                  <a:schemeClr val="bg1"/>
-                </a:solidFill>
-                <a:latin typeface="APL385 Unicode" panose="020B0709000202000203" pitchFamily="49" charset="0"/>
-              </a:rPr>
-              <a:t>}</a:t>
-            </a:r>
-          </a:p>
-        </p:txBody>
-      </p:sp>
     </p:spTree>
     <p:extLst>
       <p:ext uri="{BB962C8B-B14F-4D97-AF65-F5344CB8AC3E}">
-        <p14:creationId xmlns:p14="http://schemas.microsoft.com/office/powerpoint/2010/main" val="3420728603"/>
+        <p14:creationId xmlns:p14="http://schemas.microsoft.com/office/powerpoint/2010/main" val="2324822881"/>
       </p:ext>
     </p:extLst>
   </p:cSld>
@@ -15185,7 +15468,7 @@
           <p:cNvPr id="2" name="Content Placeholder 1">
             <a:extLst>
               <a:ext uri="{FF2B5EF4-FFF2-40B4-BE49-F238E27FC236}">
-                <a16:creationId xmlns:a16="http://schemas.microsoft.com/office/drawing/2014/main" id="{F4C9FABD-80DD-3A50-088F-2A10DDD381D0}"/>
+                <a16:creationId xmlns:a16="http://schemas.microsoft.com/office/drawing/2014/main" id="{4E0A04A4-3166-D692-3626-13B7D4BC1D3D}"/>
               </a:ext>
             </a:extLst>
           </p:cNvPr>
@@ -15198,7 +15481,9 @@
         </p:nvSpPr>
         <p:spPr/>
         <p:txBody>
-          <a:bodyPr/>
+          <a:bodyPr>
+            <a:normAutofit fontScale="85000" lnSpcReduction="20000"/>
+          </a:bodyPr>
           <a:lstStyle/>
           <a:p>
             <a:pPr marL="0" indent="0">
@@ -15206,17 +15491,43 @@
             </a:pPr>
             <a:r>
               <a:rPr lang="en-GB" dirty="0"/>
-              <a:t>The only possible loop is recursion. The </a:t>
+              <a:t>A </a:t>
+            </a:r>
+            <a:r>
+              <a:rPr lang="en-GB" dirty="0" err="1"/>
+              <a:t>dfn</a:t>
+            </a:r>
+            <a:r>
+              <a:rPr lang="en-GB" dirty="0"/>
+              <a:t> line containing a colon (</a:t>
             </a:r>
             <a:r>
               <a:rPr lang="en-GB" dirty="0">
-                <a:latin typeface="APL385 Unicode" panose="020B0709000202000203" pitchFamily="49" charset="0"/>
-              </a:rPr>
-              <a:t>∇</a:t>
-            </a:r>
-            <a:r>
-              <a:rPr lang="en-GB" dirty="0"/>
-              <a:t> symbol is a self-reference. </a:t>
+                <a:solidFill>
+                  <a:srgbClr val="FF6600"/>
+                </a:solidFill>
+                <a:latin typeface="APL385 Unicode" panose="020B0709000202000203" pitchFamily="49" charset="0"/>
+                <a:sym typeface="Wingdings" panose="05000000000000000000" pitchFamily="2" charset="2"/>
+              </a:rPr>
+              <a:t>:</a:t>
+            </a:r>
+            <a:r>
+              <a:rPr lang="en-GB" dirty="0">
+                <a:sym typeface="Wingdings" panose="05000000000000000000" pitchFamily="2" charset="2"/>
+              </a:rPr>
+              <a:t>)</a:t>
+            </a:r>
+            <a:r>
+              <a:rPr lang="en-GB" dirty="0"/>
+              <a:t> is a </a:t>
+            </a:r>
+            <a:r>
+              <a:rPr lang="en-GB" b="1" i="1" dirty="0"/>
+              <a:t>guard</a:t>
+            </a:r>
+            <a:r>
+              <a:rPr lang="en-GB" dirty="0"/>
+              <a:t>.</a:t>
             </a:r>
           </a:p>
           <a:p>
@@ -15224,31 +15535,65 @@
               <a:buNone/>
             </a:pPr>
             <a:r>
-              <a:rPr lang="en-GB" sz="1500" dirty="0"/>
-              <a:t>(Thus, a </a:t>
-            </a:r>
-            <a:r>
-              <a:rPr lang="en-GB" sz="1500" dirty="0" err="1"/>
-              <a:t>dfn</a:t>
-            </a:r>
-            <a:r>
-              <a:rPr lang="en-GB" sz="1500" dirty="0"/>
-              <a:t> never needs to </a:t>
-            </a:r>
-            <a:r>
-              <a:rPr lang="en-GB" sz="1500"/>
-              <a:t>know its </a:t>
-            </a:r>
-            <a:r>
-              <a:rPr lang="en-GB" sz="1500" dirty="0"/>
-              <a:t>own name – or even have a name)</a:t>
+              <a:rPr lang="en-GB" dirty="0"/>
+              <a:t>On the left is a condition, like </a:t>
+            </a:r>
+            <a:r>
+              <a:rPr lang="en-GB" dirty="0">
+                <a:solidFill>
+                  <a:schemeClr val="accent3">
+                    <a:lumMod val="50000"/>
+                  </a:schemeClr>
+                </a:solidFill>
+                <a:latin typeface="APL385 Unicode" panose="020B0709000202000203" pitchFamily="49" charset="0"/>
+              </a:rPr>
+              <a:t>⍵&gt;0</a:t>
             </a:r>
           </a:p>
           <a:p>
             <a:pPr marL="0" indent="0">
               <a:buNone/>
             </a:pPr>
-            <a:endParaRPr lang="en-GB" dirty="0"/>
+            <a:r>
+              <a:rPr lang="da-DK" dirty="0"/>
+              <a:t>If satisfied, the result of the function is computed using the expression on the right.</a:t>
+            </a:r>
+          </a:p>
+          <a:p>
+            <a:pPr marL="0" indent="0">
+              <a:buNone/>
+            </a:pPr>
+            <a:endParaRPr lang="da-DK" dirty="0"/>
+          </a:p>
+          <a:p>
+            <a:pPr marL="0" indent="0">
+              <a:buNone/>
+            </a:pPr>
+            <a:r>
+              <a:rPr lang="da-DK" dirty="0"/>
+              <a:t>Otherwise, the first line</a:t>
+            </a:r>
+            <a:br>
+              <a:rPr lang="da-DK" dirty="0"/>
+            </a:br>
+            <a:r>
+              <a:rPr lang="da-DK" dirty="0"/>
+              <a:t>which does not do an </a:t>
+            </a:r>
+            <a:br>
+              <a:rPr lang="da-DK" dirty="0"/>
+            </a:br>
+            <a:r>
+              <a:rPr lang="da-DK" dirty="0"/>
+              <a:t>assignment provides </a:t>
+            </a:r>
+            <a:br>
+              <a:rPr lang="da-DK" dirty="0"/>
+            </a:br>
+            <a:r>
+              <a:rPr lang="da-DK" dirty="0"/>
+              <a:t>the result.</a:t>
+            </a:r>
           </a:p>
         </p:txBody>
       </p:sp>
@@ -15257,7 +15602,7 @@
           <p:cNvPr id="3" name="Title 2">
             <a:extLst>
               <a:ext uri="{FF2B5EF4-FFF2-40B4-BE49-F238E27FC236}">
-                <a16:creationId xmlns:a16="http://schemas.microsoft.com/office/drawing/2014/main" id="{3734B68D-0F44-797E-A37E-66BFE4EEAE36}"/>
+                <a16:creationId xmlns:a16="http://schemas.microsoft.com/office/drawing/2014/main" id="{673FB924-52A3-0468-25B5-A55063EA5D11}"/>
               </a:ext>
             </a:extLst>
           </p:cNvPr>
@@ -15287,7 +15632,7 @@
                   <a:srgbClr val="FF6600"/>
                 </a:solidFill>
               </a:rPr>
-              <a:t>recursion</a:t>
+              <a:t>guards</a:t>
             </a:r>
           </a:p>
         </p:txBody>
@@ -15297,7 +15642,7 @@
           <p:cNvPr id="4" name="Media Placeholder 3">
             <a:extLst>
               <a:ext uri="{FF2B5EF4-FFF2-40B4-BE49-F238E27FC236}">
-                <a16:creationId xmlns:a16="http://schemas.microsoft.com/office/drawing/2014/main" id="{48F67E54-9723-DD60-42F3-718AB505C2D6}"/>
+                <a16:creationId xmlns:a16="http://schemas.microsoft.com/office/drawing/2014/main" id="{51EDD8FC-EF59-7208-434E-D9F2E5837B6C}"/>
               </a:ext>
             </a:extLst>
           </p:cNvPr>
@@ -15322,7 +15667,7 @@
           <p:cNvPr id="5" name="TextBox 4">
             <a:extLst>
               <a:ext uri="{FF2B5EF4-FFF2-40B4-BE49-F238E27FC236}">
-                <a16:creationId xmlns:a16="http://schemas.microsoft.com/office/drawing/2014/main" id="{5B0A0CCD-2124-871E-DC4D-A54E8234E5EB}"/>
+                <a16:creationId xmlns:a16="http://schemas.microsoft.com/office/drawing/2014/main" id="{F8092963-59EE-0F97-87C0-CEF570ADB115}"/>
               </a:ext>
             </a:extLst>
           </p:cNvPr>
@@ -15331,8 +15676,8 @@
         </p:nvSpPr>
         <p:spPr>
           <a:xfrm>
-            <a:off x="1709682" y="2733768"/>
-            <a:ext cx="5849358" cy="1569660"/>
+            <a:off x="4547005" y="2625757"/>
+            <a:ext cx="3265356" cy="1938992"/>
           </a:xfrm>
           <a:prstGeom prst="rect">
             <a:avLst/>
@@ -15359,7 +15704,7 @@
                 </a:solidFill>
                 <a:latin typeface="APL385 Unicode" panose="020B0709000202000203" pitchFamily="49" charset="0"/>
               </a:rPr>
-              <a:t>factorial←{</a:t>
+              <a:t>{ </a:t>
             </a:r>
             <a:br>
               <a:rPr lang="en-GB" sz="2400" dirty="0">
@@ -15376,7 +15721,7 @@
                 </a:solidFill>
                 <a:latin typeface="APL385 Unicode" panose="020B0709000202000203" pitchFamily="49" charset="0"/>
               </a:rPr>
-              <a:t>  ⍵=0: 1</a:t>
+              <a:t> ⍵&gt;0:'positive'</a:t>
             </a:r>
           </a:p>
           <a:p>
@@ -15387,7 +15732,18 @@
                 </a:solidFill>
                 <a:latin typeface="APL385 Unicode" panose="020B0709000202000203" pitchFamily="49" charset="0"/>
               </a:rPr>
-              <a:t>  ⍵ × ∇ ⍵-1   ⍝ call self(⍵-1)</a:t>
+              <a:t> ⍵&lt;0:'negative'</a:t>
+            </a:r>
+          </a:p>
+          <a:p>
+            <a:r>
+              <a:rPr lang="en-GB" sz="2400" dirty="0">
+                <a:solidFill>
+                  <a:schemeClr val="bg1"/>
+                </a:solidFill>
+                <a:latin typeface="APL385 Unicode" panose="020B0709000202000203" pitchFamily="49" charset="0"/>
+              </a:rPr>
+              <a:t> 'Zero'</a:t>
             </a:r>
           </a:p>
           <a:p>
@@ -15406,7 +15762,7 @@
     </p:spTree>
     <p:extLst>
       <p:ext uri="{BB962C8B-B14F-4D97-AF65-F5344CB8AC3E}">
-        <p14:creationId xmlns:p14="http://schemas.microsoft.com/office/powerpoint/2010/main" val="3237066938"/>
+        <p14:creationId xmlns:p14="http://schemas.microsoft.com/office/powerpoint/2010/main" val="3420728603"/>
       </p:ext>
     </p:extLst>
   </p:cSld>
@@ -15438,7 +15794,7 @@
           <p:cNvPr id="2" name="Content Placeholder 1">
             <a:extLst>
               <a:ext uri="{FF2B5EF4-FFF2-40B4-BE49-F238E27FC236}">
-                <a16:creationId xmlns:a16="http://schemas.microsoft.com/office/drawing/2014/main" id="{15A8F58E-0B00-45AA-8356-66D63077C170}"/>
+                <a16:creationId xmlns:a16="http://schemas.microsoft.com/office/drawing/2014/main" id="{F4C9FABD-80DD-3A50-088F-2A10DDD381D0}"/>
               </a:ext>
             </a:extLst>
           </p:cNvPr>
@@ -15451,9 +15807,7 @@
         </p:nvSpPr>
         <p:spPr/>
         <p:txBody>
-          <a:bodyPr>
-            <a:normAutofit fontScale="85000" lnSpcReduction="20000"/>
-          </a:bodyPr>
+          <a:bodyPr/>
           <a:lstStyle/>
           <a:p>
             <a:pPr marL="0" indent="0">
@@ -15461,255 +15815,49 @@
             </a:pPr>
             <a:r>
               <a:rPr lang="en-GB" dirty="0"/>
-              <a:t>An error guard is an error number followed by </a:t>
-            </a:r>
-            <a:r>
-              <a:rPr lang="en-GB" b="1" dirty="0">
-                <a:solidFill>
-                  <a:srgbClr val="FF0000"/>
-                </a:solidFill>
-                <a:latin typeface="APL385 Unicode" panose="020B0709000202000203" pitchFamily="49" charset="0"/>
-              </a:rPr>
-              <a:t>::</a:t>
+              <a:t>The only possible loop is recursion. The </a:t>
+            </a:r>
+            <a:r>
+              <a:rPr lang="en-GB" dirty="0">
+                <a:latin typeface="APL385 Unicode" panose="020B0709000202000203" pitchFamily="49" charset="0"/>
+              </a:rPr>
+              <a:t>∇</a:t>
+            </a:r>
+            <a:r>
+              <a:rPr lang="en-GB" dirty="0"/>
+              <a:t> symbol is a self-reference. </a:t>
             </a:r>
           </a:p>
           <a:p>
             <a:pPr marL="0" indent="0">
-              <a:spcAft>
-                <a:spcPts val="0"/>
-              </a:spcAft>
               <a:buNone/>
             </a:pPr>
             <a:r>
-              <a:rPr lang="en-GB" dirty="0">
-                <a:solidFill>
-                  <a:schemeClr val="accent3">
-                    <a:lumMod val="50000"/>
-                  </a:schemeClr>
-                </a:solidFill>
-                <a:latin typeface="APL385 Unicode" panose="020B0709000202000203" pitchFamily="49" charset="0"/>
-              </a:rPr>
-              <a:t>    </a:t>
-            </a:r>
-            <a:r>
-              <a:rPr lang="en-GB" dirty="0">
-                <a:solidFill>
-                  <a:srgbClr val="00B050"/>
-                </a:solidFill>
-                <a:latin typeface="APL385 Unicode" panose="020B0709000202000203" pitchFamily="49" charset="0"/>
-              </a:rPr>
-              <a:t>Div←{</a:t>
+              <a:rPr lang="en-GB" sz="1500" dirty="0"/>
+              <a:t>(Thus, a </a:t>
+            </a:r>
+            <a:r>
+              <a:rPr lang="en-GB" sz="1500" dirty="0" err="1"/>
+              <a:t>dfn</a:t>
+            </a:r>
+            <a:r>
+              <a:rPr lang="en-GB" sz="1500" dirty="0"/>
+              <a:t> never needs to </a:t>
+            </a:r>
+            <a:r>
+              <a:rPr lang="en-GB" sz="1500"/>
+              <a:t>know its </a:t>
+            </a:r>
+            <a:r>
+              <a:rPr lang="en-GB" sz="1500" dirty="0"/>
+              <a:t>own name – or even have a name)</a:t>
             </a:r>
           </a:p>
           <a:p>
             <a:pPr marL="0" indent="0">
-              <a:spcAft>
-                <a:spcPts val="0"/>
-              </a:spcAft>
               <a:buNone/>
             </a:pPr>
-            <a:r>
-              <a:rPr lang="en-GB" b="1" dirty="0">
-                <a:solidFill>
-                  <a:srgbClr val="00B050"/>
-                </a:solidFill>
-                <a:latin typeface="APL385 Unicode" panose="020B0709000202000203" pitchFamily="49" charset="0"/>
-              </a:rPr>
-              <a:t>        11</a:t>
-            </a:r>
-            <a:r>
-              <a:rPr lang="en-GB" b="1" dirty="0">
-                <a:solidFill>
-                  <a:srgbClr val="FF6600"/>
-                </a:solidFill>
-                <a:latin typeface="APL385 Unicode" panose="020B0709000202000203" pitchFamily="49" charset="0"/>
-              </a:rPr>
-              <a:t>::</a:t>
-            </a:r>
-            <a:r>
-              <a:rPr lang="en-GB" b="1" dirty="0">
-                <a:solidFill>
-                  <a:srgbClr val="00B050"/>
-                </a:solidFill>
-                <a:latin typeface="APL385 Unicode" panose="020B0709000202000203" pitchFamily="49" charset="0"/>
-              </a:rPr>
-              <a:t>'</a:t>
-            </a:r>
-            <a:r>
-              <a:rPr lang="en-GB" dirty="0">
-                <a:solidFill>
-                  <a:srgbClr val="00B050"/>
-                </a:solidFill>
-                <a:latin typeface="APL385 Unicode" panose="020B0709000202000203" pitchFamily="49" charset="0"/>
-              </a:rPr>
-              <a:t>Division by zero'</a:t>
-            </a:r>
-          </a:p>
-          <a:p>
-            <a:pPr marL="0" indent="0">
-              <a:spcAft>
-                <a:spcPts val="0"/>
-              </a:spcAft>
-              <a:buNone/>
-            </a:pPr>
-            <a:r>
-              <a:rPr lang="en-GB" dirty="0">
-                <a:solidFill>
-                  <a:srgbClr val="00B050"/>
-                </a:solidFill>
-                <a:latin typeface="APL385 Unicode" panose="020B0709000202000203" pitchFamily="49" charset="0"/>
-              </a:rPr>
-              <a:t>        ⍺÷⍵</a:t>
-            </a:r>
-          </a:p>
-          <a:p>
-            <a:pPr marL="0" indent="0">
-              <a:spcAft>
-                <a:spcPts val="0"/>
-              </a:spcAft>
-              <a:buNone/>
-            </a:pPr>
-            <a:r>
-              <a:rPr lang="en-GB" dirty="0">
-                <a:solidFill>
-                  <a:srgbClr val="00B050"/>
-                </a:solidFill>
-                <a:latin typeface="APL385 Unicode" panose="020B0709000202000203" pitchFamily="49" charset="0"/>
-              </a:rPr>
-              <a:t>    }</a:t>
-            </a:r>
-          </a:p>
-          <a:p>
-            <a:pPr marL="0" indent="0">
-              <a:spcAft>
-                <a:spcPts val="0"/>
-              </a:spcAft>
-              <a:buNone/>
-            </a:pPr>
-            <a:endParaRPr lang="en-GB" dirty="0">
-              <a:solidFill>
-                <a:schemeClr val="accent3">
-                  <a:lumMod val="50000"/>
-                </a:schemeClr>
-              </a:solidFill>
-              <a:latin typeface="APL385 Unicode" panose="020B0709000202000203" pitchFamily="49" charset="0"/>
-            </a:endParaRPr>
-          </a:p>
-          <a:p>
-            <a:pPr marL="0" indent="0">
-              <a:spcAft>
-                <a:spcPts val="0"/>
-              </a:spcAft>
-              <a:buNone/>
-            </a:pPr>
-            <a:r>
-              <a:rPr lang="en-GB" dirty="0">
-                <a:solidFill>
-                  <a:schemeClr val="accent3">
-                    <a:lumMod val="50000"/>
-                  </a:schemeClr>
-                </a:solidFill>
-                <a:latin typeface="APL385 Unicode" panose="020B0709000202000203" pitchFamily="49" charset="0"/>
-              </a:rPr>
-              <a:t>    </a:t>
-            </a:r>
-            <a:r>
-              <a:rPr lang="en-GB" dirty="0">
-                <a:solidFill>
-                  <a:srgbClr val="00B050"/>
-                </a:solidFill>
-                <a:latin typeface="APL385 Unicode" panose="020B0709000202000203" pitchFamily="49" charset="0"/>
-              </a:rPr>
-              <a:t>4 Div 2</a:t>
-            </a:r>
-          </a:p>
-          <a:p>
-            <a:pPr marL="0" indent="0">
-              <a:spcAft>
-                <a:spcPts val="0"/>
-              </a:spcAft>
-              <a:buNone/>
-            </a:pPr>
-            <a:r>
-              <a:rPr lang="en-GB" dirty="0">
-                <a:solidFill>
-                  <a:schemeClr val="accent3">
-                    <a:lumMod val="50000"/>
-                  </a:schemeClr>
-                </a:solidFill>
-                <a:latin typeface="APL385 Unicode" panose="020B0709000202000203" pitchFamily="49" charset="0"/>
-              </a:rPr>
-              <a:t>2</a:t>
-            </a:r>
-          </a:p>
-          <a:p>
-            <a:pPr marL="0" indent="0">
-              <a:spcAft>
-                <a:spcPts val="0"/>
-              </a:spcAft>
-              <a:buNone/>
-            </a:pPr>
-            <a:endParaRPr lang="en-GB" dirty="0">
-              <a:solidFill>
-                <a:schemeClr val="accent3">
-                  <a:lumMod val="50000"/>
-                </a:schemeClr>
-              </a:solidFill>
-              <a:latin typeface="APL385 Unicode" panose="020B0709000202000203" pitchFamily="49" charset="0"/>
-            </a:endParaRPr>
-          </a:p>
-          <a:p>
-            <a:pPr marL="0" indent="0">
-              <a:spcAft>
-                <a:spcPts val="0"/>
-              </a:spcAft>
-              <a:buNone/>
-            </a:pPr>
-            <a:r>
-              <a:rPr lang="en-GB" dirty="0">
-                <a:solidFill>
-                  <a:schemeClr val="accent3">
-                    <a:lumMod val="50000"/>
-                  </a:schemeClr>
-                </a:solidFill>
-                <a:latin typeface="APL385 Unicode" panose="020B0709000202000203" pitchFamily="49" charset="0"/>
-              </a:rPr>
-              <a:t>    </a:t>
-            </a:r>
-            <a:r>
-              <a:rPr lang="en-GB" dirty="0">
-                <a:solidFill>
-                  <a:srgbClr val="00B050"/>
-                </a:solidFill>
-                <a:latin typeface="APL385 Unicode" panose="020B0709000202000203" pitchFamily="49" charset="0"/>
-              </a:rPr>
-              <a:t>4 Div 0</a:t>
-            </a:r>
-          </a:p>
-          <a:p>
-            <a:pPr marL="0" indent="0">
-              <a:spcAft>
-                <a:spcPts val="0"/>
-              </a:spcAft>
-              <a:buNone/>
-            </a:pPr>
-            <a:r>
-              <a:rPr lang="en-GB" dirty="0">
-                <a:solidFill>
-                  <a:schemeClr val="accent3">
-                    <a:lumMod val="50000"/>
-                  </a:schemeClr>
-                </a:solidFill>
-                <a:latin typeface="APL385 Unicode" panose="020B0709000202000203" pitchFamily="49" charset="0"/>
-              </a:rPr>
-              <a:t>Division by zero</a:t>
-            </a:r>
-            <a:endParaRPr lang="en-GB" b="1" dirty="0">
-              <a:solidFill>
-                <a:srgbClr val="FF0000"/>
-              </a:solidFill>
-              <a:latin typeface="APL385 Unicode" panose="020B0709000202000203" pitchFamily="49" charset="0"/>
-            </a:endParaRPr>
+            <a:endParaRPr lang="en-GB" dirty="0"/>
           </a:p>
         </p:txBody>
       </p:sp>
@@ -15718,7 +15866,7 @@
           <p:cNvPr id="3" name="Title 2">
             <a:extLst>
               <a:ext uri="{FF2B5EF4-FFF2-40B4-BE49-F238E27FC236}">
-                <a16:creationId xmlns:a16="http://schemas.microsoft.com/office/drawing/2014/main" id="{927CCA16-3B19-C8C3-F400-CA50168E61D6}"/>
+                <a16:creationId xmlns:a16="http://schemas.microsoft.com/office/drawing/2014/main" id="{3734B68D-0F44-797E-A37E-66BFE4EEAE36}"/>
               </a:ext>
             </a:extLst>
           </p:cNvPr>
@@ -15748,7 +15896,7 @@
                   <a:srgbClr val="FF6600"/>
                 </a:solidFill>
               </a:rPr>
-              <a:t>error guards</a:t>
+              <a:t>recursion</a:t>
             </a:r>
           </a:p>
         </p:txBody>
@@ -15758,7 +15906,7 @@
           <p:cNvPr id="4" name="Media Placeholder 3">
             <a:extLst>
               <a:ext uri="{FF2B5EF4-FFF2-40B4-BE49-F238E27FC236}">
-                <a16:creationId xmlns:a16="http://schemas.microsoft.com/office/drawing/2014/main" id="{A0579A24-A886-E343-AFA2-05196C81FF8B}"/>
+                <a16:creationId xmlns:a16="http://schemas.microsoft.com/office/drawing/2014/main" id="{48F67E54-9723-DD60-42F3-718AB505C2D6}"/>
               </a:ext>
             </a:extLst>
           </p:cNvPr>
@@ -15778,10 +15926,96 @@
           </a:p>
         </p:txBody>
       </p:sp>
+      <p:sp>
+        <p:nvSpPr>
+          <p:cNvPr id="5" name="TextBox 4">
+            <a:extLst>
+              <a:ext uri="{FF2B5EF4-FFF2-40B4-BE49-F238E27FC236}">
+                <a16:creationId xmlns:a16="http://schemas.microsoft.com/office/drawing/2014/main" id="{5B0A0CCD-2124-871E-DC4D-A54E8234E5EB}"/>
+              </a:ext>
+            </a:extLst>
+          </p:cNvPr>
+          <p:cNvSpPr txBox="1"/>
+          <p:nvPr/>
+        </p:nvSpPr>
+        <p:spPr>
+          <a:xfrm>
+            <a:off x="1709682" y="2733768"/>
+            <a:ext cx="5849358" cy="1569660"/>
+          </a:xfrm>
+          <a:prstGeom prst="rect">
+            <a:avLst/>
+          </a:prstGeom>
+          <a:solidFill>
+            <a:schemeClr val="tx1"/>
+          </a:solidFill>
+          <a:ln w="38100">
+            <a:solidFill>
+              <a:srgbClr val="FF6600"/>
+            </a:solidFill>
+          </a:ln>
+        </p:spPr>
+        <p:txBody>
+          <a:bodyPr wrap="square" numCol="1" rtlCol="0">
+            <a:spAutoFit/>
+          </a:bodyPr>
+          <a:lstStyle/>
+          <a:p>
+            <a:r>
+              <a:rPr lang="en-GB" sz="2400" dirty="0">
+                <a:solidFill>
+                  <a:schemeClr val="bg1"/>
+                </a:solidFill>
+                <a:latin typeface="APL385 Unicode" panose="020B0709000202000203" pitchFamily="49" charset="0"/>
+              </a:rPr>
+              <a:t>factorial←{</a:t>
+            </a:r>
+            <a:br>
+              <a:rPr lang="en-GB" sz="2400" dirty="0">
+                <a:solidFill>
+                  <a:schemeClr val="bg1"/>
+                </a:solidFill>
+                <a:latin typeface="APL385 Unicode" panose="020B0709000202000203" pitchFamily="49" charset="0"/>
+              </a:rPr>
+            </a:br>
+            <a:r>
+              <a:rPr lang="en-GB" sz="2400" dirty="0">
+                <a:solidFill>
+                  <a:schemeClr val="bg1"/>
+                </a:solidFill>
+                <a:latin typeface="APL385 Unicode" panose="020B0709000202000203" pitchFamily="49" charset="0"/>
+              </a:rPr>
+              <a:t>  ⍵=0: 1</a:t>
+            </a:r>
+          </a:p>
+          <a:p>
+            <a:r>
+              <a:rPr lang="en-GB" sz="2400" dirty="0">
+                <a:solidFill>
+                  <a:schemeClr val="bg1"/>
+                </a:solidFill>
+                <a:latin typeface="APL385 Unicode" panose="020B0709000202000203" pitchFamily="49" charset="0"/>
+              </a:rPr>
+              <a:t>  ⍵ × ∇ ⍵-1   ⍝ call self(⍵-1)</a:t>
+            </a:r>
+          </a:p>
+          <a:p>
+            <a:r>
+              <a:rPr lang="en-GB" sz="2400" dirty="0">
+                <a:solidFill>
+                  <a:schemeClr val="bg1"/>
+                </a:solidFill>
+                <a:latin typeface="APL385 Unicode" panose="020B0709000202000203" pitchFamily="49" charset="0"/>
+              </a:rPr>
+              <a:t>}</a:t>
+            </a:r>
+          </a:p>
+        </p:txBody>
+      </p:sp>
     </p:spTree>
     <p:extLst>
       <p:ext uri="{BB962C8B-B14F-4D97-AF65-F5344CB8AC3E}">
-        <p14:creationId xmlns:p14="http://schemas.microsoft.com/office/powerpoint/2010/main" val="1451763254"/>
+        <p14:creationId xmlns:p14="http://schemas.microsoft.com/office/powerpoint/2010/main" val="3237066938"/>
       </p:ext>
     </p:extLst>
   </p:cSld>
@@ -15813,7 +16047,7 @@
           <p:cNvPr id="2" name="Content Placeholder 1">
             <a:extLst>
               <a:ext uri="{FF2B5EF4-FFF2-40B4-BE49-F238E27FC236}">
-                <a16:creationId xmlns:a16="http://schemas.microsoft.com/office/drawing/2014/main" id="{5F7E1C02-FA42-4686-064B-7B86FD1825C3}"/>
+                <a16:creationId xmlns:a16="http://schemas.microsoft.com/office/drawing/2014/main" id="{15A8F58E-0B00-45AA-8356-66D63077C170}"/>
               </a:ext>
             </a:extLst>
           </p:cNvPr>
@@ -15826,7 +16060,9 @@
         </p:nvSpPr>
         <p:spPr/>
         <p:txBody>
-          <a:bodyPr/>
+          <a:bodyPr>
+            <a:normAutofit fontScale="85000" lnSpcReduction="20000"/>
+          </a:bodyPr>
           <a:lstStyle/>
           <a:p>
             <a:pPr marL="0" indent="0">
@@ -15834,42 +16070,255 @@
             </a:pPr>
             <a:r>
               <a:rPr lang="en-GB" dirty="0"/>
-              <a:t>If you want to clear the last call from the stack you can use "naked" branch (no line number) as in</a:t>
+              <a:t>An error guard is an error number followed by </a:t>
+            </a:r>
+            <a:r>
+              <a:rPr lang="en-GB" b="1" dirty="0">
+                <a:solidFill>
+                  <a:srgbClr val="FF0000"/>
+                </a:solidFill>
+                <a:latin typeface="APL385 Unicode" panose="020B0709000202000203" pitchFamily="49" charset="0"/>
+              </a:rPr>
+              <a:t>::</a:t>
             </a:r>
           </a:p>
           <a:p>
             <a:pPr marL="0" indent="0">
+              <a:spcAft>
+                <a:spcPts val="0"/>
+              </a:spcAft>
               <a:buNone/>
             </a:pPr>
             <a:r>
-              <a:rPr lang="en-GB" dirty="0"/>
-              <a:t>You can use the system </a:t>
-            </a:r>
-            <a:br>
-              <a:rPr lang="en-GB" dirty="0"/>
-            </a:br>
-            <a:r>
-              <a:rPr lang="en-GB" dirty="0"/>
-              <a:t>command </a:t>
-            </a:r>
-            <a:r>
               <a:rPr lang="en-GB" dirty="0">
                 <a:solidFill>
-                  <a:srgbClr val="FF6600"/>
-                </a:solidFill>
-                <a:latin typeface="APL385 Unicode" panose="020B0709000202000203" pitchFamily="49" charset="0"/>
-              </a:rPr>
-              <a:t>)SI</a:t>
+                  <a:schemeClr val="accent3">
+                    <a:lumMod val="50000"/>
+                  </a:schemeClr>
+                </a:solidFill>
+                <a:latin typeface="APL385 Unicode" panose="020B0709000202000203" pitchFamily="49" charset="0"/>
+              </a:rPr>
+              <a:t>    </a:t>
+            </a:r>
+            <a:r>
+              <a:rPr lang="en-GB" dirty="0">
+                <a:solidFill>
+                  <a:srgbClr val="00B050"/>
+                </a:solidFill>
+                <a:latin typeface="APL385 Unicode" panose="020B0709000202000203" pitchFamily="49" charset="0"/>
+              </a:rPr>
+              <a:t>Div←{</a:t>
             </a:r>
           </a:p>
           <a:p>
             <a:pPr marL="0" indent="0">
+              <a:spcAft>
+                <a:spcPts val="0"/>
+              </a:spcAft>
               <a:buNone/>
             </a:pPr>
             <a:r>
-              <a:rPr lang="en-GB" dirty="0"/>
-              <a:t>to view the stack:</a:t>
-            </a:r>
+              <a:rPr lang="en-GB" b="1" dirty="0">
+                <a:solidFill>
+                  <a:srgbClr val="00B050"/>
+                </a:solidFill>
+                <a:latin typeface="APL385 Unicode" panose="020B0709000202000203" pitchFamily="49" charset="0"/>
+              </a:rPr>
+              <a:t>        11</a:t>
+            </a:r>
+            <a:r>
+              <a:rPr lang="en-GB" b="1" dirty="0">
+                <a:solidFill>
+                  <a:srgbClr val="FF6600"/>
+                </a:solidFill>
+                <a:latin typeface="APL385 Unicode" panose="020B0709000202000203" pitchFamily="49" charset="0"/>
+              </a:rPr>
+              <a:t>::</a:t>
+            </a:r>
+            <a:r>
+              <a:rPr lang="en-GB" b="1" dirty="0">
+                <a:solidFill>
+                  <a:srgbClr val="00B050"/>
+                </a:solidFill>
+                <a:latin typeface="APL385 Unicode" panose="020B0709000202000203" pitchFamily="49" charset="0"/>
+              </a:rPr>
+              <a:t>'</a:t>
+            </a:r>
+            <a:r>
+              <a:rPr lang="en-GB" dirty="0">
+                <a:solidFill>
+                  <a:srgbClr val="00B050"/>
+                </a:solidFill>
+                <a:latin typeface="APL385 Unicode" panose="020B0709000202000203" pitchFamily="49" charset="0"/>
+              </a:rPr>
+              <a:t>Division by zero'</a:t>
+            </a:r>
+          </a:p>
+          <a:p>
+            <a:pPr marL="0" indent="0">
+              <a:spcAft>
+                <a:spcPts val="0"/>
+              </a:spcAft>
+              <a:buNone/>
+            </a:pPr>
+            <a:r>
+              <a:rPr lang="en-GB" dirty="0">
+                <a:solidFill>
+                  <a:srgbClr val="00B050"/>
+                </a:solidFill>
+                <a:latin typeface="APL385 Unicode" panose="020B0709000202000203" pitchFamily="49" charset="0"/>
+              </a:rPr>
+              <a:t>        ⍺÷⍵</a:t>
+            </a:r>
+          </a:p>
+          <a:p>
+            <a:pPr marL="0" indent="0">
+              <a:spcAft>
+                <a:spcPts val="0"/>
+              </a:spcAft>
+              <a:buNone/>
+            </a:pPr>
+            <a:r>
+              <a:rPr lang="en-GB" dirty="0">
+                <a:solidFill>
+                  <a:srgbClr val="00B050"/>
+                </a:solidFill>
+                <a:latin typeface="APL385 Unicode" panose="020B0709000202000203" pitchFamily="49" charset="0"/>
+              </a:rPr>
+              <a:t>    }</a:t>
+            </a:r>
+          </a:p>
+          <a:p>
+            <a:pPr marL="0" indent="0">
+              <a:spcAft>
+                <a:spcPts val="0"/>
+              </a:spcAft>
+              <a:buNone/>
+            </a:pPr>
+            <a:endParaRPr lang="en-GB" dirty="0">
+              <a:solidFill>
+                <a:schemeClr val="accent3">
+                  <a:lumMod val="50000"/>
+                </a:schemeClr>
+              </a:solidFill>
+              <a:latin typeface="APL385 Unicode" panose="020B0709000202000203" pitchFamily="49" charset="0"/>
+            </a:endParaRPr>
+          </a:p>
+          <a:p>
+            <a:pPr marL="0" indent="0">
+              <a:spcAft>
+                <a:spcPts val="0"/>
+              </a:spcAft>
+              <a:buNone/>
+            </a:pPr>
+            <a:r>
+              <a:rPr lang="en-GB" dirty="0">
+                <a:solidFill>
+                  <a:schemeClr val="accent3">
+                    <a:lumMod val="50000"/>
+                  </a:schemeClr>
+                </a:solidFill>
+                <a:latin typeface="APL385 Unicode" panose="020B0709000202000203" pitchFamily="49" charset="0"/>
+              </a:rPr>
+              <a:t>    </a:t>
+            </a:r>
+            <a:r>
+              <a:rPr lang="en-GB" dirty="0">
+                <a:solidFill>
+                  <a:srgbClr val="00B050"/>
+                </a:solidFill>
+                <a:latin typeface="APL385 Unicode" panose="020B0709000202000203" pitchFamily="49" charset="0"/>
+              </a:rPr>
+              <a:t>4 Div 2</a:t>
+            </a:r>
+          </a:p>
+          <a:p>
+            <a:pPr marL="0" indent="0">
+              <a:spcAft>
+                <a:spcPts val="0"/>
+              </a:spcAft>
+              <a:buNone/>
+            </a:pPr>
+            <a:r>
+              <a:rPr lang="en-GB" dirty="0">
+                <a:solidFill>
+                  <a:schemeClr val="accent3">
+                    <a:lumMod val="50000"/>
+                  </a:schemeClr>
+                </a:solidFill>
+                <a:latin typeface="APL385 Unicode" panose="020B0709000202000203" pitchFamily="49" charset="0"/>
+              </a:rPr>
+              <a:t>2</a:t>
+            </a:r>
+          </a:p>
+          <a:p>
+            <a:pPr marL="0" indent="0">
+              <a:spcAft>
+                <a:spcPts val="0"/>
+              </a:spcAft>
+              <a:buNone/>
+            </a:pPr>
+            <a:endParaRPr lang="en-GB" dirty="0">
+              <a:solidFill>
+                <a:schemeClr val="accent3">
+                  <a:lumMod val="50000"/>
+                </a:schemeClr>
+              </a:solidFill>
+              <a:latin typeface="APL385 Unicode" panose="020B0709000202000203" pitchFamily="49" charset="0"/>
+            </a:endParaRPr>
+          </a:p>
+          <a:p>
+            <a:pPr marL="0" indent="0">
+              <a:spcAft>
+                <a:spcPts val="0"/>
+              </a:spcAft>
+              <a:buNone/>
+            </a:pPr>
+            <a:r>
+              <a:rPr lang="en-GB" dirty="0">
+                <a:solidFill>
+                  <a:schemeClr val="accent3">
+                    <a:lumMod val="50000"/>
+                  </a:schemeClr>
+                </a:solidFill>
+                <a:latin typeface="APL385 Unicode" panose="020B0709000202000203" pitchFamily="49" charset="0"/>
+              </a:rPr>
+              <a:t>    </a:t>
+            </a:r>
+            <a:r>
+              <a:rPr lang="en-GB" dirty="0">
+                <a:solidFill>
+                  <a:srgbClr val="00B050"/>
+                </a:solidFill>
+                <a:latin typeface="APL385 Unicode" panose="020B0709000202000203" pitchFamily="49" charset="0"/>
+              </a:rPr>
+              <a:t>4 Div 0</a:t>
+            </a:r>
+          </a:p>
+          <a:p>
+            <a:pPr marL="0" indent="0">
+              <a:spcAft>
+                <a:spcPts val="0"/>
+              </a:spcAft>
+              <a:buNone/>
+            </a:pPr>
+            <a:r>
+              <a:rPr lang="en-GB" dirty="0">
+                <a:solidFill>
+                  <a:schemeClr val="accent3">
+                    <a:lumMod val="50000"/>
+                  </a:schemeClr>
+                </a:solidFill>
+                <a:latin typeface="APL385 Unicode" panose="020B0709000202000203" pitchFamily="49" charset="0"/>
+              </a:rPr>
+              <a:t>Division by zero</a:t>
+            </a:r>
+            <a:endParaRPr lang="en-GB" b="1" dirty="0">
+              <a:solidFill>
+                <a:srgbClr val="FF0000"/>
+              </a:solidFill>
+              <a:latin typeface="APL385 Unicode" panose="020B0709000202000203" pitchFamily="49" charset="0"/>
+            </a:endParaRPr>
           </a:p>
         </p:txBody>
       </p:sp>
@@ -15878,7 +16327,7 @@
           <p:cNvPr id="3" name="Title 2">
             <a:extLst>
               <a:ext uri="{FF2B5EF4-FFF2-40B4-BE49-F238E27FC236}">
-                <a16:creationId xmlns:a16="http://schemas.microsoft.com/office/drawing/2014/main" id="{C99F1493-2CBB-0083-0B18-CAE658B6814E}"/>
+                <a16:creationId xmlns:a16="http://schemas.microsoft.com/office/drawing/2014/main" id="{927CCA16-3B19-C8C3-F400-CA50168E61D6}"/>
               </a:ext>
             </a:extLst>
           </p:cNvPr>
@@ -15895,21 +16344,20 @@
           <a:lstStyle/>
           <a:p>
             <a:r>
-              <a:rPr lang="en-GB" dirty="0"/>
-              <a:t>Naked Branch (</a:t>
-            </a:r>
-            <a:r>
-              <a:rPr lang="en-GB" dirty="0">
+              <a:rPr lang="en-GB" dirty="0" err="1"/>
+              <a:t>dfn</a:t>
+            </a:r>
+            <a:r>
+              <a:rPr lang="en-GB" dirty="0"/>
+              <a:t> </a:t>
+            </a:r>
+            <a:r>
+              <a:rPr lang="en-GB" b="1" i="1" dirty="0">
                 <a:solidFill>
                   <a:srgbClr val="FF6600"/>
                 </a:solidFill>
-                <a:latin typeface="APL385 Unicode" panose="020B0709000202000203" pitchFamily="49" charset="0"/>
-              </a:rPr>
-              <a:t>→</a:t>
-            </a:r>
-            <a:r>
-              <a:rPr lang="en-GB" dirty="0"/>
-              <a:t>)</a:t>
+              </a:rPr>
+              <a:t>error guards</a:t>
             </a:r>
           </a:p>
         </p:txBody>
@@ -15919,7 +16367,7 @@
           <p:cNvPr id="4" name="Media Placeholder 3">
             <a:extLst>
               <a:ext uri="{FF2B5EF4-FFF2-40B4-BE49-F238E27FC236}">
-                <a16:creationId xmlns:a16="http://schemas.microsoft.com/office/drawing/2014/main" id="{7615996E-CFA3-FBCC-1D78-7B5A9DBB7348}"/>
+                <a16:creationId xmlns:a16="http://schemas.microsoft.com/office/drawing/2014/main" id="{A0579A24-A886-E343-AFA2-05196C81FF8B}"/>
               </a:ext>
             </a:extLst>
           </p:cNvPr>
@@ -15942,7 +16390,7 @@
     </p:spTree>
     <p:extLst>
       <p:ext uri="{BB962C8B-B14F-4D97-AF65-F5344CB8AC3E}">
-        <p14:creationId xmlns:p14="http://schemas.microsoft.com/office/powerpoint/2010/main" val="2165630061"/>
+        <p14:creationId xmlns:p14="http://schemas.microsoft.com/office/powerpoint/2010/main" val="1451763254"/>
       </p:ext>
     </p:extLst>
   </p:cSld>
@@ -16229,7 +16677,7 @@
           <p:cNvPr id="2" name="Content Placeholder 1">
             <a:extLst>
               <a:ext uri="{FF2B5EF4-FFF2-40B4-BE49-F238E27FC236}">
-                <a16:creationId xmlns:a16="http://schemas.microsoft.com/office/drawing/2014/main" id="{57102688-5B94-289C-F615-1A19C194E3CF}"/>
+                <a16:creationId xmlns:a16="http://schemas.microsoft.com/office/drawing/2014/main" id="{5F7E1C02-FA42-4686-064B-7B86FD1825C3}"/>
               </a:ext>
             </a:extLst>
           </p:cNvPr>
@@ -16242,9 +16690,7 @@
         </p:nvSpPr>
         <p:spPr/>
         <p:txBody>
-          <a:bodyPr>
-            <a:normAutofit/>
-          </a:bodyPr>
+          <a:bodyPr/>
           <a:lstStyle/>
           <a:p>
             <a:pPr marL="0" indent="0">
@@ -16252,7 +16698,23 @@
             </a:pPr>
             <a:r>
               <a:rPr lang="en-GB" dirty="0"/>
-              <a:t>If you need to clear the stack completely you can use the system command </a:t>
+              <a:t>If you want to clear the last call from the stack you can use "naked" branch (no line number) as in</a:t>
+            </a:r>
+          </a:p>
+          <a:p>
+            <a:pPr marL="0" indent="0">
+              <a:buNone/>
+            </a:pPr>
+            <a:r>
+              <a:rPr lang="en-GB" dirty="0"/>
+              <a:t>You can use the system </a:t>
+            </a:r>
+            <a:br>
+              <a:rPr lang="en-GB" dirty="0"/>
+            </a:br>
+            <a:r>
+              <a:rPr lang="en-GB" dirty="0"/>
+              <a:t>command </a:t>
             </a:r>
             <a:r>
               <a:rPr lang="en-GB" dirty="0">
@@ -16261,46 +16723,16 @@
                 </a:solidFill>
                 <a:latin typeface="APL385 Unicode" panose="020B0709000202000203" pitchFamily="49" charset="0"/>
               </a:rPr>
-              <a:t>)RESET</a:t>
-            </a:r>
-            <a:r>
-              <a:rPr lang="en-GB" dirty="0"/>
-              <a:t>:</a:t>
-            </a:r>
-            <a:br>
-              <a:rPr lang="en-GB" dirty="0"/>
-            </a:br>
-            <a:br>
-              <a:rPr lang="en-GB" dirty="0"/>
-            </a:br>
-            <a:br>
-              <a:rPr lang="en-GB" dirty="0"/>
-            </a:br>
-            <a:r>
-              <a:rPr lang="en-GB" dirty="0">
-                <a:latin typeface="APL385 Unicode" panose="020B0709000202000203" pitchFamily="49" charset="0"/>
-              </a:rPr>
-              <a:t>)RESET</a:t>
-            </a:r>
-            <a:r>
-              <a:rPr lang="en-GB" dirty="0"/>
-              <a:t> takes an argument of how many lines to remove (+</a:t>
-            </a:r>
-            <a:r>
-              <a:rPr lang="en-GB" dirty="0" err="1"/>
-              <a:t>ve</a:t>
-            </a:r>
-            <a:r>
-              <a:rPr lang="en-GB" dirty="0"/>
-              <a:t>) or keep (-</a:t>
-            </a:r>
-            <a:r>
-              <a:rPr lang="en-GB" dirty="0" err="1"/>
-              <a:t>ve</a:t>
-            </a:r>
-            <a:r>
-              <a:rPr lang="en-GB" dirty="0"/>
-              <a:t>)</a:t>
+              <a:t>)SI</a:t>
+            </a:r>
+          </a:p>
+          <a:p>
+            <a:pPr marL="0" indent="0">
+              <a:buNone/>
+            </a:pPr>
+            <a:r>
+              <a:rPr lang="en-GB" dirty="0"/>
+              <a:t>to view the stack:</a:t>
             </a:r>
           </a:p>
         </p:txBody>
@@ -16310,7 +16742,7 @@
           <p:cNvPr id="3" name="Title 2">
             <a:extLst>
               <a:ext uri="{FF2B5EF4-FFF2-40B4-BE49-F238E27FC236}">
-                <a16:creationId xmlns:a16="http://schemas.microsoft.com/office/drawing/2014/main" id="{8EEFA175-4B7F-444B-B473-586D3C0F0FFC}"/>
+                <a16:creationId xmlns:a16="http://schemas.microsoft.com/office/drawing/2014/main" id="{C99F1493-2CBB-0083-0B18-CAE658B6814E}"/>
               </a:ext>
             </a:extLst>
           </p:cNvPr>
@@ -16328,7 +16760,20 @@
           <a:p>
             <a:r>
               <a:rPr lang="en-GB" dirty="0"/>
-              <a:t>)RESET</a:t>
+              <a:t>Naked Branch (</a:t>
+            </a:r>
+            <a:r>
+              <a:rPr lang="en-GB" dirty="0">
+                <a:solidFill>
+                  <a:srgbClr val="FF6600"/>
+                </a:solidFill>
+                <a:latin typeface="APL385 Unicode" panose="020B0709000202000203" pitchFamily="49" charset="0"/>
+              </a:rPr>
+              <a:t>→</a:t>
+            </a:r>
+            <a:r>
+              <a:rPr lang="en-GB" dirty="0"/>
+              <a:t>)</a:t>
             </a:r>
           </a:p>
         </p:txBody>
@@ -16338,7 +16783,7 @@
           <p:cNvPr id="4" name="Media Placeholder 3">
             <a:extLst>
               <a:ext uri="{FF2B5EF4-FFF2-40B4-BE49-F238E27FC236}">
-                <a16:creationId xmlns:a16="http://schemas.microsoft.com/office/drawing/2014/main" id="{0D4F55AC-BE7F-BB75-D827-81D16D3794DB}"/>
+                <a16:creationId xmlns:a16="http://schemas.microsoft.com/office/drawing/2014/main" id="{7615996E-CFA3-FBCC-1D78-7B5A9DBB7348}"/>
               </a:ext>
             </a:extLst>
           </p:cNvPr>
@@ -16361,7 +16806,7 @@
     </p:spTree>
     <p:extLst>
       <p:ext uri="{BB962C8B-B14F-4D97-AF65-F5344CB8AC3E}">
-        <p14:creationId xmlns:p14="http://schemas.microsoft.com/office/powerpoint/2010/main" val="462044949"/>
+        <p14:creationId xmlns:p14="http://schemas.microsoft.com/office/powerpoint/2010/main" val="2165630061"/>
       </p:ext>
     </p:extLst>
   </p:cSld>
@@ -16393,6 +16838,170 @@
           <p:cNvPr id="2" name="Content Placeholder 1">
             <a:extLst>
               <a:ext uri="{FF2B5EF4-FFF2-40B4-BE49-F238E27FC236}">
+                <a16:creationId xmlns:a16="http://schemas.microsoft.com/office/drawing/2014/main" id="{57102688-5B94-289C-F615-1A19C194E3CF}"/>
+              </a:ext>
+            </a:extLst>
+          </p:cNvPr>
+          <p:cNvSpPr>
+            <a:spLocks noGrp="1"/>
+          </p:cNvSpPr>
+          <p:nvPr>
+            <p:ph idx="1"/>
+          </p:nvPr>
+        </p:nvSpPr>
+        <p:spPr/>
+        <p:txBody>
+          <a:bodyPr>
+            <a:normAutofit/>
+          </a:bodyPr>
+          <a:lstStyle/>
+          <a:p>
+            <a:pPr marL="0" indent="0">
+              <a:buNone/>
+            </a:pPr>
+            <a:r>
+              <a:rPr lang="en-GB" dirty="0"/>
+              <a:t>If you need to clear the stack completely you can use the system command </a:t>
+            </a:r>
+            <a:r>
+              <a:rPr lang="en-GB" dirty="0">
+                <a:solidFill>
+                  <a:srgbClr val="FF6600"/>
+                </a:solidFill>
+                <a:latin typeface="APL385 Unicode" panose="020B0709000202000203" pitchFamily="49" charset="0"/>
+              </a:rPr>
+              <a:t>)RESET</a:t>
+            </a:r>
+            <a:r>
+              <a:rPr lang="en-GB" dirty="0"/>
+              <a:t>:</a:t>
+            </a:r>
+            <a:br>
+              <a:rPr lang="en-GB" dirty="0"/>
+            </a:br>
+            <a:br>
+              <a:rPr lang="en-GB" dirty="0"/>
+            </a:br>
+            <a:br>
+              <a:rPr lang="en-GB" dirty="0"/>
+            </a:br>
+            <a:r>
+              <a:rPr lang="en-GB" dirty="0">
+                <a:latin typeface="APL385 Unicode" panose="020B0709000202000203" pitchFamily="49" charset="0"/>
+              </a:rPr>
+              <a:t>)RESET</a:t>
+            </a:r>
+            <a:r>
+              <a:rPr lang="en-GB" dirty="0"/>
+              <a:t> takes an argument of how many lines to remove (+</a:t>
+            </a:r>
+            <a:r>
+              <a:rPr lang="en-GB" dirty="0" err="1"/>
+              <a:t>ve</a:t>
+            </a:r>
+            <a:r>
+              <a:rPr lang="en-GB" dirty="0"/>
+              <a:t>) or keep (-</a:t>
+            </a:r>
+            <a:r>
+              <a:rPr lang="en-GB" dirty="0" err="1"/>
+              <a:t>ve</a:t>
+            </a:r>
+            <a:r>
+              <a:rPr lang="en-GB" dirty="0"/>
+              <a:t>)</a:t>
+            </a:r>
+          </a:p>
+        </p:txBody>
+      </p:sp>
+      <p:sp>
+        <p:nvSpPr>
+          <p:cNvPr id="3" name="Title 2">
+            <a:extLst>
+              <a:ext uri="{FF2B5EF4-FFF2-40B4-BE49-F238E27FC236}">
+                <a16:creationId xmlns:a16="http://schemas.microsoft.com/office/drawing/2014/main" id="{8EEFA175-4B7F-444B-B473-586D3C0F0FFC}"/>
+              </a:ext>
+            </a:extLst>
+          </p:cNvPr>
+          <p:cNvSpPr>
+            <a:spLocks noGrp="1"/>
+          </p:cNvSpPr>
+          <p:nvPr>
+            <p:ph type="title"/>
+          </p:nvPr>
+        </p:nvSpPr>
+        <p:spPr/>
+        <p:txBody>
+          <a:bodyPr/>
+          <a:lstStyle/>
+          <a:p>
+            <a:r>
+              <a:rPr lang="en-GB" dirty="0"/>
+              <a:t>)RESET</a:t>
+            </a:r>
+          </a:p>
+        </p:txBody>
+      </p:sp>
+      <p:sp>
+        <p:nvSpPr>
+          <p:cNvPr id="4" name="Media Placeholder 3">
+            <a:extLst>
+              <a:ext uri="{FF2B5EF4-FFF2-40B4-BE49-F238E27FC236}">
+                <a16:creationId xmlns:a16="http://schemas.microsoft.com/office/drawing/2014/main" id="{0D4F55AC-BE7F-BB75-D827-81D16D3794DB}"/>
+              </a:ext>
+            </a:extLst>
+          </p:cNvPr>
+          <p:cNvSpPr>
+            <a:spLocks noGrp="1"/>
+          </p:cNvSpPr>
+          <p:nvPr>
+            <p:ph type="media" sz="quarter" idx="11"/>
+          </p:nvPr>
+        </p:nvSpPr>
+        <p:spPr/>
+        <p:txBody>
+          <a:bodyPr/>
+          <a:lstStyle/>
+          <a:p>
+            <a:endParaRPr lang="en-GB"/>
+          </a:p>
+        </p:txBody>
+      </p:sp>
+    </p:spTree>
+    <p:extLst>
+      <p:ext uri="{BB962C8B-B14F-4D97-AF65-F5344CB8AC3E}">
+        <p14:creationId xmlns:p14="http://schemas.microsoft.com/office/powerpoint/2010/main" val="462044949"/>
+      </p:ext>
+    </p:extLst>
+  </p:cSld>
+  <p:clrMapOvr>
+    <a:masterClrMapping/>
+  </p:clrMapOvr>
+</p:sld>
+</file>
+
+<file path=ppt/slides/slide52.xml><?xml version="1.0" encoding="utf-8"?>
+<p:sld xmlns:a="http://schemas.openxmlformats.org/drawingml/2006/main" xmlns:r="http://schemas.openxmlformats.org/officeDocument/2006/relationships" xmlns:p="http://schemas.openxmlformats.org/presentationml/2006/main">
+  <p:cSld>
+    <p:spTree>
+      <p:nvGrpSpPr>
+        <p:cNvPr id="1" name=""/>
+        <p:cNvGrpSpPr/>
+        <p:nvPr/>
+      </p:nvGrpSpPr>
+      <p:grpSpPr>
+        <a:xfrm>
+          <a:off x="0" y="0"/>
+          <a:ext cx="0" cy="0"/>
+          <a:chOff x="0" y="0"/>
+          <a:chExt cx="0" cy="0"/>
+        </a:xfrm>
+      </p:grpSpPr>
+      <p:sp>
+        <p:nvSpPr>
+          <p:cNvPr id="2" name="Content Placeholder 1">
+            <a:extLst>
+              <a:ext uri="{FF2B5EF4-FFF2-40B4-BE49-F238E27FC236}">
                 <a16:creationId xmlns:a16="http://schemas.microsoft.com/office/drawing/2014/main" id="{BFB41419-38C4-39DC-953E-2693F8CF368E}"/>
               </a:ext>
             </a:extLst>
@@ -16512,7 +17121,7 @@
 </p:sld>
 </file>
 
-<file path=ppt/slides/slide52.xml><?xml version="1.0" encoding="utf-8"?>
+<file path=ppt/slides/slide53.xml><?xml version="1.0" encoding="utf-8"?>
 <p:sld xmlns:a="http://schemas.openxmlformats.org/drawingml/2006/main" xmlns:r="http://schemas.openxmlformats.org/officeDocument/2006/relationships" xmlns:p="http://schemas.openxmlformats.org/presentationml/2006/main">
   <p:cSld>
     <p:spTree>
@@ -16680,7 +17289,7 @@
 </p:sld>
 </file>
 
-<file path=ppt/slides/slide53.xml><?xml version="1.0" encoding="utf-8"?>
+<file path=ppt/slides/slide54.xml><?xml version="1.0" encoding="utf-8"?>
 <p:sld xmlns:a="http://schemas.openxmlformats.org/drawingml/2006/main" xmlns:r="http://schemas.openxmlformats.org/officeDocument/2006/relationships" xmlns:p="http://schemas.openxmlformats.org/presentationml/2006/main">
   <p:cSld>
     <p:spTree>
@@ -16801,7 +17410,7 @@
 </p:sld>
 </file>
 
-<file path=ppt/slides/slide54.xml><?xml version="1.0" encoding="utf-8"?>
+<file path=ppt/slides/slide55.xml><?xml version="1.0" encoding="utf-8"?>
 <p:sld xmlns:a="http://schemas.openxmlformats.org/drawingml/2006/main" xmlns:r="http://schemas.openxmlformats.org/officeDocument/2006/relationships" xmlns:p="http://schemas.openxmlformats.org/presentationml/2006/main">
   <p:cSld>
     <p:spTree>

--- a/slides/APL_Bootcamp-part-6.pptx
+++ b/slides/APL_Bootcamp-part-6.pptx
@@ -5,10 +5,10 @@
     <p:sldMasterId id="2147483648" r:id="rId1"/>
   </p:sldMasterIdLst>
   <p:notesMasterIdLst>
-    <p:notesMasterId r:id="rId57"/>
+    <p:notesMasterId r:id="rId56"/>
   </p:notesMasterIdLst>
   <p:handoutMasterIdLst>
-    <p:handoutMasterId r:id="rId58"/>
+    <p:handoutMasterId r:id="rId57"/>
   </p:handoutMasterIdLst>
   <p:sldIdLst>
     <p:sldId id="257" r:id="rId2"/>
@@ -50,47 +50,46 @@
     <p:sldId id="292" r:id="rId38"/>
     <p:sldId id="293" r:id="rId39"/>
     <p:sldId id="294" r:id="rId40"/>
-    <p:sldId id="295" r:id="rId41"/>
+    <p:sldId id="297" r:id="rId41"/>
     <p:sldId id="296" r:id="rId42"/>
-    <p:sldId id="297" r:id="rId43"/>
-    <p:sldId id="298" r:id="rId44"/>
-    <p:sldId id="299" r:id="rId45"/>
-    <p:sldId id="311" r:id="rId46"/>
-    <p:sldId id="300" r:id="rId47"/>
-    <p:sldId id="301" r:id="rId48"/>
-    <p:sldId id="302" r:id="rId49"/>
-    <p:sldId id="303" r:id="rId50"/>
-    <p:sldId id="305" r:id="rId51"/>
-    <p:sldId id="306" r:id="rId52"/>
-    <p:sldId id="307" r:id="rId53"/>
-    <p:sldId id="308" r:id="rId54"/>
-    <p:sldId id="309" r:id="rId55"/>
-    <p:sldId id="310" r:id="rId56"/>
+    <p:sldId id="298" r:id="rId43"/>
+    <p:sldId id="299" r:id="rId44"/>
+    <p:sldId id="311" r:id="rId45"/>
+    <p:sldId id="300" r:id="rId46"/>
+    <p:sldId id="301" r:id="rId47"/>
+    <p:sldId id="302" r:id="rId48"/>
+    <p:sldId id="303" r:id="rId49"/>
+    <p:sldId id="305" r:id="rId50"/>
+    <p:sldId id="306" r:id="rId51"/>
+    <p:sldId id="307" r:id="rId52"/>
+    <p:sldId id="308" r:id="rId53"/>
+    <p:sldId id="309" r:id="rId54"/>
+    <p:sldId id="310" r:id="rId55"/>
   </p:sldIdLst>
   <p:sldSz cx="9144000" cy="5143500" type="screen16x9"/>
   <p:notesSz cx="6858000" cy="9144000"/>
   <p:embeddedFontLst>
     <p:embeddedFont>
       <p:font typeface="APL385 Unicode" panose="020B0709000202000203" pitchFamily="49" charset="0"/>
-      <p:regular r:id="rId59"/>
+      <p:regular r:id="rId58"/>
     </p:embeddedFont>
     <p:embeddedFont>
       <p:font typeface="Sarabun" panose="00000500000000000000" pitchFamily="2" charset="-34"/>
-      <p:regular r:id="rId60"/>
-      <p:bold r:id="rId61"/>
-      <p:italic r:id="rId62"/>
-      <p:boldItalic r:id="rId63"/>
+      <p:regular r:id="rId59"/>
+      <p:bold r:id="rId60"/>
+      <p:italic r:id="rId61"/>
+      <p:boldItalic r:id="rId62"/>
     </p:embeddedFont>
     <p:embeddedFont>
       <p:font typeface="Times" panose="02020603050405020304" pitchFamily="18" charset="0"/>
-      <p:regular r:id="rId64"/>
-      <p:bold r:id="rId65"/>
-      <p:italic r:id="rId66"/>
-      <p:boldItalic r:id="rId67"/>
+      <p:regular r:id="rId63"/>
+      <p:bold r:id="rId64"/>
+      <p:italic r:id="rId65"/>
+      <p:boldItalic r:id="rId66"/>
     </p:embeddedFont>
     <p:embeddedFont>
       <p:font typeface="Wingdings 2" panose="05020102010507070707" pitchFamily="18" charset="2"/>
-      <p:regular r:id="rId68"/>
+      <p:regular r:id="rId67"/>
     </p:embeddedFont>
   </p:embeddedFontLst>
   <p:defaultTextStyle>
@@ -13391,13 +13390,7 @@
   <p:cSld>
     <p:spTree>
       <p:nvGrpSpPr>
-        <p:cNvPr id="1" name="">
-          <a:extLst>
-            <a:ext uri="{FF2B5EF4-FFF2-40B4-BE49-F238E27FC236}">
-              <a16:creationId xmlns:a16="http://schemas.microsoft.com/office/drawing/2014/main" id="{E71C2299-48BF-B9CC-E254-A6D40DC778D0}"/>
-            </a:ext>
-          </a:extLst>
-        </p:cNvPr>
+        <p:cNvPr id="1" name=""/>
         <p:cNvGrpSpPr/>
         <p:nvPr/>
       </p:nvGrpSpPr>
@@ -13414,7 +13407,7 @@
           <p:cNvPr id="2" name="Content Placeholder 1">
             <a:extLst>
               <a:ext uri="{FF2B5EF4-FFF2-40B4-BE49-F238E27FC236}">
-                <a16:creationId xmlns:a16="http://schemas.microsoft.com/office/drawing/2014/main" id="{CC8ECDA8-A321-8080-0583-EA23D0248FE3}"/>
+                <a16:creationId xmlns:a16="http://schemas.microsoft.com/office/drawing/2014/main" id="{14C4AC2A-5FC8-C5A6-E83E-0B8705E3C84F}"/>
               </a:ext>
             </a:extLst>
           </p:cNvPr>
@@ -13427,42 +13420,62 @@
         </p:nvSpPr>
         <p:spPr/>
         <p:txBody>
-          <a:bodyPr>
-            <a:normAutofit fontScale="70000" lnSpcReduction="20000"/>
-          </a:bodyPr>
+          <a:bodyPr/>
           <a:lstStyle/>
           <a:p>
             <a:pPr marL="0" indent="0">
               <a:buNone/>
             </a:pPr>
             <a:r>
-              <a:rPr lang="en-GB" dirty="0">
-                <a:solidFill>
-                  <a:schemeClr val="tx1">
-                    <a:lumMod val="95000"/>
-                    <a:lumOff val="5000"/>
-                  </a:schemeClr>
-                </a:solidFill>
-                <a:latin typeface="APL385 Unicode" panose="020B0709000202000203" pitchFamily="49" charset="0"/>
-              </a:rPr>
-              <a:t> →(condition)/1+⎕LC ⋄ expression </a:t>
-            </a:r>
-            <a:r>
-              <a:rPr lang="en-GB" dirty="0">
-                <a:solidFill>
-                  <a:schemeClr val="tx1">
-                    <a:lumMod val="95000"/>
-                    <a:lumOff val="5000"/>
-                  </a:schemeClr>
-                </a:solidFill>
-              </a:rPr>
-              <a:t>    </a:t>
+              <a:rPr lang="en-GB" dirty="0"/>
+              <a:t>A label appears at the start of a line, followed by a colon:</a:t>
             </a:r>
           </a:p>
           <a:p>
             <a:pPr marL="0" indent="0">
               <a:buNone/>
             </a:pPr>
+            <a:r>
+              <a:rPr lang="en-GB" b="1" dirty="0">
+                <a:solidFill>
+                  <a:schemeClr val="accent3">
+                    <a:lumMod val="50000"/>
+                  </a:schemeClr>
+                </a:solidFill>
+                <a:latin typeface="APL385 Unicode" panose="020B0709000202000203" pitchFamily="49" charset="0"/>
+              </a:rPr>
+              <a:t> →Condition/Lab1</a:t>
+            </a:r>
+          </a:p>
+          <a:p>
+            <a:pPr marL="0" indent="0">
+              <a:buNone/>
+            </a:pPr>
+            <a:r>
+              <a:rPr lang="en-GB" b="1" dirty="0">
+                <a:solidFill>
+                  <a:schemeClr val="accent3">
+                    <a:lumMod val="50000"/>
+                  </a:schemeClr>
+                </a:solidFill>
+                <a:latin typeface="APL385 Unicode" panose="020B0709000202000203" pitchFamily="49" charset="0"/>
+              </a:rPr>
+              <a:t>    …</a:t>
+            </a:r>
+          </a:p>
+          <a:p>
+            <a:pPr marL="0" indent="0">
+              <a:buNone/>
+            </a:pPr>
+            <a:r>
+              <a:rPr lang="en-GB" b="1" dirty="0">
+                <a:solidFill>
+                  <a:srgbClr val="C00000"/>
+                </a:solidFill>
+                <a:latin typeface="APL385 Unicode" panose="020B0709000202000203" pitchFamily="49" charset="0"/>
+              </a:rPr>
+              <a:t> Lab1:</a:t>
+            </a:r>
             <a:endParaRPr lang="en-GB" dirty="0">
               <a:solidFill>
                 <a:schemeClr val="tx1">
@@ -13485,149 +13498,9 @@
                   </a:schemeClr>
                 </a:solidFill>
               </a:rPr>
-              <a:t>… conditionally branches to the next line (</a:t>
-            </a:r>
-            <a:r>
-              <a:rPr lang="en-GB" dirty="0">
-                <a:solidFill>
-                  <a:schemeClr val="tx1">
-                    <a:lumMod val="95000"/>
-                    <a:lumOff val="5000"/>
-                  </a:schemeClr>
-                </a:solidFill>
-                <a:latin typeface="APL385 Unicode" panose="020B0709000202000203" pitchFamily="49" charset="0"/>
-              </a:rPr>
-              <a:t>⎕LC </a:t>
-            </a:r>
-            <a:r>
-              <a:rPr lang="en-GB" dirty="0">
-                <a:solidFill>
-                  <a:schemeClr val="tx1">
-                    <a:lumMod val="95000"/>
-                    <a:lumOff val="5000"/>
-                  </a:schemeClr>
-                </a:solidFill>
-              </a:rPr>
-              <a:t>is the line counter). This is equivalent to …</a:t>
-            </a:r>
-          </a:p>
-          <a:p>
-            <a:endParaRPr lang="en-GB" dirty="0">
-              <a:solidFill>
-                <a:schemeClr val="tx1">
-                  <a:lumMod val="95000"/>
-                  <a:lumOff val="5000"/>
-                </a:schemeClr>
-              </a:solidFill>
-            </a:endParaRPr>
-          </a:p>
-          <a:p>
-            <a:pPr marL="0" indent="0">
-              <a:buNone/>
-            </a:pPr>
-            <a:r>
-              <a:rPr lang="en-GB" dirty="0">
-                <a:solidFill>
-                  <a:schemeClr val="tx1">
-                    <a:lumMod val="95000"/>
-                    <a:lumOff val="5000"/>
-                  </a:schemeClr>
-                </a:solidFill>
-                <a:latin typeface="APL385 Unicode" panose="020B0709000202000203" pitchFamily="49" charset="0"/>
-              </a:rPr>
-              <a:t>:If ~condition</a:t>
-            </a:r>
-            <a:br>
-              <a:rPr lang="en-GB" dirty="0">
-                <a:solidFill>
-                  <a:schemeClr val="tx1">
-                    <a:lumMod val="95000"/>
-                    <a:lumOff val="5000"/>
-                  </a:schemeClr>
-                </a:solidFill>
-                <a:latin typeface="APL385 Unicode" panose="020B0709000202000203" pitchFamily="49" charset="0"/>
-              </a:rPr>
-            </a:br>
-            <a:r>
-              <a:rPr lang="en-GB" dirty="0">
-                <a:solidFill>
-                  <a:schemeClr val="tx1">
-                    <a:lumMod val="95000"/>
-                    <a:lumOff val="5000"/>
-                  </a:schemeClr>
-                </a:solidFill>
-                <a:latin typeface="APL385 Unicode" panose="020B0709000202000203" pitchFamily="49" charset="0"/>
-              </a:rPr>
-              <a:t>    expression</a:t>
-            </a:r>
-            <a:br>
-              <a:rPr lang="en-GB" dirty="0">
-                <a:solidFill>
-                  <a:schemeClr val="tx1">
-                    <a:lumMod val="95000"/>
-                    <a:lumOff val="5000"/>
-                  </a:schemeClr>
-                </a:solidFill>
-                <a:latin typeface="APL385 Unicode" panose="020B0709000202000203" pitchFamily="49" charset="0"/>
-              </a:rPr>
-            </a:br>
-            <a:r>
-              <a:rPr lang="en-GB" dirty="0">
-                <a:solidFill>
-                  <a:schemeClr val="tx1">
-                    <a:lumMod val="95000"/>
-                    <a:lumOff val="5000"/>
-                  </a:schemeClr>
-                </a:solidFill>
-                <a:latin typeface="APL385 Unicode" panose="020B0709000202000203" pitchFamily="49" charset="0"/>
-              </a:rPr>
-              <a:t>:</a:t>
-            </a:r>
-            <a:r>
-              <a:rPr lang="en-GB" dirty="0" err="1">
-                <a:solidFill>
-                  <a:schemeClr val="tx1">
-                    <a:lumMod val="95000"/>
-                    <a:lumOff val="5000"/>
-                  </a:schemeClr>
-                </a:solidFill>
-                <a:latin typeface="APL385 Unicode" panose="020B0709000202000203" pitchFamily="49" charset="0"/>
-              </a:rPr>
-              <a:t>EndIf</a:t>
-            </a:r>
-            <a:endParaRPr lang="en-GB" dirty="0">
-              <a:solidFill>
-                <a:schemeClr val="tx1">
-                  <a:lumMod val="95000"/>
-                  <a:lumOff val="5000"/>
-                </a:schemeClr>
-              </a:solidFill>
-              <a:latin typeface="APL385 Unicode" panose="020B0709000202000203" pitchFamily="49" charset="0"/>
-            </a:endParaRPr>
-          </a:p>
-          <a:p>
-            <a:endParaRPr lang="en-GB" dirty="0">
-              <a:solidFill>
-                <a:schemeClr val="tx1">
-                  <a:lumMod val="95000"/>
-                  <a:lumOff val="5000"/>
-                </a:schemeClr>
-              </a:solidFill>
-              <a:latin typeface="APL385 Unicode" panose="020B0709000202000203" pitchFamily="49" charset="0"/>
-            </a:endParaRPr>
-          </a:p>
-          <a:p>
-            <a:r>
-              <a:rPr lang="en-GB" dirty="0">
-                <a:solidFill>
-                  <a:schemeClr val="tx1">
-                    <a:lumMod val="95000"/>
-                    <a:lumOff val="5000"/>
-                  </a:schemeClr>
-                </a:solidFill>
-              </a:rPr>
-              <a:t>DO NOT remove the diamond, you will BREAK the code!</a:t>
-            </a:r>
+              <a:t>A label is a local variable which is automatically assigned the value of the line it appears on.</a:t>
+            </a:r>
+            <a:endParaRPr lang="en-GB" dirty="0"/>
           </a:p>
         </p:txBody>
       </p:sp>
@@ -13636,7 +13509,7 @@
           <p:cNvPr id="3" name="Title 2">
             <a:extLst>
               <a:ext uri="{FF2B5EF4-FFF2-40B4-BE49-F238E27FC236}">
-                <a16:creationId xmlns:a16="http://schemas.microsoft.com/office/drawing/2014/main" id="{933F36ED-92F7-AA30-E9BA-9D090F297D94}"/>
+                <a16:creationId xmlns:a16="http://schemas.microsoft.com/office/drawing/2014/main" id="{C84A4E6B-2419-AA5C-F2D3-4D58405A8204}"/>
               </a:ext>
             </a:extLst>
           </p:cNvPr>
@@ -13664,7 +13537,7 @@
           <p:cNvPr id="4" name="Media Placeholder 3">
             <a:extLst>
               <a:ext uri="{FF2B5EF4-FFF2-40B4-BE49-F238E27FC236}">
-                <a16:creationId xmlns:a16="http://schemas.microsoft.com/office/drawing/2014/main" id="{96DCEB9B-0668-ED9A-F07E-6896304FC2BE}"/>
+                <a16:creationId xmlns:a16="http://schemas.microsoft.com/office/drawing/2014/main" id="{DEC375DD-9219-3C4D-C6F3-AB3B0B6AE899}"/>
               </a:ext>
             </a:extLst>
           </p:cNvPr>
@@ -13687,7 +13560,7 @@
     </p:spTree>
     <p:extLst>
       <p:ext uri="{BB962C8B-B14F-4D97-AF65-F5344CB8AC3E}">
-        <p14:creationId xmlns:p14="http://schemas.microsoft.com/office/powerpoint/2010/main" val="3860118664"/>
+        <p14:creationId xmlns:p14="http://schemas.microsoft.com/office/powerpoint/2010/main" val="4167795311"/>
       </p:ext>
     </p:extLst>
   </p:cSld>
@@ -14053,191 +13926,6 @@
   <p:cSld>
     <p:spTree>
       <p:nvGrpSpPr>
-        <p:cNvPr id="1" name=""/>
-        <p:cNvGrpSpPr/>
-        <p:nvPr/>
-      </p:nvGrpSpPr>
-      <p:grpSpPr>
-        <a:xfrm>
-          <a:off x="0" y="0"/>
-          <a:ext cx="0" cy="0"/>
-          <a:chOff x="0" y="0"/>
-          <a:chExt cx="0" cy="0"/>
-        </a:xfrm>
-      </p:grpSpPr>
-      <p:sp>
-        <p:nvSpPr>
-          <p:cNvPr id="2" name="Content Placeholder 1">
-            <a:extLst>
-              <a:ext uri="{FF2B5EF4-FFF2-40B4-BE49-F238E27FC236}">
-                <a16:creationId xmlns:a16="http://schemas.microsoft.com/office/drawing/2014/main" id="{14C4AC2A-5FC8-C5A6-E83E-0B8705E3C84F}"/>
-              </a:ext>
-            </a:extLst>
-          </p:cNvPr>
-          <p:cNvSpPr>
-            <a:spLocks noGrp="1"/>
-          </p:cNvSpPr>
-          <p:nvPr>
-            <p:ph idx="1"/>
-          </p:nvPr>
-        </p:nvSpPr>
-        <p:spPr/>
-        <p:txBody>
-          <a:bodyPr/>
-          <a:lstStyle/>
-          <a:p>
-            <a:pPr marL="0" indent="0">
-              <a:buNone/>
-            </a:pPr>
-            <a:r>
-              <a:rPr lang="en-GB" dirty="0"/>
-              <a:t>A label appears at the start of a line, followed by a colon:</a:t>
-            </a:r>
-          </a:p>
-          <a:p>
-            <a:pPr marL="0" indent="0">
-              <a:buNone/>
-            </a:pPr>
-            <a:r>
-              <a:rPr lang="en-GB" b="1" dirty="0">
-                <a:solidFill>
-                  <a:schemeClr val="accent3">
-                    <a:lumMod val="50000"/>
-                  </a:schemeClr>
-                </a:solidFill>
-                <a:latin typeface="APL385 Unicode" panose="020B0709000202000203" pitchFamily="49" charset="0"/>
-              </a:rPr>
-              <a:t> →Condition/Lab1</a:t>
-            </a:r>
-          </a:p>
-          <a:p>
-            <a:pPr marL="0" indent="0">
-              <a:buNone/>
-            </a:pPr>
-            <a:r>
-              <a:rPr lang="en-GB" b="1" dirty="0">
-                <a:solidFill>
-                  <a:schemeClr val="accent3">
-                    <a:lumMod val="50000"/>
-                  </a:schemeClr>
-                </a:solidFill>
-                <a:latin typeface="APL385 Unicode" panose="020B0709000202000203" pitchFamily="49" charset="0"/>
-              </a:rPr>
-              <a:t>    …</a:t>
-            </a:r>
-          </a:p>
-          <a:p>
-            <a:pPr marL="0" indent="0">
-              <a:buNone/>
-            </a:pPr>
-            <a:r>
-              <a:rPr lang="en-GB" b="1" dirty="0">
-                <a:solidFill>
-                  <a:srgbClr val="C00000"/>
-                </a:solidFill>
-                <a:latin typeface="APL385 Unicode" panose="020B0709000202000203" pitchFamily="49" charset="0"/>
-              </a:rPr>
-              <a:t> Lab1:</a:t>
-            </a:r>
-            <a:endParaRPr lang="en-GB" dirty="0">
-              <a:solidFill>
-                <a:schemeClr val="tx1">
-                  <a:lumMod val="95000"/>
-                  <a:lumOff val="5000"/>
-                </a:schemeClr>
-              </a:solidFill>
-            </a:endParaRPr>
-          </a:p>
-          <a:p>
-            <a:pPr marL="0" indent="0">
-              <a:buNone/>
-            </a:pPr>
-            <a:r>
-              <a:rPr lang="en-GB" dirty="0">
-                <a:solidFill>
-                  <a:schemeClr val="tx1">
-                    <a:lumMod val="95000"/>
-                    <a:lumOff val="5000"/>
-                  </a:schemeClr>
-                </a:solidFill>
-              </a:rPr>
-              <a:t>A label is a local variable which is automatically assigned the value of the line it appears on.</a:t>
-            </a:r>
-            <a:endParaRPr lang="en-GB" dirty="0"/>
-          </a:p>
-        </p:txBody>
-      </p:sp>
-      <p:sp>
-        <p:nvSpPr>
-          <p:cNvPr id="3" name="Title 2">
-            <a:extLst>
-              <a:ext uri="{FF2B5EF4-FFF2-40B4-BE49-F238E27FC236}">
-                <a16:creationId xmlns:a16="http://schemas.microsoft.com/office/drawing/2014/main" id="{C84A4E6B-2419-AA5C-F2D3-4D58405A8204}"/>
-              </a:ext>
-            </a:extLst>
-          </p:cNvPr>
-          <p:cNvSpPr>
-            <a:spLocks noGrp="1"/>
-          </p:cNvSpPr>
-          <p:nvPr>
-            <p:ph type="title"/>
-          </p:nvPr>
-        </p:nvSpPr>
-        <p:spPr/>
-        <p:txBody>
-          <a:bodyPr/>
-          <a:lstStyle/>
-          <a:p>
-            <a:r>
-              <a:rPr lang="en-GB" dirty="0"/>
-              <a:t>Branching</a:t>
-            </a:r>
-          </a:p>
-        </p:txBody>
-      </p:sp>
-      <p:sp>
-        <p:nvSpPr>
-          <p:cNvPr id="4" name="Media Placeholder 3">
-            <a:extLst>
-              <a:ext uri="{FF2B5EF4-FFF2-40B4-BE49-F238E27FC236}">
-                <a16:creationId xmlns:a16="http://schemas.microsoft.com/office/drawing/2014/main" id="{DEC375DD-9219-3C4D-C6F3-AB3B0B6AE899}"/>
-              </a:ext>
-            </a:extLst>
-          </p:cNvPr>
-          <p:cNvSpPr>
-            <a:spLocks noGrp="1"/>
-          </p:cNvSpPr>
-          <p:nvPr>
-            <p:ph type="media" sz="quarter" idx="11"/>
-          </p:nvPr>
-        </p:nvSpPr>
-        <p:spPr/>
-        <p:txBody>
-          <a:bodyPr/>
-          <a:lstStyle/>
-          <a:p>
-            <a:endParaRPr lang="en-GB"/>
-          </a:p>
-        </p:txBody>
-      </p:sp>
-    </p:spTree>
-    <p:extLst>
-      <p:ext uri="{BB962C8B-B14F-4D97-AF65-F5344CB8AC3E}">
-        <p14:creationId xmlns:p14="http://schemas.microsoft.com/office/powerpoint/2010/main" val="4167795311"/>
-      </p:ext>
-    </p:extLst>
-  </p:cSld>
-  <p:clrMapOvr>
-    <a:masterClrMapping/>
-  </p:clrMapOvr>
-</p:sld>
-</file>
-
-<file path=ppt/slides/slide43.xml><?xml version="1.0" encoding="utf-8"?>
-<p:sld xmlns:a="http://schemas.openxmlformats.org/drawingml/2006/main" xmlns:r="http://schemas.openxmlformats.org/officeDocument/2006/relationships" xmlns:p="http://schemas.openxmlformats.org/presentationml/2006/main">
-  <p:cSld>
-    <p:spTree>
-      <p:nvGrpSpPr>
         <p:cNvPr id="1" name="">
           <a:extLst>
             <a:ext uri="{FF2B5EF4-FFF2-40B4-BE49-F238E27FC236}">
@@ -14425,7 +14113,7 @@
 </p:sld>
 </file>
 
-<file path=ppt/slides/slide44.xml><?xml version="1.0" encoding="utf-8"?>
+<file path=ppt/slides/slide43.xml><?xml version="1.0" encoding="utf-8"?>
 <p:sld xmlns:a="http://schemas.openxmlformats.org/drawingml/2006/main" xmlns:r="http://schemas.openxmlformats.org/officeDocument/2006/relationships" xmlns:p="http://schemas.openxmlformats.org/presentationml/2006/main">
   <p:cSld>
     <p:spTree>
@@ -14820,7 +14508,7 @@
 </p:sld>
 </file>
 
-<file path=ppt/slides/slide45.xml><?xml version="1.0" encoding="utf-8"?>
+<file path=ppt/slides/slide44.xml><?xml version="1.0" encoding="utf-8"?>
 <p:sld xmlns:a="http://schemas.openxmlformats.org/drawingml/2006/main" xmlns:r="http://schemas.openxmlformats.org/officeDocument/2006/relationships" xmlns:p="http://schemas.openxmlformats.org/presentationml/2006/main">
   <p:cSld>
     <p:spTree>
@@ -15278,6 +14966,174 @@
 </p:sld>
 </file>
 
+<file path=ppt/slides/slide45.xml><?xml version="1.0" encoding="utf-8"?>
+<p:sld xmlns:a="http://schemas.openxmlformats.org/drawingml/2006/main" xmlns:r="http://schemas.openxmlformats.org/officeDocument/2006/relationships" xmlns:p="http://schemas.openxmlformats.org/presentationml/2006/main">
+  <p:cSld>
+    <p:spTree>
+      <p:nvGrpSpPr>
+        <p:cNvPr id="1" name=""/>
+        <p:cNvGrpSpPr/>
+        <p:nvPr/>
+      </p:nvGrpSpPr>
+      <p:grpSpPr>
+        <a:xfrm>
+          <a:off x="0" y="0"/>
+          <a:ext cx="0" cy="0"/>
+          <a:chOff x="0" y="0"/>
+          <a:chExt cx="0" cy="0"/>
+        </a:xfrm>
+      </p:grpSpPr>
+      <p:sp>
+        <p:nvSpPr>
+          <p:cNvPr id="2" name="Content Placeholder 1">
+            <a:extLst>
+              <a:ext uri="{FF2B5EF4-FFF2-40B4-BE49-F238E27FC236}">
+                <a16:creationId xmlns:a16="http://schemas.microsoft.com/office/drawing/2014/main" id="{BCCAA18E-E850-AD1D-74AC-DB958B064918}"/>
+              </a:ext>
+            </a:extLst>
+          </p:cNvPr>
+          <p:cNvSpPr>
+            <a:spLocks noGrp="1"/>
+          </p:cNvSpPr>
+          <p:nvPr>
+            <p:ph idx="1"/>
+          </p:nvPr>
+        </p:nvSpPr>
+        <p:spPr/>
+        <p:txBody>
+          <a:bodyPr>
+            <a:normAutofit fontScale="92500"/>
+          </a:bodyPr>
+          <a:lstStyle/>
+          <a:p>
+            <a:pPr marL="0" indent="0">
+              <a:buNone/>
+            </a:pPr>
+            <a:r>
+              <a:rPr lang="da-DK" dirty="0"/>
+              <a:t>dfns intend to support declarative programming, without loops.</a:t>
+            </a:r>
+            <a:endParaRPr lang="en-GB" dirty="0"/>
+          </a:p>
+          <a:p>
+            <a:pPr marL="0" indent="0">
+              <a:buNone/>
+            </a:pPr>
+            <a:r>
+              <a:rPr lang="da-DK" dirty="0"/>
+              <a:t>A dfn terminates when a condition is met.</a:t>
+            </a:r>
+          </a:p>
+          <a:p>
+            <a:pPr marL="0" indent="0">
+              <a:buNone/>
+            </a:pPr>
+            <a:r>
+              <a:rPr lang="da-DK" dirty="0"/>
+              <a:t>The only loop construct allowed is recursion.</a:t>
+            </a:r>
+          </a:p>
+          <a:p>
+            <a:pPr marL="0" indent="0">
+              <a:buNone/>
+            </a:pPr>
+            <a:endParaRPr lang="en-GB" dirty="0"/>
+          </a:p>
+          <a:p>
+            <a:pPr marL="0" indent="0">
+              <a:buNone/>
+            </a:pPr>
+            <a:r>
+              <a:rPr lang="da-DK" dirty="0"/>
+              <a:t>F</a:t>
+            </a:r>
+            <a:r>
+              <a:rPr lang="en-GB" dirty="0"/>
+              <a:t>or geeks in the room: </a:t>
+            </a:r>
+          </a:p>
+          <a:p>
+            <a:pPr marL="0" indent="0">
+              <a:buNone/>
+            </a:pPr>
+            <a:r>
+              <a:rPr lang="en-GB" dirty="0"/>
+              <a:t>	Tail recursion *is* optimised.</a:t>
+            </a:r>
+          </a:p>
+        </p:txBody>
+      </p:sp>
+      <p:sp>
+        <p:nvSpPr>
+          <p:cNvPr id="3" name="Title 2">
+            <a:extLst>
+              <a:ext uri="{FF2B5EF4-FFF2-40B4-BE49-F238E27FC236}">
+                <a16:creationId xmlns:a16="http://schemas.microsoft.com/office/drawing/2014/main" id="{83B5E1F0-27B3-3A6A-4434-96A8DA7EC8E3}"/>
+              </a:ext>
+            </a:extLst>
+          </p:cNvPr>
+          <p:cNvSpPr>
+            <a:spLocks noGrp="1"/>
+          </p:cNvSpPr>
+          <p:nvPr>
+            <p:ph type="title"/>
+          </p:nvPr>
+        </p:nvSpPr>
+        <p:spPr/>
+        <p:txBody>
+          <a:bodyPr/>
+          <a:lstStyle/>
+          <a:p>
+            <a:r>
+              <a:rPr lang="en-GB" dirty="0"/>
+              <a:t>Flow in </a:t>
+            </a:r>
+            <a:r>
+              <a:rPr lang="en-GB" dirty="0" err="1"/>
+              <a:t>dfns</a:t>
+            </a:r>
+            <a:endParaRPr lang="en-GB" dirty="0"/>
+          </a:p>
+        </p:txBody>
+      </p:sp>
+      <p:sp>
+        <p:nvSpPr>
+          <p:cNvPr id="4" name="Media Placeholder 3">
+            <a:extLst>
+              <a:ext uri="{FF2B5EF4-FFF2-40B4-BE49-F238E27FC236}">
+                <a16:creationId xmlns:a16="http://schemas.microsoft.com/office/drawing/2014/main" id="{2FEF5900-B894-6F00-7159-650F4AE8425F}"/>
+              </a:ext>
+            </a:extLst>
+          </p:cNvPr>
+          <p:cNvSpPr>
+            <a:spLocks noGrp="1"/>
+          </p:cNvSpPr>
+          <p:nvPr>
+            <p:ph type="media" sz="quarter" idx="11"/>
+          </p:nvPr>
+        </p:nvSpPr>
+        <p:spPr/>
+        <p:txBody>
+          <a:bodyPr/>
+          <a:lstStyle/>
+          <a:p>
+            <a:endParaRPr lang="en-GB"/>
+          </a:p>
+        </p:txBody>
+      </p:sp>
+    </p:spTree>
+    <p:extLst>
+      <p:ext uri="{BB962C8B-B14F-4D97-AF65-F5344CB8AC3E}">
+        <p14:creationId xmlns:p14="http://schemas.microsoft.com/office/powerpoint/2010/main" val="2324822881"/>
+      </p:ext>
+    </p:extLst>
+  </p:cSld>
+  <p:clrMapOvr>
+    <a:masterClrMapping/>
+  </p:clrMapOvr>
+</p:sld>
+</file>
+
 <file path=ppt/slides/slide46.xml><?xml version="1.0" encoding="utf-8"?>
 <p:sld xmlns:a="http://schemas.openxmlformats.org/drawingml/2006/main" xmlns:r="http://schemas.openxmlformats.org/officeDocument/2006/relationships" xmlns:p="http://schemas.openxmlformats.org/presentationml/2006/main">
   <p:cSld>
@@ -15300,7 +15156,7 @@
           <p:cNvPr id="2" name="Content Placeholder 1">
             <a:extLst>
               <a:ext uri="{FF2B5EF4-FFF2-40B4-BE49-F238E27FC236}">
-                <a16:creationId xmlns:a16="http://schemas.microsoft.com/office/drawing/2014/main" id="{BCCAA18E-E850-AD1D-74AC-DB958B064918}"/>
+                <a16:creationId xmlns:a16="http://schemas.microsoft.com/office/drawing/2014/main" id="{4E0A04A4-3166-D692-3626-13B7D4BC1D3D}"/>
               </a:ext>
             </a:extLst>
           </p:cNvPr>
@@ -15314,7 +15170,7 @@
         <p:spPr/>
         <p:txBody>
           <a:bodyPr>
-            <a:normAutofit fontScale="92500"/>
+            <a:normAutofit fontScale="85000" lnSpcReduction="20000"/>
           </a:bodyPr>
           <a:lstStyle/>
           <a:p>
@@ -15322,18 +15178,64 @@
               <a:buNone/>
             </a:pPr>
             <a:r>
-              <a:rPr lang="da-DK" dirty="0"/>
-              <a:t>dfns intend to support declarative programming, without loops.</a:t>
-            </a:r>
-            <a:endParaRPr lang="en-GB" dirty="0"/>
+              <a:rPr lang="en-GB" dirty="0"/>
+              <a:t>A </a:t>
+            </a:r>
+            <a:r>
+              <a:rPr lang="en-GB" dirty="0" err="1"/>
+              <a:t>dfn</a:t>
+            </a:r>
+            <a:r>
+              <a:rPr lang="en-GB" dirty="0"/>
+              <a:t> line containing a colon (</a:t>
+            </a:r>
+            <a:r>
+              <a:rPr lang="en-GB" dirty="0">
+                <a:solidFill>
+                  <a:srgbClr val="FF6600"/>
+                </a:solidFill>
+                <a:latin typeface="APL385 Unicode" panose="020B0709000202000203" pitchFamily="49" charset="0"/>
+                <a:sym typeface="Wingdings" panose="05000000000000000000" pitchFamily="2" charset="2"/>
+              </a:rPr>
+              <a:t>:</a:t>
+            </a:r>
+            <a:r>
+              <a:rPr lang="en-GB" dirty="0">
+                <a:sym typeface="Wingdings" panose="05000000000000000000" pitchFamily="2" charset="2"/>
+              </a:rPr>
+              <a:t>)</a:t>
+            </a:r>
+            <a:r>
+              <a:rPr lang="en-GB" dirty="0"/>
+              <a:t> is a </a:t>
+            </a:r>
+            <a:r>
+              <a:rPr lang="en-GB" b="1" i="1" dirty="0"/>
+              <a:t>guard</a:t>
+            </a:r>
+            <a:r>
+              <a:rPr lang="en-GB" dirty="0"/>
+              <a:t>.</a:t>
+            </a:r>
           </a:p>
           <a:p>
             <a:pPr marL="0" indent="0">
               <a:buNone/>
             </a:pPr>
             <a:r>
-              <a:rPr lang="da-DK" dirty="0"/>
-              <a:t>A dfn terminates when a condition is met.</a:t>
+              <a:rPr lang="en-GB" dirty="0"/>
+              <a:t>On the left is a condition, like </a:t>
+            </a:r>
+            <a:r>
+              <a:rPr lang="en-GB" dirty="0">
+                <a:solidFill>
+                  <a:schemeClr val="accent3">
+                    <a:lumMod val="50000"/>
+                  </a:schemeClr>
+                </a:solidFill>
+                <a:latin typeface="APL385 Unicode" panose="020B0709000202000203" pitchFamily="49" charset="0"/>
+              </a:rPr>
+              <a:t>⍵&gt;0</a:t>
             </a:r>
           </a:p>
           <a:p>
@@ -15342,14 +15244,14 @@
             </a:pPr>
             <a:r>
               <a:rPr lang="da-DK" dirty="0"/>
-              <a:t>The only loop construct allowed is recursion.</a:t>
+              <a:t>If satisfied, the result of the function is computed using the expression on the right.</a:t>
             </a:r>
           </a:p>
           <a:p>
             <a:pPr marL="0" indent="0">
               <a:buNone/>
             </a:pPr>
-            <a:endParaRPr lang="en-GB" dirty="0"/>
+            <a:endParaRPr lang="da-DK" dirty="0"/>
           </a:p>
           <a:p>
             <a:pPr marL="0" indent="0">
@@ -15357,20 +15259,28 @@
             </a:pPr>
             <a:r>
               <a:rPr lang="da-DK" dirty="0"/>
-              <a:t>F</a:t>
-            </a:r>
-            <a:r>
-              <a:rPr lang="en-GB" dirty="0"/>
-              <a:t>or geeks in the room: </a:t>
-            </a:r>
-          </a:p>
-          <a:p>
-            <a:pPr marL="0" indent="0">
-              <a:buNone/>
-            </a:pPr>
-            <a:r>
-              <a:rPr lang="en-GB" dirty="0"/>
-              <a:t>	Tail recursion *is* optimised.</a:t>
+              <a:t>Otherwise, the first line</a:t>
+            </a:r>
+            <a:br>
+              <a:rPr lang="da-DK" dirty="0"/>
+            </a:br>
+            <a:r>
+              <a:rPr lang="da-DK" dirty="0"/>
+              <a:t>which does not do an </a:t>
+            </a:r>
+            <a:br>
+              <a:rPr lang="da-DK" dirty="0"/>
+            </a:br>
+            <a:r>
+              <a:rPr lang="da-DK" dirty="0"/>
+              <a:t>assignment provides </a:t>
+            </a:r>
+            <a:br>
+              <a:rPr lang="da-DK" dirty="0"/>
+            </a:br>
+            <a:r>
+              <a:rPr lang="da-DK" dirty="0"/>
+              <a:t>the result.</a:t>
             </a:r>
           </a:p>
         </p:txBody>
@@ -15380,7 +15290,7 @@
           <p:cNvPr id="3" name="Title 2">
             <a:extLst>
               <a:ext uri="{FF2B5EF4-FFF2-40B4-BE49-F238E27FC236}">
-                <a16:creationId xmlns:a16="http://schemas.microsoft.com/office/drawing/2014/main" id="{83B5E1F0-27B3-3A6A-4434-96A8DA7EC8E3}"/>
+                <a16:creationId xmlns:a16="http://schemas.microsoft.com/office/drawing/2014/main" id="{673FB924-52A3-0468-25B5-A55063EA5D11}"/>
               </a:ext>
             </a:extLst>
           </p:cNvPr>
@@ -15397,14 +15307,21 @@
           <a:lstStyle/>
           <a:p>
             <a:r>
-              <a:rPr lang="en-GB" dirty="0"/>
-              <a:t>Flow in </a:t>
-            </a:r>
-            <a:r>
               <a:rPr lang="en-GB" dirty="0" err="1"/>
-              <a:t>dfns</a:t>
-            </a:r>
-            <a:endParaRPr lang="en-GB" dirty="0"/>
+              <a:t>dfn</a:t>
+            </a:r>
+            <a:r>
+              <a:rPr lang="en-GB" dirty="0"/>
+              <a:t> </a:t>
+            </a:r>
+            <a:r>
+              <a:rPr lang="en-GB" b="1" i="1" dirty="0">
+                <a:solidFill>
+                  <a:srgbClr val="FF6600"/>
+                </a:solidFill>
+              </a:rPr>
+              <a:t>guards</a:t>
+            </a:r>
           </a:p>
         </p:txBody>
       </p:sp>
@@ -15413,7 +15330,7 @@
           <p:cNvPr id="4" name="Media Placeholder 3">
             <a:extLst>
               <a:ext uri="{FF2B5EF4-FFF2-40B4-BE49-F238E27FC236}">
-                <a16:creationId xmlns:a16="http://schemas.microsoft.com/office/drawing/2014/main" id="{2FEF5900-B894-6F00-7159-650F4AE8425F}"/>
+                <a16:creationId xmlns:a16="http://schemas.microsoft.com/office/drawing/2014/main" id="{51EDD8FC-EF59-7208-434E-D9F2E5837B6C}"/>
               </a:ext>
             </a:extLst>
           </p:cNvPr>
@@ -15433,10 +15350,107 @@
           </a:p>
         </p:txBody>
       </p:sp>
+      <p:sp>
+        <p:nvSpPr>
+          <p:cNvPr id="5" name="TextBox 4">
+            <a:extLst>
+              <a:ext uri="{FF2B5EF4-FFF2-40B4-BE49-F238E27FC236}">
+                <a16:creationId xmlns:a16="http://schemas.microsoft.com/office/drawing/2014/main" id="{F8092963-59EE-0F97-87C0-CEF570ADB115}"/>
+              </a:ext>
+            </a:extLst>
+          </p:cNvPr>
+          <p:cNvSpPr txBox="1"/>
+          <p:nvPr/>
+        </p:nvSpPr>
+        <p:spPr>
+          <a:xfrm>
+            <a:off x="4547005" y="2625757"/>
+            <a:ext cx="3265356" cy="1938992"/>
+          </a:xfrm>
+          <a:prstGeom prst="rect">
+            <a:avLst/>
+          </a:prstGeom>
+          <a:solidFill>
+            <a:schemeClr val="tx1"/>
+          </a:solidFill>
+          <a:ln w="38100">
+            <a:solidFill>
+              <a:srgbClr val="FF6600"/>
+            </a:solidFill>
+          </a:ln>
+        </p:spPr>
+        <p:txBody>
+          <a:bodyPr wrap="square" numCol="1" rtlCol="0">
+            <a:spAutoFit/>
+          </a:bodyPr>
+          <a:lstStyle/>
+          <a:p>
+            <a:r>
+              <a:rPr lang="en-GB" sz="2400" dirty="0">
+                <a:solidFill>
+                  <a:schemeClr val="bg1"/>
+                </a:solidFill>
+                <a:latin typeface="APL385 Unicode" panose="020B0709000202000203" pitchFamily="49" charset="0"/>
+              </a:rPr>
+              <a:t>{ </a:t>
+            </a:r>
+            <a:br>
+              <a:rPr lang="en-GB" sz="2400" dirty="0">
+                <a:solidFill>
+                  <a:schemeClr val="bg1"/>
+                </a:solidFill>
+                <a:latin typeface="APL385 Unicode" panose="020B0709000202000203" pitchFamily="49" charset="0"/>
+              </a:rPr>
+            </a:br>
+            <a:r>
+              <a:rPr lang="en-GB" sz="2400" dirty="0">
+                <a:solidFill>
+                  <a:schemeClr val="bg1"/>
+                </a:solidFill>
+                <a:latin typeface="APL385 Unicode" panose="020B0709000202000203" pitchFamily="49" charset="0"/>
+              </a:rPr>
+              <a:t> ⍵&gt;0:'positive'</a:t>
+            </a:r>
+          </a:p>
+          <a:p>
+            <a:r>
+              <a:rPr lang="en-GB" sz="2400" dirty="0">
+                <a:solidFill>
+                  <a:schemeClr val="bg1"/>
+                </a:solidFill>
+                <a:latin typeface="APL385 Unicode" panose="020B0709000202000203" pitchFamily="49" charset="0"/>
+              </a:rPr>
+              <a:t> ⍵&lt;0:'negative'</a:t>
+            </a:r>
+          </a:p>
+          <a:p>
+            <a:r>
+              <a:rPr lang="en-GB" sz="2400" dirty="0">
+                <a:solidFill>
+                  <a:schemeClr val="bg1"/>
+                </a:solidFill>
+                <a:latin typeface="APL385 Unicode" panose="020B0709000202000203" pitchFamily="49" charset="0"/>
+              </a:rPr>
+              <a:t> 'Zero'</a:t>
+            </a:r>
+          </a:p>
+          <a:p>
+            <a:r>
+              <a:rPr lang="en-GB" sz="2400" dirty="0">
+                <a:solidFill>
+                  <a:schemeClr val="bg1"/>
+                </a:solidFill>
+                <a:latin typeface="APL385 Unicode" panose="020B0709000202000203" pitchFamily="49" charset="0"/>
+              </a:rPr>
+              <a:t>}</a:t>
+            </a:r>
+          </a:p>
+        </p:txBody>
+      </p:sp>
     </p:spTree>
     <p:extLst>
       <p:ext uri="{BB962C8B-B14F-4D97-AF65-F5344CB8AC3E}">
-        <p14:creationId xmlns:p14="http://schemas.microsoft.com/office/powerpoint/2010/main" val="2324822881"/>
+        <p14:creationId xmlns:p14="http://schemas.microsoft.com/office/powerpoint/2010/main" val="3420728603"/>
       </p:ext>
     </p:extLst>
   </p:cSld>
@@ -15468,7 +15482,7 @@
           <p:cNvPr id="2" name="Content Placeholder 1">
             <a:extLst>
               <a:ext uri="{FF2B5EF4-FFF2-40B4-BE49-F238E27FC236}">
-                <a16:creationId xmlns:a16="http://schemas.microsoft.com/office/drawing/2014/main" id="{4E0A04A4-3166-D692-3626-13B7D4BC1D3D}"/>
+                <a16:creationId xmlns:a16="http://schemas.microsoft.com/office/drawing/2014/main" id="{F4C9FABD-80DD-3A50-088F-2A10DDD381D0}"/>
               </a:ext>
             </a:extLst>
           </p:cNvPr>
@@ -15481,9 +15495,7 @@
         </p:nvSpPr>
         <p:spPr/>
         <p:txBody>
-          <a:bodyPr>
-            <a:normAutofit fontScale="85000" lnSpcReduction="20000"/>
-          </a:bodyPr>
+          <a:bodyPr/>
           <a:lstStyle/>
           <a:p>
             <a:pPr marL="0" indent="0">
@@ -15491,43 +15503,17 @@
             </a:pPr>
             <a:r>
               <a:rPr lang="en-GB" dirty="0"/>
-              <a:t>A </a:t>
-            </a:r>
-            <a:r>
-              <a:rPr lang="en-GB" dirty="0" err="1"/>
-              <a:t>dfn</a:t>
-            </a:r>
-            <a:r>
-              <a:rPr lang="en-GB" dirty="0"/>
-              <a:t> line containing a colon (</a:t>
+              <a:t>The only possible loop is recursion. The </a:t>
             </a:r>
             <a:r>
               <a:rPr lang="en-GB" dirty="0">
-                <a:solidFill>
-                  <a:srgbClr val="FF6600"/>
-                </a:solidFill>
-                <a:latin typeface="APL385 Unicode" panose="020B0709000202000203" pitchFamily="49" charset="0"/>
-                <a:sym typeface="Wingdings" panose="05000000000000000000" pitchFamily="2" charset="2"/>
-              </a:rPr>
-              <a:t>:</a:t>
-            </a:r>
-            <a:r>
-              <a:rPr lang="en-GB" dirty="0">
-                <a:sym typeface="Wingdings" panose="05000000000000000000" pitchFamily="2" charset="2"/>
-              </a:rPr>
-              <a:t>)</a:t>
-            </a:r>
-            <a:r>
-              <a:rPr lang="en-GB" dirty="0"/>
-              <a:t> is a </a:t>
-            </a:r>
-            <a:r>
-              <a:rPr lang="en-GB" b="1" i="1" dirty="0"/>
-              <a:t>guard</a:t>
-            </a:r>
-            <a:r>
-              <a:rPr lang="en-GB" dirty="0"/>
-              <a:t>.</a:t>
+                <a:latin typeface="APL385 Unicode" panose="020B0709000202000203" pitchFamily="49" charset="0"/>
+              </a:rPr>
+              <a:t>∇</a:t>
+            </a:r>
+            <a:r>
+              <a:rPr lang="en-GB" dirty="0"/>
+              <a:t> symbol is a self-reference. </a:t>
             </a:r>
           </a:p>
           <a:p>
@@ -15535,65 +15521,31 @@
               <a:buNone/>
             </a:pPr>
             <a:r>
-              <a:rPr lang="en-GB" dirty="0"/>
-              <a:t>On the left is a condition, like </a:t>
-            </a:r>
-            <a:r>
-              <a:rPr lang="en-GB" dirty="0">
-                <a:solidFill>
-                  <a:schemeClr val="accent3">
-                    <a:lumMod val="50000"/>
-                  </a:schemeClr>
-                </a:solidFill>
-                <a:latin typeface="APL385 Unicode" panose="020B0709000202000203" pitchFamily="49" charset="0"/>
-              </a:rPr>
-              <a:t>⍵&gt;0</a:t>
+              <a:rPr lang="en-GB" sz="1500" dirty="0"/>
+              <a:t>(Thus, a </a:t>
+            </a:r>
+            <a:r>
+              <a:rPr lang="en-GB" sz="1500" dirty="0" err="1"/>
+              <a:t>dfn</a:t>
+            </a:r>
+            <a:r>
+              <a:rPr lang="en-GB" sz="1500" dirty="0"/>
+              <a:t> never needs to </a:t>
+            </a:r>
+            <a:r>
+              <a:rPr lang="en-GB" sz="1500"/>
+              <a:t>know its </a:t>
+            </a:r>
+            <a:r>
+              <a:rPr lang="en-GB" sz="1500" dirty="0"/>
+              <a:t>own name – or even have a name)</a:t>
             </a:r>
           </a:p>
           <a:p>
             <a:pPr marL="0" indent="0">
               <a:buNone/>
             </a:pPr>
-            <a:r>
-              <a:rPr lang="da-DK" dirty="0"/>
-              <a:t>If satisfied, the result of the function is computed using the expression on the right.</a:t>
-            </a:r>
-          </a:p>
-          <a:p>
-            <a:pPr marL="0" indent="0">
-              <a:buNone/>
-            </a:pPr>
-            <a:endParaRPr lang="da-DK" dirty="0"/>
-          </a:p>
-          <a:p>
-            <a:pPr marL="0" indent="0">
-              <a:buNone/>
-            </a:pPr>
-            <a:r>
-              <a:rPr lang="da-DK" dirty="0"/>
-              <a:t>Otherwise, the first line</a:t>
-            </a:r>
-            <a:br>
-              <a:rPr lang="da-DK" dirty="0"/>
-            </a:br>
-            <a:r>
-              <a:rPr lang="da-DK" dirty="0"/>
-              <a:t>which does not do an </a:t>
-            </a:r>
-            <a:br>
-              <a:rPr lang="da-DK" dirty="0"/>
-            </a:br>
-            <a:r>
-              <a:rPr lang="da-DK" dirty="0"/>
-              <a:t>assignment provides </a:t>
-            </a:r>
-            <a:br>
-              <a:rPr lang="da-DK" dirty="0"/>
-            </a:br>
-            <a:r>
-              <a:rPr lang="da-DK" dirty="0"/>
-              <a:t>the result.</a:t>
-            </a:r>
+            <a:endParaRPr lang="en-GB" dirty="0"/>
           </a:p>
         </p:txBody>
       </p:sp>
@@ -15602,7 +15554,7 @@
           <p:cNvPr id="3" name="Title 2">
             <a:extLst>
               <a:ext uri="{FF2B5EF4-FFF2-40B4-BE49-F238E27FC236}">
-                <a16:creationId xmlns:a16="http://schemas.microsoft.com/office/drawing/2014/main" id="{673FB924-52A3-0468-25B5-A55063EA5D11}"/>
+                <a16:creationId xmlns:a16="http://schemas.microsoft.com/office/drawing/2014/main" id="{3734B68D-0F44-797E-A37E-66BFE4EEAE36}"/>
               </a:ext>
             </a:extLst>
           </p:cNvPr>
@@ -15632,7 +15584,7 @@
                   <a:srgbClr val="FF6600"/>
                 </a:solidFill>
               </a:rPr>
-              <a:t>guards</a:t>
+              <a:t>recursion</a:t>
             </a:r>
           </a:p>
         </p:txBody>
@@ -15642,7 +15594,7 @@
           <p:cNvPr id="4" name="Media Placeholder 3">
             <a:extLst>
               <a:ext uri="{FF2B5EF4-FFF2-40B4-BE49-F238E27FC236}">
-                <a16:creationId xmlns:a16="http://schemas.microsoft.com/office/drawing/2014/main" id="{51EDD8FC-EF59-7208-434E-D9F2E5837B6C}"/>
+                <a16:creationId xmlns:a16="http://schemas.microsoft.com/office/drawing/2014/main" id="{48F67E54-9723-DD60-42F3-718AB505C2D6}"/>
               </a:ext>
             </a:extLst>
           </p:cNvPr>
@@ -15667,7 +15619,7 @@
           <p:cNvPr id="5" name="TextBox 4">
             <a:extLst>
               <a:ext uri="{FF2B5EF4-FFF2-40B4-BE49-F238E27FC236}">
-                <a16:creationId xmlns:a16="http://schemas.microsoft.com/office/drawing/2014/main" id="{F8092963-59EE-0F97-87C0-CEF570ADB115}"/>
+                <a16:creationId xmlns:a16="http://schemas.microsoft.com/office/drawing/2014/main" id="{5B0A0CCD-2124-871E-DC4D-A54E8234E5EB}"/>
               </a:ext>
             </a:extLst>
           </p:cNvPr>
@@ -15676,8 +15628,8 @@
         </p:nvSpPr>
         <p:spPr>
           <a:xfrm>
-            <a:off x="4547005" y="2625757"/>
-            <a:ext cx="3265356" cy="1938992"/>
+            <a:off x="1709682" y="2733768"/>
+            <a:ext cx="5849358" cy="1569660"/>
           </a:xfrm>
           <a:prstGeom prst="rect">
             <a:avLst/>
@@ -15704,7 +15656,7 @@
                 </a:solidFill>
                 <a:latin typeface="APL385 Unicode" panose="020B0709000202000203" pitchFamily="49" charset="0"/>
               </a:rPr>
-              <a:t>{ </a:t>
+              <a:t>factorial←{</a:t>
             </a:r>
             <a:br>
               <a:rPr lang="en-GB" sz="2400" dirty="0">
@@ -15721,7 +15673,7 @@
                 </a:solidFill>
                 <a:latin typeface="APL385 Unicode" panose="020B0709000202000203" pitchFamily="49" charset="0"/>
               </a:rPr>
-              <a:t> ⍵&gt;0:'positive'</a:t>
+              <a:t>  ⍵=0: 1</a:t>
             </a:r>
           </a:p>
           <a:p>
@@ -15732,18 +15684,7 @@
                 </a:solidFill>
                 <a:latin typeface="APL385 Unicode" panose="020B0709000202000203" pitchFamily="49" charset="0"/>
               </a:rPr>
-              <a:t> ⍵&lt;0:'negative'</a:t>
-            </a:r>
-          </a:p>
-          <a:p>
-            <a:r>
-              <a:rPr lang="en-GB" sz="2400" dirty="0">
-                <a:solidFill>
-                  <a:schemeClr val="bg1"/>
-                </a:solidFill>
-                <a:latin typeface="APL385 Unicode" panose="020B0709000202000203" pitchFamily="49" charset="0"/>
-              </a:rPr>
-              <a:t> 'Zero'</a:t>
+              <a:t>  ⍵ × ∇ ⍵-1   ⍝ call self(⍵-1)</a:t>
             </a:r>
           </a:p>
           <a:p>
@@ -15762,7 +15703,7 @@
     </p:spTree>
     <p:extLst>
       <p:ext uri="{BB962C8B-B14F-4D97-AF65-F5344CB8AC3E}">
-        <p14:creationId xmlns:p14="http://schemas.microsoft.com/office/powerpoint/2010/main" val="3420728603"/>
+        <p14:creationId xmlns:p14="http://schemas.microsoft.com/office/powerpoint/2010/main" val="3237066938"/>
       </p:ext>
     </p:extLst>
   </p:cSld>
@@ -15794,7 +15735,7 @@
           <p:cNvPr id="2" name="Content Placeholder 1">
             <a:extLst>
               <a:ext uri="{FF2B5EF4-FFF2-40B4-BE49-F238E27FC236}">
-                <a16:creationId xmlns:a16="http://schemas.microsoft.com/office/drawing/2014/main" id="{F4C9FABD-80DD-3A50-088F-2A10DDD381D0}"/>
+                <a16:creationId xmlns:a16="http://schemas.microsoft.com/office/drawing/2014/main" id="{15A8F58E-0B00-45AA-8356-66D63077C170}"/>
               </a:ext>
             </a:extLst>
           </p:cNvPr>
@@ -15807,7 +15748,9 @@
         </p:nvSpPr>
         <p:spPr/>
         <p:txBody>
-          <a:bodyPr/>
+          <a:bodyPr>
+            <a:normAutofit fontScale="85000" lnSpcReduction="20000"/>
+          </a:bodyPr>
           <a:lstStyle/>
           <a:p>
             <a:pPr marL="0" indent="0">
@@ -15815,49 +15758,255 @@
             </a:pPr>
             <a:r>
               <a:rPr lang="en-GB" dirty="0"/>
-              <a:t>The only possible loop is recursion. The </a:t>
-            </a:r>
-            <a:r>
-              <a:rPr lang="en-GB" dirty="0">
-                <a:latin typeface="APL385 Unicode" panose="020B0709000202000203" pitchFamily="49" charset="0"/>
-              </a:rPr>
-              <a:t>∇</a:t>
-            </a:r>
-            <a:r>
-              <a:rPr lang="en-GB" dirty="0"/>
-              <a:t> symbol is a self-reference. </a:t>
+              <a:t>An error guard is an error number followed by </a:t>
+            </a:r>
+            <a:r>
+              <a:rPr lang="en-GB" b="1" dirty="0">
+                <a:solidFill>
+                  <a:srgbClr val="FF0000"/>
+                </a:solidFill>
+                <a:latin typeface="APL385 Unicode" panose="020B0709000202000203" pitchFamily="49" charset="0"/>
+              </a:rPr>
+              <a:t>::</a:t>
             </a:r>
           </a:p>
           <a:p>
             <a:pPr marL="0" indent="0">
+              <a:spcAft>
+                <a:spcPts val="0"/>
+              </a:spcAft>
               <a:buNone/>
             </a:pPr>
             <a:r>
-              <a:rPr lang="en-GB" sz="1500" dirty="0"/>
-              <a:t>(Thus, a </a:t>
-            </a:r>
-            <a:r>
-              <a:rPr lang="en-GB" sz="1500" dirty="0" err="1"/>
-              <a:t>dfn</a:t>
-            </a:r>
-            <a:r>
-              <a:rPr lang="en-GB" sz="1500" dirty="0"/>
-              <a:t> never needs to </a:t>
-            </a:r>
-            <a:r>
-              <a:rPr lang="en-GB" sz="1500"/>
-              <a:t>know its </a:t>
-            </a:r>
-            <a:r>
-              <a:rPr lang="en-GB" sz="1500" dirty="0"/>
-              <a:t>own name – or even have a name)</a:t>
+              <a:rPr lang="en-GB" dirty="0">
+                <a:solidFill>
+                  <a:schemeClr val="accent3">
+                    <a:lumMod val="50000"/>
+                  </a:schemeClr>
+                </a:solidFill>
+                <a:latin typeface="APL385 Unicode" panose="020B0709000202000203" pitchFamily="49" charset="0"/>
+              </a:rPr>
+              <a:t>    </a:t>
+            </a:r>
+            <a:r>
+              <a:rPr lang="en-GB" dirty="0">
+                <a:solidFill>
+                  <a:srgbClr val="00B050"/>
+                </a:solidFill>
+                <a:latin typeface="APL385 Unicode" panose="020B0709000202000203" pitchFamily="49" charset="0"/>
+              </a:rPr>
+              <a:t>Div←{</a:t>
             </a:r>
           </a:p>
           <a:p>
             <a:pPr marL="0" indent="0">
+              <a:spcAft>
+                <a:spcPts val="0"/>
+              </a:spcAft>
               <a:buNone/>
             </a:pPr>
-            <a:endParaRPr lang="en-GB" dirty="0"/>
+            <a:r>
+              <a:rPr lang="en-GB" b="1" dirty="0">
+                <a:solidFill>
+                  <a:srgbClr val="00B050"/>
+                </a:solidFill>
+                <a:latin typeface="APL385 Unicode" panose="020B0709000202000203" pitchFamily="49" charset="0"/>
+              </a:rPr>
+              <a:t>        11</a:t>
+            </a:r>
+            <a:r>
+              <a:rPr lang="en-GB" b="1" dirty="0">
+                <a:solidFill>
+                  <a:srgbClr val="FF6600"/>
+                </a:solidFill>
+                <a:latin typeface="APL385 Unicode" panose="020B0709000202000203" pitchFamily="49" charset="0"/>
+              </a:rPr>
+              <a:t>::</a:t>
+            </a:r>
+            <a:r>
+              <a:rPr lang="en-GB" b="1" dirty="0">
+                <a:solidFill>
+                  <a:srgbClr val="00B050"/>
+                </a:solidFill>
+                <a:latin typeface="APL385 Unicode" panose="020B0709000202000203" pitchFamily="49" charset="0"/>
+              </a:rPr>
+              <a:t>'</a:t>
+            </a:r>
+            <a:r>
+              <a:rPr lang="en-GB" dirty="0">
+                <a:solidFill>
+                  <a:srgbClr val="00B050"/>
+                </a:solidFill>
+                <a:latin typeface="APL385 Unicode" panose="020B0709000202000203" pitchFamily="49" charset="0"/>
+              </a:rPr>
+              <a:t>Division by zero'</a:t>
+            </a:r>
+          </a:p>
+          <a:p>
+            <a:pPr marL="0" indent="0">
+              <a:spcAft>
+                <a:spcPts val="0"/>
+              </a:spcAft>
+              <a:buNone/>
+            </a:pPr>
+            <a:r>
+              <a:rPr lang="en-GB" dirty="0">
+                <a:solidFill>
+                  <a:srgbClr val="00B050"/>
+                </a:solidFill>
+                <a:latin typeface="APL385 Unicode" panose="020B0709000202000203" pitchFamily="49" charset="0"/>
+              </a:rPr>
+              <a:t>        ⍺÷⍵</a:t>
+            </a:r>
+          </a:p>
+          <a:p>
+            <a:pPr marL="0" indent="0">
+              <a:spcAft>
+                <a:spcPts val="0"/>
+              </a:spcAft>
+              <a:buNone/>
+            </a:pPr>
+            <a:r>
+              <a:rPr lang="en-GB" dirty="0">
+                <a:solidFill>
+                  <a:srgbClr val="00B050"/>
+                </a:solidFill>
+                <a:latin typeface="APL385 Unicode" panose="020B0709000202000203" pitchFamily="49" charset="0"/>
+              </a:rPr>
+              <a:t>    }</a:t>
+            </a:r>
+          </a:p>
+          <a:p>
+            <a:pPr marL="0" indent="0">
+              <a:spcAft>
+                <a:spcPts val="0"/>
+              </a:spcAft>
+              <a:buNone/>
+            </a:pPr>
+            <a:endParaRPr lang="en-GB" dirty="0">
+              <a:solidFill>
+                <a:schemeClr val="accent3">
+                  <a:lumMod val="50000"/>
+                </a:schemeClr>
+              </a:solidFill>
+              <a:latin typeface="APL385 Unicode" panose="020B0709000202000203" pitchFamily="49" charset="0"/>
+            </a:endParaRPr>
+          </a:p>
+          <a:p>
+            <a:pPr marL="0" indent="0">
+              <a:spcAft>
+                <a:spcPts val="0"/>
+              </a:spcAft>
+              <a:buNone/>
+            </a:pPr>
+            <a:r>
+              <a:rPr lang="en-GB" dirty="0">
+                <a:solidFill>
+                  <a:schemeClr val="accent3">
+                    <a:lumMod val="50000"/>
+                  </a:schemeClr>
+                </a:solidFill>
+                <a:latin typeface="APL385 Unicode" panose="020B0709000202000203" pitchFamily="49" charset="0"/>
+              </a:rPr>
+              <a:t>    </a:t>
+            </a:r>
+            <a:r>
+              <a:rPr lang="en-GB" dirty="0">
+                <a:solidFill>
+                  <a:srgbClr val="00B050"/>
+                </a:solidFill>
+                <a:latin typeface="APL385 Unicode" panose="020B0709000202000203" pitchFamily="49" charset="0"/>
+              </a:rPr>
+              <a:t>4 Div 2</a:t>
+            </a:r>
+          </a:p>
+          <a:p>
+            <a:pPr marL="0" indent="0">
+              <a:spcAft>
+                <a:spcPts val="0"/>
+              </a:spcAft>
+              <a:buNone/>
+            </a:pPr>
+            <a:r>
+              <a:rPr lang="en-GB" dirty="0">
+                <a:solidFill>
+                  <a:schemeClr val="accent3">
+                    <a:lumMod val="50000"/>
+                  </a:schemeClr>
+                </a:solidFill>
+                <a:latin typeface="APL385 Unicode" panose="020B0709000202000203" pitchFamily="49" charset="0"/>
+              </a:rPr>
+              <a:t>2</a:t>
+            </a:r>
+          </a:p>
+          <a:p>
+            <a:pPr marL="0" indent="0">
+              <a:spcAft>
+                <a:spcPts val="0"/>
+              </a:spcAft>
+              <a:buNone/>
+            </a:pPr>
+            <a:endParaRPr lang="en-GB" dirty="0">
+              <a:solidFill>
+                <a:schemeClr val="accent3">
+                  <a:lumMod val="50000"/>
+                </a:schemeClr>
+              </a:solidFill>
+              <a:latin typeface="APL385 Unicode" panose="020B0709000202000203" pitchFamily="49" charset="0"/>
+            </a:endParaRPr>
+          </a:p>
+          <a:p>
+            <a:pPr marL="0" indent="0">
+              <a:spcAft>
+                <a:spcPts val="0"/>
+              </a:spcAft>
+              <a:buNone/>
+            </a:pPr>
+            <a:r>
+              <a:rPr lang="en-GB" dirty="0">
+                <a:solidFill>
+                  <a:schemeClr val="accent3">
+                    <a:lumMod val="50000"/>
+                  </a:schemeClr>
+                </a:solidFill>
+                <a:latin typeface="APL385 Unicode" panose="020B0709000202000203" pitchFamily="49" charset="0"/>
+              </a:rPr>
+              <a:t>    </a:t>
+            </a:r>
+            <a:r>
+              <a:rPr lang="en-GB" dirty="0">
+                <a:solidFill>
+                  <a:srgbClr val="00B050"/>
+                </a:solidFill>
+                <a:latin typeface="APL385 Unicode" panose="020B0709000202000203" pitchFamily="49" charset="0"/>
+              </a:rPr>
+              <a:t>4 Div 0</a:t>
+            </a:r>
+          </a:p>
+          <a:p>
+            <a:pPr marL="0" indent="0">
+              <a:spcAft>
+                <a:spcPts val="0"/>
+              </a:spcAft>
+              <a:buNone/>
+            </a:pPr>
+            <a:r>
+              <a:rPr lang="en-GB" dirty="0">
+                <a:solidFill>
+                  <a:schemeClr val="accent3">
+                    <a:lumMod val="50000"/>
+                  </a:schemeClr>
+                </a:solidFill>
+                <a:latin typeface="APL385 Unicode" panose="020B0709000202000203" pitchFamily="49" charset="0"/>
+              </a:rPr>
+              <a:t>Division by zero</a:t>
+            </a:r>
+            <a:endParaRPr lang="en-GB" b="1" dirty="0">
+              <a:solidFill>
+                <a:srgbClr val="FF0000"/>
+              </a:solidFill>
+              <a:latin typeface="APL385 Unicode" panose="020B0709000202000203" pitchFamily="49" charset="0"/>
+            </a:endParaRPr>
           </a:p>
         </p:txBody>
       </p:sp>
@@ -15866,7 +16015,7 @@
           <p:cNvPr id="3" name="Title 2">
             <a:extLst>
               <a:ext uri="{FF2B5EF4-FFF2-40B4-BE49-F238E27FC236}">
-                <a16:creationId xmlns:a16="http://schemas.microsoft.com/office/drawing/2014/main" id="{3734B68D-0F44-797E-A37E-66BFE4EEAE36}"/>
+                <a16:creationId xmlns:a16="http://schemas.microsoft.com/office/drawing/2014/main" id="{927CCA16-3B19-C8C3-F400-CA50168E61D6}"/>
               </a:ext>
             </a:extLst>
           </p:cNvPr>
@@ -15896,7 +16045,7 @@
                   <a:srgbClr val="FF6600"/>
                 </a:solidFill>
               </a:rPr>
-              <a:t>recursion</a:t>
+              <a:t>error guards</a:t>
             </a:r>
           </a:p>
         </p:txBody>
@@ -15906,7 +16055,7 @@
           <p:cNvPr id="4" name="Media Placeholder 3">
             <a:extLst>
               <a:ext uri="{FF2B5EF4-FFF2-40B4-BE49-F238E27FC236}">
-                <a16:creationId xmlns:a16="http://schemas.microsoft.com/office/drawing/2014/main" id="{48F67E54-9723-DD60-42F3-718AB505C2D6}"/>
+                <a16:creationId xmlns:a16="http://schemas.microsoft.com/office/drawing/2014/main" id="{A0579A24-A886-E343-AFA2-05196C81FF8B}"/>
               </a:ext>
             </a:extLst>
           </p:cNvPr>
@@ -15926,96 +16075,10 @@
           </a:p>
         </p:txBody>
       </p:sp>
-      <p:sp>
-        <p:nvSpPr>
-          <p:cNvPr id="5" name="TextBox 4">
-            <a:extLst>
-              <a:ext uri="{FF2B5EF4-FFF2-40B4-BE49-F238E27FC236}">
-                <a16:creationId xmlns:a16="http://schemas.microsoft.com/office/drawing/2014/main" id="{5B0A0CCD-2124-871E-DC4D-A54E8234E5EB}"/>
-              </a:ext>
-            </a:extLst>
-          </p:cNvPr>
-          <p:cNvSpPr txBox="1"/>
-          <p:nvPr/>
-        </p:nvSpPr>
-        <p:spPr>
-          <a:xfrm>
-            <a:off x="1709682" y="2733768"/>
-            <a:ext cx="5849358" cy="1569660"/>
-          </a:xfrm>
-          <a:prstGeom prst="rect">
-            <a:avLst/>
-          </a:prstGeom>
-          <a:solidFill>
-            <a:schemeClr val="tx1"/>
-          </a:solidFill>
-          <a:ln w="38100">
-            <a:solidFill>
-              <a:srgbClr val="FF6600"/>
-            </a:solidFill>
-          </a:ln>
-        </p:spPr>
-        <p:txBody>
-          <a:bodyPr wrap="square" numCol="1" rtlCol="0">
-            <a:spAutoFit/>
-          </a:bodyPr>
-          <a:lstStyle/>
-          <a:p>
-            <a:r>
-              <a:rPr lang="en-GB" sz="2400" dirty="0">
-                <a:solidFill>
-                  <a:schemeClr val="bg1"/>
-                </a:solidFill>
-                <a:latin typeface="APL385 Unicode" panose="020B0709000202000203" pitchFamily="49" charset="0"/>
-              </a:rPr>
-              <a:t>factorial←{</a:t>
-            </a:r>
-            <a:br>
-              <a:rPr lang="en-GB" sz="2400" dirty="0">
-                <a:solidFill>
-                  <a:schemeClr val="bg1"/>
-                </a:solidFill>
-                <a:latin typeface="APL385 Unicode" panose="020B0709000202000203" pitchFamily="49" charset="0"/>
-              </a:rPr>
-            </a:br>
-            <a:r>
-              <a:rPr lang="en-GB" sz="2400" dirty="0">
-                <a:solidFill>
-                  <a:schemeClr val="bg1"/>
-                </a:solidFill>
-                <a:latin typeface="APL385 Unicode" panose="020B0709000202000203" pitchFamily="49" charset="0"/>
-              </a:rPr>
-              <a:t>  ⍵=0: 1</a:t>
-            </a:r>
-          </a:p>
-          <a:p>
-            <a:r>
-              <a:rPr lang="en-GB" sz="2400" dirty="0">
-                <a:solidFill>
-                  <a:schemeClr val="bg1"/>
-                </a:solidFill>
-                <a:latin typeface="APL385 Unicode" panose="020B0709000202000203" pitchFamily="49" charset="0"/>
-              </a:rPr>
-              <a:t>  ⍵ × ∇ ⍵-1   ⍝ call self(⍵-1)</a:t>
-            </a:r>
-          </a:p>
-          <a:p>
-            <a:r>
-              <a:rPr lang="en-GB" sz="2400" dirty="0">
-                <a:solidFill>
-                  <a:schemeClr val="bg1"/>
-                </a:solidFill>
-                <a:latin typeface="APL385 Unicode" panose="020B0709000202000203" pitchFamily="49" charset="0"/>
-              </a:rPr>
-              <a:t>}</a:t>
-            </a:r>
-          </a:p>
-        </p:txBody>
-      </p:sp>
     </p:spTree>
     <p:extLst>
       <p:ext uri="{BB962C8B-B14F-4D97-AF65-F5344CB8AC3E}">
-        <p14:creationId xmlns:p14="http://schemas.microsoft.com/office/powerpoint/2010/main" val="3237066938"/>
+        <p14:creationId xmlns:p14="http://schemas.microsoft.com/office/powerpoint/2010/main" val="1451763254"/>
       </p:ext>
     </p:extLst>
   </p:cSld>
@@ -16047,7 +16110,7 @@
           <p:cNvPr id="2" name="Content Placeholder 1">
             <a:extLst>
               <a:ext uri="{FF2B5EF4-FFF2-40B4-BE49-F238E27FC236}">
-                <a16:creationId xmlns:a16="http://schemas.microsoft.com/office/drawing/2014/main" id="{15A8F58E-0B00-45AA-8356-66D63077C170}"/>
+                <a16:creationId xmlns:a16="http://schemas.microsoft.com/office/drawing/2014/main" id="{5F7E1C02-FA42-4686-064B-7B86FD1825C3}"/>
               </a:ext>
             </a:extLst>
           </p:cNvPr>
@@ -16060,9 +16123,7 @@
         </p:nvSpPr>
         <p:spPr/>
         <p:txBody>
-          <a:bodyPr>
-            <a:normAutofit fontScale="85000" lnSpcReduction="20000"/>
-          </a:bodyPr>
+          <a:bodyPr/>
           <a:lstStyle/>
           <a:p>
             <a:pPr marL="0" indent="0">
@@ -16070,255 +16131,42 @@
             </a:pPr>
             <a:r>
               <a:rPr lang="en-GB" dirty="0"/>
-              <a:t>An error guard is an error number followed by </a:t>
-            </a:r>
-            <a:r>
-              <a:rPr lang="en-GB" b="1" dirty="0">
-                <a:solidFill>
-                  <a:srgbClr val="FF0000"/>
-                </a:solidFill>
-                <a:latin typeface="APL385 Unicode" panose="020B0709000202000203" pitchFamily="49" charset="0"/>
-              </a:rPr>
-              <a:t>::</a:t>
+              <a:t>If you want to clear the last call from the stack you can use "naked" branch (no line number) as in</a:t>
             </a:r>
           </a:p>
           <a:p>
             <a:pPr marL="0" indent="0">
-              <a:spcAft>
-                <a:spcPts val="0"/>
-              </a:spcAft>
               <a:buNone/>
             </a:pPr>
             <a:r>
+              <a:rPr lang="en-GB" dirty="0"/>
+              <a:t>You can use the system </a:t>
+            </a:r>
+            <a:br>
+              <a:rPr lang="en-GB" dirty="0"/>
+            </a:br>
+            <a:r>
+              <a:rPr lang="en-GB" dirty="0"/>
+              <a:t>command </a:t>
+            </a:r>
+            <a:r>
               <a:rPr lang="en-GB" dirty="0">
                 <a:solidFill>
-                  <a:schemeClr val="accent3">
-                    <a:lumMod val="50000"/>
-                  </a:schemeClr>
-                </a:solidFill>
-                <a:latin typeface="APL385 Unicode" panose="020B0709000202000203" pitchFamily="49" charset="0"/>
-              </a:rPr>
-              <a:t>    </a:t>
-            </a:r>
-            <a:r>
-              <a:rPr lang="en-GB" dirty="0">
-                <a:solidFill>
-                  <a:srgbClr val="00B050"/>
-                </a:solidFill>
-                <a:latin typeface="APL385 Unicode" panose="020B0709000202000203" pitchFamily="49" charset="0"/>
-              </a:rPr>
-              <a:t>Div←{</a:t>
+                  <a:srgbClr val="FF6600"/>
+                </a:solidFill>
+                <a:latin typeface="APL385 Unicode" panose="020B0709000202000203" pitchFamily="49" charset="0"/>
+              </a:rPr>
+              <a:t>)SI</a:t>
             </a:r>
           </a:p>
           <a:p>
             <a:pPr marL="0" indent="0">
-              <a:spcAft>
-                <a:spcPts val="0"/>
-              </a:spcAft>
               <a:buNone/>
             </a:pPr>
             <a:r>
-              <a:rPr lang="en-GB" b="1" dirty="0">
-                <a:solidFill>
-                  <a:srgbClr val="00B050"/>
-                </a:solidFill>
-                <a:latin typeface="APL385 Unicode" panose="020B0709000202000203" pitchFamily="49" charset="0"/>
-              </a:rPr>
-              <a:t>        11</a:t>
-            </a:r>
-            <a:r>
-              <a:rPr lang="en-GB" b="1" dirty="0">
-                <a:solidFill>
-                  <a:srgbClr val="FF6600"/>
-                </a:solidFill>
-                <a:latin typeface="APL385 Unicode" panose="020B0709000202000203" pitchFamily="49" charset="0"/>
-              </a:rPr>
-              <a:t>::</a:t>
-            </a:r>
-            <a:r>
-              <a:rPr lang="en-GB" b="1" dirty="0">
-                <a:solidFill>
-                  <a:srgbClr val="00B050"/>
-                </a:solidFill>
-                <a:latin typeface="APL385 Unicode" panose="020B0709000202000203" pitchFamily="49" charset="0"/>
-              </a:rPr>
-              <a:t>'</a:t>
-            </a:r>
-            <a:r>
-              <a:rPr lang="en-GB" dirty="0">
-                <a:solidFill>
-                  <a:srgbClr val="00B050"/>
-                </a:solidFill>
-                <a:latin typeface="APL385 Unicode" panose="020B0709000202000203" pitchFamily="49" charset="0"/>
-              </a:rPr>
-              <a:t>Division by zero'</a:t>
-            </a:r>
-          </a:p>
-          <a:p>
-            <a:pPr marL="0" indent="0">
-              <a:spcAft>
-                <a:spcPts val="0"/>
-              </a:spcAft>
-              <a:buNone/>
-            </a:pPr>
-            <a:r>
-              <a:rPr lang="en-GB" dirty="0">
-                <a:solidFill>
-                  <a:srgbClr val="00B050"/>
-                </a:solidFill>
-                <a:latin typeface="APL385 Unicode" panose="020B0709000202000203" pitchFamily="49" charset="0"/>
-              </a:rPr>
-              <a:t>        ⍺÷⍵</a:t>
-            </a:r>
-          </a:p>
-          <a:p>
-            <a:pPr marL="0" indent="0">
-              <a:spcAft>
-                <a:spcPts val="0"/>
-              </a:spcAft>
-              <a:buNone/>
-            </a:pPr>
-            <a:r>
-              <a:rPr lang="en-GB" dirty="0">
-                <a:solidFill>
-                  <a:srgbClr val="00B050"/>
-                </a:solidFill>
-                <a:latin typeface="APL385 Unicode" panose="020B0709000202000203" pitchFamily="49" charset="0"/>
-              </a:rPr>
-              <a:t>    }</a:t>
-            </a:r>
-          </a:p>
-          <a:p>
-            <a:pPr marL="0" indent="0">
-              <a:spcAft>
-                <a:spcPts val="0"/>
-              </a:spcAft>
-              <a:buNone/>
-            </a:pPr>
-            <a:endParaRPr lang="en-GB" dirty="0">
-              <a:solidFill>
-                <a:schemeClr val="accent3">
-                  <a:lumMod val="50000"/>
-                </a:schemeClr>
-              </a:solidFill>
-              <a:latin typeface="APL385 Unicode" panose="020B0709000202000203" pitchFamily="49" charset="0"/>
-            </a:endParaRPr>
-          </a:p>
-          <a:p>
-            <a:pPr marL="0" indent="0">
-              <a:spcAft>
-                <a:spcPts val="0"/>
-              </a:spcAft>
-              <a:buNone/>
-            </a:pPr>
-            <a:r>
-              <a:rPr lang="en-GB" dirty="0">
-                <a:solidFill>
-                  <a:schemeClr val="accent3">
-                    <a:lumMod val="50000"/>
-                  </a:schemeClr>
-                </a:solidFill>
-                <a:latin typeface="APL385 Unicode" panose="020B0709000202000203" pitchFamily="49" charset="0"/>
-              </a:rPr>
-              <a:t>    </a:t>
-            </a:r>
-            <a:r>
-              <a:rPr lang="en-GB" dirty="0">
-                <a:solidFill>
-                  <a:srgbClr val="00B050"/>
-                </a:solidFill>
-                <a:latin typeface="APL385 Unicode" panose="020B0709000202000203" pitchFamily="49" charset="0"/>
-              </a:rPr>
-              <a:t>4 Div 2</a:t>
-            </a:r>
-          </a:p>
-          <a:p>
-            <a:pPr marL="0" indent="0">
-              <a:spcAft>
-                <a:spcPts val="0"/>
-              </a:spcAft>
-              <a:buNone/>
-            </a:pPr>
-            <a:r>
-              <a:rPr lang="en-GB" dirty="0">
-                <a:solidFill>
-                  <a:schemeClr val="accent3">
-                    <a:lumMod val="50000"/>
-                  </a:schemeClr>
-                </a:solidFill>
-                <a:latin typeface="APL385 Unicode" panose="020B0709000202000203" pitchFamily="49" charset="0"/>
-              </a:rPr>
-              <a:t>2</a:t>
-            </a:r>
-          </a:p>
-          <a:p>
-            <a:pPr marL="0" indent="0">
-              <a:spcAft>
-                <a:spcPts val="0"/>
-              </a:spcAft>
-              <a:buNone/>
-            </a:pPr>
-            <a:endParaRPr lang="en-GB" dirty="0">
-              <a:solidFill>
-                <a:schemeClr val="accent3">
-                  <a:lumMod val="50000"/>
-                </a:schemeClr>
-              </a:solidFill>
-              <a:latin typeface="APL385 Unicode" panose="020B0709000202000203" pitchFamily="49" charset="0"/>
-            </a:endParaRPr>
-          </a:p>
-          <a:p>
-            <a:pPr marL="0" indent="0">
-              <a:spcAft>
-                <a:spcPts val="0"/>
-              </a:spcAft>
-              <a:buNone/>
-            </a:pPr>
-            <a:r>
-              <a:rPr lang="en-GB" dirty="0">
-                <a:solidFill>
-                  <a:schemeClr val="accent3">
-                    <a:lumMod val="50000"/>
-                  </a:schemeClr>
-                </a:solidFill>
-                <a:latin typeface="APL385 Unicode" panose="020B0709000202000203" pitchFamily="49" charset="0"/>
-              </a:rPr>
-              <a:t>    </a:t>
-            </a:r>
-            <a:r>
-              <a:rPr lang="en-GB" dirty="0">
-                <a:solidFill>
-                  <a:srgbClr val="00B050"/>
-                </a:solidFill>
-                <a:latin typeface="APL385 Unicode" panose="020B0709000202000203" pitchFamily="49" charset="0"/>
-              </a:rPr>
-              <a:t>4 Div 0</a:t>
-            </a:r>
-          </a:p>
-          <a:p>
-            <a:pPr marL="0" indent="0">
-              <a:spcAft>
-                <a:spcPts val="0"/>
-              </a:spcAft>
-              <a:buNone/>
-            </a:pPr>
-            <a:r>
-              <a:rPr lang="en-GB" dirty="0">
-                <a:solidFill>
-                  <a:schemeClr val="accent3">
-                    <a:lumMod val="50000"/>
-                  </a:schemeClr>
-                </a:solidFill>
-                <a:latin typeface="APL385 Unicode" panose="020B0709000202000203" pitchFamily="49" charset="0"/>
-              </a:rPr>
-              <a:t>Division by zero</a:t>
-            </a:r>
-            <a:endParaRPr lang="en-GB" b="1" dirty="0">
-              <a:solidFill>
-                <a:srgbClr val="FF0000"/>
-              </a:solidFill>
-              <a:latin typeface="APL385 Unicode" panose="020B0709000202000203" pitchFamily="49" charset="0"/>
-            </a:endParaRPr>
+              <a:rPr lang="en-GB" dirty="0"/>
+              <a:t>to view the stack:</a:t>
+            </a:r>
           </a:p>
         </p:txBody>
       </p:sp>
@@ -16327,7 +16175,7 @@
           <p:cNvPr id="3" name="Title 2">
             <a:extLst>
               <a:ext uri="{FF2B5EF4-FFF2-40B4-BE49-F238E27FC236}">
-                <a16:creationId xmlns:a16="http://schemas.microsoft.com/office/drawing/2014/main" id="{927CCA16-3B19-C8C3-F400-CA50168E61D6}"/>
+                <a16:creationId xmlns:a16="http://schemas.microsoft.com/office/drawing/2014/main" id="{C99F1493-2CBB-0083-0B18-CAE658B6814E}"/>
               </a:ext>
             </a:extLst>
           </p:cNvPr>
@@ -16344,20 +16192,21 @@
           <a:lstStyle/>
           <a:p>
             <a:r>
-              <a:rPr lang="en-GB" dirty="0" err="1"/>
-              <a:t>dfn</a:t>
-            </a:r>
-            <a:r>
-              <a:rPr lang="en-GB" dirty="0"/>
-              <a:t> </a:t>
-            </a:r>
-            <a:r>
-              <a:rPr lang="en-GB" b="1" i="1" dirty="0">
+              <a:rPr lang="en-GB" dirty="0"/>
+              <a:t>Naked Branch (</a:t>
+            </a:r>
+            <a:r>
+              <a:rPr lang="en-GB" dirty="0">
                 <a:solidFill>
                   <a:srgbClr val="FF6600"/>
                 </a:solidFill>
-              </a:rPr>
-              <a:t>error guards</a:t>
+                <a:latin typeface="APL385 Unicode" panose="020B0709000202000203" pitchFamily="49" charset="0"/>
+              </a:rPr>
+              <a:t>→</a:t>
+            </a:r>
+            <a:r>
+              <a:rPr lang="en-GB" dirty="0"/>
+              <a:t>)</a:t>
             </a:r>
           </a:p>
         </p:txBody>
@@ -16367,7 +16216,7 @@
           <p:cNvPr id="4" name="Media Placeholder 3">
             <a:extLst>
               <a:ext uri="{FF2B5EF4-FFF2-40B4-BE49-F238E27FC236}">
-                <a16:creationId xmlns:a16="http://schemas.microsoft.com/office/drawing/2014/main" id="{A0579A24-A886-E343-AFA2-05196C81FF8B}"/>
+                <a16:creationId xmlns:a16="http://schemas.microsoft.com/office/drawing/2014/main" id="{7615996E-CFA3-FBCC-1D78-7B5A9DBB7348}"/>
               </a:ext>
             </a:extLst>
           </p:cNvPr>
@@ -16390,7 +16239,7 @@
     </p:spTree>
     <p:extLst>
       <p:ext uri="{BB962C8B-B14F-4D97-AF65-F5344CB8AC3E}">
-        <p14:creationId xmlns:p14="http://schemas.microsoft.com/office/powerpoint/2010/main" val="1451763254"/>
+        <p14:creationId xmlns:p14="http://schemas.microsoft.com/office/powerpoint/2010/main" val="2165630061"/>
       </p:ext>
     </p:extLst>
   </p:cSld>
@@ -16677,7 +16526,7 @@
           <p:cNvPr id="2" name="Content Placeholder 1">
             <a:extLst>
               <a:ext uri="{FF2B5EF4-FFF2-40B4-BE49-F238E27FC236}">
-                <a16:creationId xmlns:a16="http://schemas.microsoft.com/office/drawing/2014/main" id="{5F7E1C02-FA42-4686-064B-7B86FD1825C3}"/>
+                <a16:creationId xmlns:a16="http://schemas.microsoft.com/office/drawing/2014/main" id="{57102688-5B94-289C-F615-1A19C194E3CF}"/>
               </a:ext>
             </a:extLst>
           </p:cNvPr>
@@ -16690,7 +16539,9 @@
         </p:nvSpPr>
         <p:spPr/>
         <p:txBody>
-          <a:bodyPr/>
+          <a:bodyPr>
+            <a:normAutofit/>
+          </a:bodyPr>
           <a:lstStyle/>
           <a:p>
             <a:pPr marL="0" indent="0">
@@ -16698,41 +16549,55 @@
             </a:pPr>
             <a:r>
               <a:rPr lang="en-GB" dirty="0"/>
-              <a:t>If you want to clear the last call from the stack you can use "naked" branch (no line number) as in</a:t>
-            </a:r>
-          </a:p>
-          <a:p>
-            <a:pPr marL="0" indent="0">
-              <a:buNone/>
-            </a:pPr>
-            <a:r>
-              <a:rPr lang="en-GB" dirty="0"/>
-              <a:t>You can use the system </a:t>
+              <a:t>If you need to clear the stack completely you can use the system command </a:t>
+            </a:r>
+            <a:r>
+              <a:rPr lang="en-GB" dirty="0">
+                <a:solidFill>
+                  <a:srgbClr val="FF6600"/>
+                </a:solidFill>
+                <a:latin typeface="APL385 Unicode" panose="020B0709000202000203" pitchFamily="49" charset="0"/>
+              </a:rPr>
+              <a:t>)RESET</a:t>
+            </a:r>
+            <a:r>
+              <a:rPr lang="en-GB" dirty="0"/>
+              <a:t>:</a:t>
             </a:r>
             <a:br>
               <a:rPr lang="en-GB" dirty="0"/>
             </a:br>
-            <a:r>
-              <a:rPr lang="en-GB" dirty="0"/>
-              <a:t>command </a:t>
-            </a:r>
+            <a:br>
+              <a:rPr lang="en-GB" dirty="0"/>
+            </a:br>
+            <a:br>
+              <a:rPr lang="en-GB" dirty="0"/>
+            </a:br>
             <a:r>
               <a:rPr lang="en-GB" dirty="0">
-                <a:solidFill>
-                  <a:srgbClr val="FF6600"/>
-                </a:solidFill>
-                <a:latin typeface="APL385 Unicode" panose="020B0709000202000203" pitchFamily="49" charset="0"/>
-              </a:rPr>
-              <a:t>)SI</a:t>
-            </a:r>
-          </a:p>
-          <a:p>
-            <a:pPr marL="0" indent="0">
-              <a:buNone/>
-            </a:pPr>
-            <a:r>
-              <a:rPr lang="en-GB" dirty="0"/>
-              <a:t>to view the stack:</a:t>
+                <a:latin typeface="APL385 Unicode" panose="020B0709000202000203" pitchFamily="49" charset="0"/>
+              </a:rPr>
+              <a:t>)RESET</a:t>
+            </a:r>
+            <a:r>
+              <a:rPr lang="en-GB" dirty="0"/>
+              <a:t> takes an argument of how many lines to remove (+</a:t>
+            </a:r>
+            <a:r>
+              <a:rPr lang="en-GB" dirty="0" err="1"/>
+              <a:t>ve</a:t>
+            </a:r>
+            <a:r>
+              <a:rPr lang="en-GB" dirty="0"/>
+              <a:t>) or keep (-</a:t>
+            </a:r>
+            <a:r>
+              <a:rPr lang="en-GB" dirty="0" err="1"/>
+              <a:t>ve</a:t>
+            </a:r>
+            <a:r>
+              <a:rPr lang="en-GB" dirty="0"/>
+              <a:t>)</a:t>
             </a:r>
           </a:p>
         </p:txBody>
@@ -16742,7 +16607,7 @@
           <p:cNvPr id="3" name="Title 2">
             <a:extLst>
               <a:ext uri="{FF2B5EF4-FFF2-40B4-BE49-F238E27FC236}">
-                <a16:creationId xmlns:a16="http://schemas.microsoft.com/office/drawing/2014/main" id="{C99F1493-2CBB-0083-0B18-CAE658B6814E}"/>
+                <a16:creationId xmlns:a16="http://schemas.microsoft.com/office/drawing/2014/main" id="{8EEFA175-4B7F-444B-B473-586D3C0F0FFC}"/>
               </a:ext>
             </a:extLst>
           </p:cNvPr>
@@ -16760,20 +16625,7 @@
           <a:p>
             <a:r>
               <a:rPr lang="en-GB" dirty="0"/>
-              <a:t>Naked Branch (</a:t>
-            </a:r>
-            <a:r>
-              <a:rPr lang="en-GB" dirty="0">
-                <a:solidFill>
-                  <a:srgbClr val="FF6600"/>
-                </a:solidFill>
-                <a:latin typeface="APL385 Unicode" panose="020B0709000202000203" pitchFamily="49" charset="0"/>
-              </a:rPr>
-              <a:t>→</a:t>
-            </a:r>
-            <a:r>
-              <a:rPr lang="en-GB" dirty="0"/>
-              <a:t>)</a:t>
+              <a:t>)RESET</a:t>
             </a:r>
           </a:p>
         </p:txBody>
@@ -16783,7 +16635,7 @@
           <p:cNvPr id="4" name="Media Placeholder 3">
             <a:extLst>
               <a:ext uri="{FF2B5EF4-FFF2-40B4-BE49-F238E27FC236}">
-                <a16:creationId xmlns:a16="http://schemas.microsoft.com/office/drawing/2014/main" id="{7615996E-CFA3-FBCC-1D78-7B5A9DBB7348}"/>
+                <a16:creationId xmlns:a16="http://schemas.microsoft.com/office/drawing/2014/main" id="{0D4F55AC-BE7F-BB75-D827-81D16D3794DB}"/>
               </a:ext>
             </a:extLst>
           </p:cNvPr>
@@ -16806,7 +16658,7 @@
     </p:spTree>
     <p:extLst>
       <p:ext uri="{BB962C8B-B14F-4D97-AF65-F5344CB8AC3E}">
-        <p14:creationId xmlns:p14="http://schemas.microsoft.com/office/powerpoint/2010/main" val="2165630061"/>
+        <p14:creationId xmlns:p14="http://schemas.microsoft.com/office/powerpoint/2010/main" val="462044949"/>
       </p:ext>
     </p:extLst>
   </p:cSld>
@@ -16838,170 +16690,6 @@
           <p:cNvPr id="2" name="Content Placeholder 1">
             <a:extLst>
               <a:ext uri="{FF2B5EF4-FFF2-40B4-BE49-F238E27FC236}">
-                <a16:creationId xmlns:a16="http://schemas.microsoft.com/office/drawing/2014/main" id="{57102688-5B94-289C-F615-1A19C194E3CF}"/>
-              </a:ext>
-            </a:extLst>
-          </p:cNvPr>
-          <p:cNvSpPr>
-            <a:spLocks noGrp="1"/>
-          </p:cNvSpPr>
-          <p:nvPr>
-            <p:ph idx="1"/>
-          </p:nvPr>
-        </p:nvSpPr>
-        <p:spPr/>
-        <p:txBody>
-          <a:bodyPr>
-            <a:normAutofit/>
-          </a:bodyPr>
-          <a:lstStyle/>
-          <a:p>
-            <a:pPr marL="0" indent="0">
-              <a:buNone/>
-            </a:pPr>
-            <a:r>
-              <a:rPr lang="en-GB" dirty="0"/>
-              <a:t>If you need to clear the stack completely you can use the system command </a:t>
-            </a:r>
-            <a:r>
-              <a:rPr lang="en-GB" dirty="0">
-                <a:solidFill>
-                  <a:srgbClr val="FF6600"/>
-                </a:solidFill>
-                <a:latin typeface="APL385 Unicode" panose="020B0709000202000203" pitchFamily="49" charset="0"/>
-              </a:rPr>
-              <a:t>)RESET</a:t>
-            </a:r>
-            <a:r>
-              <a:rPr lang="en-GB" dirty="0"/>
-              <a:t>:</a:t>
-            </a:r>
-            <a:br>
-              <a:rPr lang="en-GB" dirty="0"/>
-            </a:br>
-            <a:br>
-              <a:rPr lang="en-GB" dirty="0"/>
-            </a:br>
-            <a:br>
-              <a:rPr lang="en-GB" dirty="0"/>
-            </a:br>
-            <a:r>
-              <a:rPr lang="en-GB" dirty="0">
-                <a:latin typeface="APL385 Unicode" panose="020B0709000202000203" pitchFamily="49" charset="0"/>
-              </a:rPr>
-              <a:t>)RESET</a:t>
-            </a:r>
-            <a:r>
-              <a:rPr lang="en-GB" dirty="0"/>
-              <a:t> takes an argument of how many lines to remove (+</a:t>
-            </a:r>
-            <a:r>
-              <a:rPr lang="en-GB" dirty="0" err="1"/>
-              <a:t>ve</a:t>
-            </a:r>
-            <a:r>
-              <a:rPr lang="en-GB" dirty="0"/>
-              <a:t>) or keep (-</a:t>
-            </a:r>
-            <a:r>
-              <a:rPr lang="en-GB" dirty="0" err="1"/>
-              <a:t>ve</a:t>
-            </a:r>
-            <a:r>
-              <a:rPr lang="en-GB" dirty="0"/>
-              <a:t>)</a:t>
-            </a:r>
-          </a:p>
-        </p:txBody>
-      </p:sp>
-      <p:sp>
-        <p:nvSpPr>
-          <p:cNvPr id="3" name="Title 2">
-            <a:extLst>
-              <a:ext uri="{FF2B5EF4-FFF2-40B4-BE49-F238E27FC236}">
-                <a16:creationId xmlns:a16="http://schemas.microsoft.com/office/drawing/2014/main" id="{8EEFA175-4B7F-444B-B473-586D3C0F0FFC}"/>
-              </a:ext>
-            </a:extLst>
-          </p:cNvPr>
-          <p:cNvSpPr>
-            <a:spLocks noGrp="1"/>
-          </p:cNvSpPr>
-          <p:nvPr>
-            <p:ph type="title"/>
-          </p:nvPr>
-        </p:nvSpPr>
-        <p:spPr/>
-        <p:txBody>
-          <a:bodyPr/>
-          <a:lstStyle/>
-          <a:p>
-            <a:r>
-              <a:rPr lang="en-GB" dirty="0"/>
-              <a:t>)RESET</a:t>
-            </a:r>
-          </a:p>
-        </p:txBody>
-      </p:sp>
-      <p:sp>
-        <p:nvSpPr>
-          <p:cNvPr id="4" name="Media Placeholder 3">
-            <a:extLst>
-              <a:ext uri="{FF2B5EF4-FFF2-40B4-BE49-F238E27FC236}">
-                <a16:creationId xmlns:a16="http://schemas.microsoft.com/office/drawing/2014/main" id="{0D4F55AC-BE7F-BB75-D827-81D16D3794DB}"/>
-              </a:ext>
-            </a:extLst>
-          </p:cNvPr>
-          <p:cNvSpPr>
-            <a:spLocks noGrp="1"/>
-          </p:cNvSpPr>
-          <p:nvPr>
-            <p:ph type="media" sz="quarter" idx="11"/>
-          </p:nvPr>
-        </p:nvSpPr>
-        <p:spPr/>
-        <p:txBody>
-          <a:bodyPr/>
-          <a:lstStyle/>
-          <a:p>
-            <a:endParaRPr lang="en-GB"/>
-          </a:p>
-        </p:txBody>
-      </p:sp>
-    </p:spTree>
-    <p:extLst>
-      <p:ext uri="{BB962C8B-B14F-4D97-AF65-F5344CB8AC3E}">
-        <p14:creationId xmlns:p14="http://schemas.microsoft.com/office/powerpoint/2010/main" val="462044949"/>
-      </p:ext>
-    </p:extLst>
-  </p:cSld>
-  <p:clrMapOvr>
-    <a:masterClrMapping/>
-  </p:clrMapOvr>
-</p:sld>
-</file>
-
-<file path=ppt/slides/slide52.xml><?xml version="1.0" encoding="utf-8"?>
-<p:sld xmlns:a="http://schemas.openxmlformats.org/drawingml/2006/main" xmlns:r="http://schemas.openxmlformats.org/officeDocument/2006/relationships" xmlns:p="http://schemas.openxmlformats.org/presentationml/2006/main">
-  <p:cSld>
-    <p:spTree>
-      <p:nvGrpSpPr>
-        <p:cNvPr id="1" name=""/>
-        <p:cNvGrpSpPr/>
-        <p:nvPr/>
-      </p:nvGrpSpPr>
-      <p:grpSpPr>
-        <a:xfrm>
-          <a:off x="0" y="0"/>
-          <a:ext cx="0" cy="0"/>
-          <a:chOff x="0" y="0"/>
-          <a:chExt cx="0" cy="0"/>
-        </a:xfrm>
-      </p:grpSpPr>
-      <p:sp>
-        <p:nvSpPr>
-          <p:cNvPr id="2" name="Content Placeholder 1">
-            <a:extLst>
-              <a:ext uri="{FF2B5EF4-FFF2-40B4-BE49-F238E27FC236}">
                 <a16:creationId xmlns:a16="http://schemas.microsoft.com/office/drawing/2014/main" id="{BFB41419-38C4-39DC-953E-2693F8CF368E}"/>
               </a:ext>
             </a:extLst>
@@ -17121,7 +16809,7 @@
 </p:sld>
 </file>
 
-<file path=ppt/slides/slide53.xml><?xml version="1.0" encoding="utf-8"?>
+<file path=ppt/slides/slide52.xml><?xml version="1.0" encoding="utf-8"?>
 <p:sld xmlns:a="http://schemas.openxmlformats.org/drawingml/2006/main" xmlns:r="http://schemas.openxmlformats.org/officeDocument/2006/relationships" xmlns:p="http://schemas.openxmlformats.org/presentationml/2006/main">
   <p:cSld>
     <p:spTree>
@@ -17289,7 +16977,7 @@
 </p:sld>
 </file>
 
-<file path=ppt/slides/slide54.xml><?xml version="1.0" encoding="utf-8"?>
+<file path=ppt/slides/slide53.xml><?xml version="1.0" encoding="utf-8"?>
 <p:sld xmlns:a="http://schemas.openxmlformats.org/drawingml/2006/main" xmlns:r="http://schemas.openxmlformats.org/officeDocument/2006/relationships" xmlns:p="http://schemas.openxmlformats.org/presentationml/2006/main">
   <p:cSld>
     <p:spTree>
@@ -17410,7 +17098,7 @@
 </p:sld>
 </file>
 
-<file path=ppt/slides/slide55.xml><?xml version="1.0" encoding="utf-8"?>
+<file path=ppt/slides/slide54.xml><?xml version="1.0" encoding="utf-8"?>
 <p:sld xmlns:a="http://schemas.openxmlformats.org/drawingml/2006/main" xmlns:r="http://schemas.openxmlformats.org/officeDocument/2006/relationships" xmlns:p="http://schemas.openxmlformats.org/presentationml/2006/main">
   <p:cSld>
     <p:spTree>

--- a/slides/APL_Bootcamp-part-6.pptx
+++ b/slides/APL_Bootcamp-part-6.pptx
@@ -17136,6 +17136,10 @@
           <a:bodyPr/>
           <a:lstStyle/>
           <a:p>
+            <a:pPr>
+              <a:buFont typeface="+mj-lt"/>
+              <a:buAutoNum type="arabicPeriod"/>
+            </a:pPr>
             <a:r>
               <a:rPr lang="en-GB" dirty="0"/>
               <a:t>Write a </a:t>
@@ -17150,6 +17154,10 @@
             </a:r>
           </a:p>
           <a:p>
+            <a:pPr>
+              <a:buFont typeface="+mj-lt"/>
+              <a:buAutoNum type="arabicPeriod"/>
+            </a:pPr>
             <a:r>
               <a:rPr lang="en-GB" dirty="0"/>
               <a:t>Write a </a:t>
@@ -17174,6 +17182,10 @@
             </a:r>
           </a:p>
           <a:p>
+            <a:pPr>
+              <a:buFont typeface="+mj-lt"/>
+              <a:buAutoNum type="arabicPeriod"/>
+            </a:pPr>
             <a:r>
               <a:rPr lang="en-GB" dirty="0"/>
               <a:t>Write a </a:t>
@@ -17208,6 +17220,10 @@
             </a:r>
           </a:p>
           <a:p>
+            <a:pPr>
+              <a:buFont typeface="+mj-lt"/>
+              <a:buAutoNum type="arabicPeriod"/>
+            </a:pPr>
             <a:r>
               <a:rPr lang="en-GB" dirty="0"/>
               <a:t>Write a </a:t>
